--- a/slides/monday_morning/Steve_Rozen_bioinformatics-on-ramp_2026_08_03.pptx
+++ b/slides/monday_morning/Steve_Rozen_bioinformatics-on-ramp_2026_08_03.pptx
@@ -402,7 +402,7 @@
             <a:pPr indent="0" algn="r">
               <a:buNone/>
             </a:pPr>
-            <a:fld id="{34AD5169-065A-464E-A698-A5A4CCDEAB55}" type="slidenum">
+            <a:fld id="{5B9E4769-E100-4FFD-B380-5F592AC1E003}" type="slidenum">
               <a:rPr lang="en-US" sz="1400" b="0" u="none" strike="noStrike">
                 <a:solidFill>
                   <a:srgbClr val="000000"/>
@@ -449,7 +449,7 @@
       </p:grpSpPr>
       <p:sp>
         <p:nvSpPr>
-          <p:cNvPr id="392" name="PlaceHolder 1"/>
+          <p:cNvPr id="393" name="PlaceHolder 1"/>
           <p:cNvSpPr>
             <a:spLocks noGrp="1"/>
           </p:cNvSpPr>
@@ -460,7 +460,7 @@
         <p:spPr>
           <a:xfrm>
             <a:off x="685800" y="1143000"/>
-            <a:ext cx="5482800" cy="3082680"/>
+            <a:ext cx="5482440" cy="3082320"/>
           </a:xfrm>
           <a:prstGeom prst="rect">
             <a:avLst/>
@@ -472,7 +472,7 @@
       </p:sp>
       <p:sp>
         <p:nvSpPr>
-          <p:cNvPr id="393" name="PlaceHolder 2"/>
+          <p:cNvPr id="394" name="PlaceHolder 2"/>
           <p:cNvSpPr>
             <a:spLocks noGrp="1"/>
           </p:cNvSpPr>
@@ -483,7 +483,7 @@
         <p:spPr>
           <a:xfrm>
             <a:off x="685800" y="4400640"/>
-            <a:ext cx="5482800" cy="3596760"/>
+            <a:ext cx="5482440" cy="3596400"/>
           </a:xfrm>
           <a:prstGeom prst="rect">
             <a:avLst/>
@@ -514,7 +514,7 @@
       </p:sp>
       <p:sp>
         <p:nvSpPr>
-          <p:cNvPr id="394" name="PlaceHolder 3"/>
+          <p:cNvPr id="395" name="PlaceHolder 3"/>
           <p:cNvSpPr>
             <a:spLocks noGrp="1"/>
           </p:cNvSpPr>
@@ -525,7 +525,7 @@
         <p:spPr>
           <a:xfrm>
             <a:off x="3884760" y="8685360"/>
-            <a:ext cx="2968200" cy="455040"/>
+            <a:ext cx="2967840" cy="454680"/>
           </a:xfrm>
           <a:prstGeom prst="rect">
             <a:avLst/>
@@ -569,7 +569,7 @@
                 <a:tab pos="0" algn="l"/>
               </a:tabLst>
             </a:pPr>
-            <a:fld id="{D2F40875-8F38-4583-9D26-B75BFCBE79E1}" type="slidenum">
+            <a:fld id="{294D10E5-46B0-4039-807D-FA698229DA78}" type="slidenum">
               <a:rPr lang="en-US" sz="1200" b="0" u="none" strike="noStrike">
                 <a:solidFill>
                   <a:schemeClr val="dk1"/>
@@ -616,7 +616,7 @@
       </p:grpSpPr>
       <p:sp>
         <p:nvSpPr>
-          <p:cNvPr id="395" name="PlaceHolder 1"/>
+          <p:cNvPr id="396" name="PlaceHolder 1"/>
           <p:cNvSpPr>
             <a:spLocks noGrp="1"/>
           </p:cNvSpPr>
@@ -627,7 +627,7 @@
         <p:spPr>
           <a:xfrm>
             <a:off x="685800" y="1143000"/>
-            <a:ext cx="5482800" cy="3082680"/>
+            <a:ext cx="5482440" cy="3082320"/>
           </a:xfrm>
           <a:prstGeom prst="rect">
             <a:avLst/>
@@ -639,7 +639,7 @@
       </p:sp>
       <p:sp>
         <p:nvSpPr>
-          <p:cNvPr id="396" name="PlaceHolder 2"/>
+          <p:cNvPr id="397" name="PlaceHolder 2"/>
           <p:cNvSpPr>
             <a:spLocks noGrp="1"/>
           </p:cNvSpPr>
@@ -650,7 +650,7 @@
         <p:spPr>
           <a:xfrm>
             <a:off x="685800" y="4400640"/>
-            <a:ext cx="5482800" cy="3596760"/>
+            <a:ext cx="5482440" cy="3596400"/>
           </a:xfrm>
           <a:prstGeom prst="rect">
             <a:avLst/>
@@ -681,7 +681,7 @@
       </p:sp>
       <p:sp>
         <p:nvSpPr>
-          <p:cNvPr id="397" name="PlaceHolder 3"/>
+          <p:cNvPr id="398" name="PlaceHolder 3"/>
           <p:cNvSpPr>
             <a:spLocks noGrp="1"/>
           </p:cNvSpPr>
@@ -692,7 +692,7 @@
         <p:spPr>
           <a:xfrm>
             <a:off x="3884760" y="8685360"/>
-            <a:ext cx="2968200" cy="455040"/>
+            <a:ext cx="2967840" cy="454680"/>
           </a:xfrm>
           <a:prstGeom prst="rect">
             <a:avLst/>
@@ -736,7 +736,7 @@
                 <a:tab pos="0" algn="l"/>
               </a:tabLst>
             </a:pPr>
-            <a:fld id="{1A95CA93-5F07-44D2-A73A-98A04A5E1CF8}" type="slidenum">
+            <a:fld id="{8953E484-C663-418B-904F-E58DBCE4DEAB}" type="slidenum">
               <a:rPr lang="en-US" sz="1200" b="0" u="none" strike="noStrike">
                 <a:solidFill>
                   <a:schemeClr val="dk1"/>
@@ -783,7 +783,7 @@
       </p:grpSpPr>
       <p:sp>
         <p:nvSpPr>
-          <p:cNvPr id="398" name="PlaceHolder 1"/>
+          <p:cNvPr id="399" name="PlaceHolder 1"/>
           <p:cNvSpPr>
             <a:spLocks noGrp="1"/>
           </p:cNvSpPr>
@@ -794,7 +794,7 @@
         <p:spPr>
           <a:xfrm>
             <a:off x="685800" y="1143000"/>
-            <a:ext cx="5482800" cy="3082680"/>
+            <a:ext cx="5482440" cy="3082320"/>
           </a:xfrm>
           <a:prstGeom prst="rect">
             <a:avLst/>
@@ -806,7 +806,7 @@
       </p:sp>
       <p:sp>
         <p:nvSpPr>
-          <p:cNvPr id="399" name="PlaceHolder 2"/>
+          <p:cNvPr id="400" name="PlaceHolder 2"/>
           <p:cNvSpPr>
             <a:spLocks noGrp="1"/>
           </p:cNvSpPr>
@@ -817,7 +817,7 @@
         <p:spPr>
           <a:xfrm>
             <a:off x="685800" y="4400640"/>
-            <a:ext cx="5482800" cy="3596760"/>
+            <a:ext cx="5482440" cy="3596400"/>
           </a:xfrm>
           <a:prstGeom prst="rect">
             <a:avLst/>
@@ -848,7 +848,7 @@
       </p:sp>
       <p:sp>
         <p:nvSpPr>
-          <p:cNvPr id="400" name="PlaceHolder 3"/>
+          <p:cNvPr id="401" name="PlaceHolder 3"/>
           <p:cNvSpPr>
             <a:spLocks noGrp="1"/>
           </p:cNvSpPr>
@@ -859,7 +859,7 @@
         <p:spPr>
           <a:xfrm>
             <a:off x="3884760" y="8685360"/>
-            <a:ext cx="2968200" cy="455040"/>
+            <a:ext cx="2967840" cy="454680"/>
           </a:xfrm>
           <a:prstGeom prst="rect">
             <a:avLst/>
@@ -903,7 +903,7 @@
                 <a:tab pos="0" algn="l"/>
               </a:tabLst>
             </a:pPr>
-            <a:fld id="{9F41D216-4869-435A-A36A-08038B93AAE7}" type="slidenum">
+            <a:fld id="{EBCEEC71-BB53-4797-AEA9-3ED248D3A1F5}" type="slidenum">
               <a:rPr lang="en-US" sz="1200" b="0" u="none" strike="noStrike">
                 <a:solidFill>
                   <a:schemeClr val="dk1"/>
@@ -950,7 +950,7 @@
       </p:grpSpPr>
       <p:sp>
         <p:nvSpPr>
-          <p:cNvPr id="401" name="PlaceHolder 1"/>
+          <p:cNvPr id="402" name="PlaceHolder 1"/>
           <p:cNvSpPr>
             <a:spLocks noGrp="1"/>
           </p:cNvSpPr>
@@ -961,7 +961,7 @@
         <p:spPr>
           <a:xfrm>
             <a:off x="685800" y="1143000"/>
-            <a:ext cx="5482800" cy="3082680"/>
+            <a:ext cx="5482440" cy="3082320"/>
           </a:xfrm>
           <a:prstGeom prst="rect">
             <a:avLst/>
@@ -973,7 +973,7 @@
       </p:sp>
       <p:sp>
         <p:nvSpPr>
-          <p:cNvPr id="402" name="PlaceHolder 2"/>
+          <p:cNvPr id="403" name="PlaceHolder 2"/>
           <p:cNvSpPr>
             <a:spLocks noGrp="1"/>
           </p:cNvSpPr>
@@ -984,7 +984,7 @@
         <p:spPr>
           <a:xfrm>
             <a:off x="685800" y="4400640"/>
-            <a:ext cx="5482800" cy="3596760"/>
+            <a:ext cx="5482440" cy="3596400"/>
           </a:xfrm>
           <a:prstGeom prst="rect">
             <a:avLst/>
@@ -1015,7 +1015,7 @@
       </p:sp>
       <p:sp>
         <p:nvSpPr>
-          <p:cNvPr id="403" name="PlaceHolder 3"/>
+          <p:cNvPr id="404" name="PlaceHolder 3"/>
           <p:cNvSpPr>
             <a:spLocks noGrp="1"/>
           </p:cNvSpPr>
@@ -1026,7 +1026,7 @@
         <p:spPr>
           <a:xfrm>
             <a:off x="3884760" y="8685360"/>
-            <a:ext cx="2968200" cy="455040"/>
+            <a:ext cx="2967840" cy="454680"/>
           </a:xfrm>
           <a:prstGeom prst="rect">
             <a:avLst/>
@@ -1070,7 +1070,7 @@
                 <a:tab pos="0" algn="l"/>
               </a:tabLst>
             </a:pPr>
-            <a:fld id="{E91ADB2C-F6FC-40B5-93E4-0AA50A86BC70}" type="slidenum">
+            <a:fld id="{C9017DC0-153C-4D07-A5FB-52BFAE05B850}" type="slidenum">
               <a:rPr lang="en-US" sz="1200" b="0" u="none" strike="noStrike">
                 <a:solidFill>
                   <a:schemeClr val="dk1"/>
@@ -1117,7 +1117,7 @@
       </p:grpSpPr>
       <p:sp>
         <p:nvSpPr>
-          <p:cNvPr id="404" name="PlaceHolder 1"/>
+          <p:cNvPr id="405" name="PlaceHolder 1"/>
           <p:cNvSpPr>
             <a:spLocks noGrp="1"/>
           </p:cNvSpPr>
@@ -1128,7 +1128,7 @@
         <p:spPr>
           <a:xfrm>
             <a:off x="685800" y="1143000"/>
-            <a:ext cx="5482800" cy="3082680"/>
+            <a:ext cx="5482440" cy="3082320"/>
           </a:xfrm>
           <a:prstGeom prst="rect">
             <a:avLst/>
@@ -1140,7 +1140,7 @@
       </p:sp>
       <p:sp>
         <p:nvSpPr>
-          <p:cNvPr id="405" name="PlaceHolder 2"/>
+          <p:cNvPr id="406" name="PlaceHolder 2"/>
           <p:cNvSpPr>
             <a:spLocks noGrp="1"/>
           </p:cNvSpPr>
@@ -1151,7 +1151,7 @@
         <p:spPr>
           <a:xfrm>
             <a:off x="685800" y="4400640"/>
-            <a:ext cx="5482800" cy="3596760"/>
+            <a:ext cx="5482440" cy="3596400"/>
           </a:xfrm>
           <a:prstGeom prst="rect">
             <a:avLst/>
@@ -1182,7 +1182,7 @@
       </p:sp>
       <p:sp>
         <p:nvSpPr>
-          <p:cNvPr id="406" name="PlaceHolder 3"/>
+          <p:cNvPr id="407" name="PlaceHolder 3"/>
           <p:cNvSpPr>
             <a:spLocks noGrp="1"/>
           </p:cNvSpPr>
@@ -1193,7 +1193,7 @@
         <p:spPr>
           <a:xfrm>
             <a:off x="3884760" y="8685360"/>
-            <a:ext cx="2968200" cy="455040"/>
+            <a:ext cx="2967840" cy="454680"/>
           </a:xfrm>
           <a:prstGeom prst="rect">
             <a:avLst/>
@@ -1237,7 +1237,7 @@
                 <a:tab pos="0" algn="l"/>
               </a:tabLst>
             </a:pPr>
-            <a:fld id="{06A5348A-3C1A-4307-A026-EADF936FF0D0}" type="slidenum">
+            <a:fld id="{46C5020E-FF5B-44AF-82EE-4A6ADAFC1257}" type="slidenum">
               <a:rPr lang="en-US" sz="1200" b="0" u="none" strike="noStrike">
                 <a:solidFill>
                   <a:schemeClr val="dk1"/>
@@ -1284,7 +1284,7 @@
       </p:grpSpPr>
       <p:sp>
         <p:nvSpPr>
-          <p:cNvPr id="407" name="PlaceHolder 1"/>
+          <p:cNvPr id="408" name="PlaceHolder 1"/>
           <p:cNvSpPr>
             <a:spLocks noGrp="1"/>
           </p:cNvSpPr>
@@ -1295,7 +1295,7 @@
         <p:spPr>
           <a:xfrm>
             <a:off x="685800" y="1143000"/>
-            <a:ext cx="5482800" cy="3082680"/>
+            <a:ext cx="5482440" cy="3082320"/>
           </a:xfrm>
           <a:prstGeom prst="rect">
             <a:avLst/>
@@ -1307,7 +1307,7 @@
       </p:sp>
       <p:sp>
         <p:nvSpPr>
-          <p:cNvPr id="408" name="PlaceHolder 2"/>
+          <p:cNvPr id="409" name="PlaceHolder 2"/>
           <p:cNvSpPr>
             <a:spLocks noGrp="1"/>
           </p:cNvSpPr>
@@ -1318,7 +1318,7 @@
         <p:spPr>
           <a:xfrm>
             <a:off x="685800" y="4400640"/>
-            <a:ext cx="5482800" cy="3596760"/>
+            <a:ext cx="5482440" cy="3596400"/>
           </a:xfrm>
           <a:prstGeom prst="rect">
             <a:avLst/>
@@ -1349,7 +1349,7 @@
       </p:sp>
       <p:sp>
         <p:nvSpPr>
-          <p:cNvPr id="409" name="PlaceHolder 3"/>
+          <p:cNvPr id="410" name="PlaceHolder 3"/>
           <p:cNvSpPr>
             <a:spLocks noGrp="1"/>
           </p:cNvSpPr>
@@ -1360,7 +1360,7 @@
         <p:spPr>
           <a:xfrm>
             <a:off x="3884760" y="8685360"/>
-            <a:ext cx="2968200" cy="455040"/>
+            <a:ext cx="2967840" cy="454680"/>
           </a:xfrm>
           <a:prstGeom prst="rect">
             <a:avLst/>
@@ -1404,7 +1404,7 @@
                 <a:tab pos="0" algn="l"/>
               </a:tabLst>
             </a:pPr>
-            <a:fld id="{6A620753-DA97-45FE-B474-E740E52FD59D}" type="slidenum">
+            <a:fld id="{649E2EA4-EA14-4CC9-995B-880ED4396B98}" type="slidenum">
               <a:rPr lang="en-US" sz="1200" b="0" u="none" strike="noStrike">
                 <a:solidFill>
                   <a:schemeClr val="dk1"/>
@@ -1469,7 +1469,7 @@
         <p:spPr>
           <a:xfrm>
             <a:off x="609480" y="708480"/>
-            <a:ext cx="10970640" cy="274680"/>
+            <a:ext cx="10970280" cy="274680"/>
           </a:xfrm>
           <a:prstGeom prst="rect">
             <a:avLst/>
@@ -1547,7 +1547,7 @@
         <p:spPr>
           <a:xfrm>
             <a:off x="609480" y="1604520"/>
-            <a:ext cx="10971000" cy="3975840"/>
+            <a:ext cx="10970640" cy="3975480"/>
           </a:xfrm>
           <a:prstGeom prst="rect">
             <a:avLst/>
@@ -2006,7 +2006,7 @@
         <p:spPr>
           <a:xfrm>
             <a:off x="609480" y="273600"/>
-            <a:ext cx="10971000" cy="1143360"/>
+            <a:ext cx="10970640" cy="1143000"/>
           </a:xfrm>
           <a:prstGeom prst="rect">
             <a:avLst/>
@@ -2084,7 +2084,7 @@
         <p:spPr>
           <a:xfrm>
             <a:off x="609480" y="1604520"/>
-            <a:ext cx="10971000" cy="3975840"/>
+            <a:ext cx="10970640" cy="3975480"/>
           </a:xfrm>
           <a:prstGeom prst="rect">
             <a:avLst/>
@@ -2559,7 +2559,7 @@
         <p:spPr>
           <a:xfrm>
             <a:off x="914400" y="460080"/>
-            <a:ext cx="8505360" cy="1176120"/>
+            <a:ext cx="8505000" cy="1175760"/>
           </a:xfrm>
           <a:prstGeom prst="rect">
             <a:avLst/>
@@ -2671,7 +2671,7 @@
         <p:spPr>
           <a:xfrm>
             <a:off x="987120" y="1600200"/>
-            <a:ext cx="3124440" cy="1100520"/>
+            <a:ext cx="3124080" cy="1100160"/>
           </a:xfrm>
           <a:prstGeom prst="rect">
             <a:avLst/>
@@ -2851,8 +2851,8 @@
         </p:nvSpPr>
         <p:spPr>
           <a:xfrm>
-            <a:off x="4265280" y="3289680"/>
-            <a:ext cx="3825000" cy="427320"/>
+            <a:off x="924840" y="3521160"/>
+            <a:ext cx="5247360" cy="1279440"/>
           </a:xfrm>
           <a:prstGeom prst="rect">
             <a:avLst/>
@@ -2863,32 +2863,353 @@
           </a:ln>
         </p:spPr>
         <p:txBody>
-          <a:bodyPr wrap="none" lIns="90000" tIns="45000" rIns="90000" bIns="45000" anchor="t">
+          <a:bodyPr lIns="90000" tIns="45000" rIns="90000" bIns="45000" anchor="t">
             <a:spAutoFit/>
           </a:bodyPr>
           <a:p>
-            <a:fld id="{065813AD-24F7-4633-B41B-9E53FA5F5FFA}" type="slidenum">
-              <a:rPr lang="en-US" sz="2400" b="0" u="none" strike="noStrike">
+            <a:r>
+              <a:rPr lang="en-US" sz="2800" b="0" u="none" strike="noStrike">
                 <a:solidFill>
                   <a:srgbClr val="000000"/>
                 </a:solidFill>
                 <a:effectLst/>
                 <a:uFillTx/>
-                <a:latin typeface="Times New Roman"/>
-              </a:rPr>
-              <a:t>&lt;number&gt;</a:t>
-            </a:fld>
-            <a:endParaRPr lang="en-US" sz="2400" b="0" u="none" strike="noStrike">
-              <a:solidFill>
-                <a:srgbClr val="000000"/>
-              </a:solidFill>
-              <a:effectLst/>
-              <a:uFillTx/>
-              <a:latin typeface="Times New Roman"/>
-            </a:endParaRPr>
-          </a:p>
-        </p:txBody>
-      </p:sp>
+                <a:latin typeface="Arial"/>
+              </a:rPr>
+              <a:t>h</a:t>
+            </a:r>
+            <a:r>
+              <a:rPr lang="en-US" sz="2800" b="0" u="none" strike="noStrike">
+                <a:solidFill>
+                  <a:srgbClr val="000000"/>
+                </a:solidFill>
+                <a:effectLst/>
+                <a:uFillTx/>
+                <a:latin typeface="Arial"/>
+              </a:rPr>
+              <a:t>t</a:t>
+            </a:r>
+            <a:r>
+              <a:rPr lang="en-US" sz="2800" b="0" u="none" strike="noStrike">
+                <a:solidFill>
+                  <a:srgbClr val="000000"/>
+                </a:solidFill>
+                <a:effectLst/>
+                <a:uFillTx/>
+                <a:latin typeface="Arial"/>
+              </a:rPr>
+              <a:t>t</a:t>
+            </a:r>
+            <a:r>
+              <a:rPr lang="en-US" sz="2800" b="0" u="none" strike="noStrike">
+                <a:solidFill>
+                  <a:srgbClr val="000000"/>
+                </a:solidFill>
+                <a:effectLst/>
+                <a:uFillTx/>
+                <a:latin typeface="Arial"/>
+              </a:rPr>
+              <a:t>p</a:t>
+            </a:r>
+            <a:r>
+              <a:rPr lang="en-US" sz="2800" b="0" u="none" strike="noStrike">
+                <a:solidFill>
+                  <a:srgbClr val="000000"/>
+                </a:solidFill>
+                <a:effectLst/>
+                <a:uFillTx/>
+                <a:latin typeface="Arial"/>
+              </a:rPr>
+              <a:t>s</a:t>
+            </a:r>
+            <a:r>
+              <a:rPr lang="en-US" sz="2800" b="0" u="none" strike="noStrike">
+                <a:solidFill>
+                  <a:srgbClr val="000000"/>
+                </a:solidFill>
+                <a:effectLst/>
+                <a:uFillTx/>
+                <a:latin typeface="Arial"/>
+              </a:rPr>
+              <a:t>:</a:t>
+            </a:r>
+            <a:r>
+              <a:rPr lang="en-US" sz="2800" b="0" u="none" strike="noStrike">
+                <a:solidFill>
+                  <a:srgbClr val="000000"/>
+                </a:solidFill>
+                <a:effectLst/>
+                <a:uFillTx/>
+                <a:latin typeface="Arial"/>
+              </a:rPr>
+              <a:t>/</a:t>
+            </a:r>
+            <a:r>
+              <a:rPr lang="en-US" sz="2800" b="0" u="none" strike="noStrike">
+                <a:solidFill>
+                  <a:srgbClr val="000000"/>
+                </a:solidFill>
+                <a:effectLst/>
+                <a:uFillTx/>
+                <a:latin typeface="Arial"/>
+              </a:rPr>
+              <a:t>/</a:t>
+            </a:r>
+            <a:r>
+              <a:rPr lang="en-US" sz="2800" b="0" u="none" strike="noStrike">
+                <a:solidFill>
+                  <a:srgbClr val="000000"/>
+                </a:solidFill>
+                <a:effectLst/>
+                <a:uFillTx/>
+                <a:latin typeface="Arial"/>
+              </a:rPr>
+              <a:t>t</a:t>
+            </a:r>
+            <a:r>
+              <a:rPr lang="en-US" sz="2800" b="0" u="none" strike="noStrike">
+                <a:solidFill>
+                  <a:srgbClr val="000000"/>
+                </a:solidFill>
+                <a:effectLst/>
+                <a:uFillTx/>
+                <a:latin typeface="Arial"/>
+              </a:rPr>
+              <a:t>i</a:t>
+            </a:r>
+            <a:r>
+              <a:rPr lang="en-US" sz="2800" b="0" u="none" strike="noStrike">
+                <a:solidFill>
+                  <a:srgbClr val="000000"/>
+                </a:solidFill>
+                <a:effectLst/>
+                <a:uFillTx/>
+                <a:latin typeface="Arial"/>
+              </a:rPr>
+              <a:t>n</a:t>
+            </a:r>
+            <a:r>
+              <a:rPr lang="en-US" sz="2800" b="0" u="none" strike="noStrike">
+                <a:solidFill>
+                  <a:srgbClr val="000000"/>
+                </a:solidFill>
+                <a:effectLst/>
+                <a:uFillTx/>
+                <a:latin typeface="Arial"/>
+              </a:rPr>
+              <a:t>y</a:t>
+            </a:r>
+            <a:r>
+              <a:rPr lang="en-US" sz="2800" b="0" u="none" strike="noStrike">
+                <a:solidFill>
+                  <a:srgbClr val="000000"/>
+                </a:solidFill>
+                <a:effectLst/>
+                <a:uFillTx/>
+                <a:latin typeface="Arial"/>
+              </a:rPr>
+              <a:t>u</a:t>
+            </a:r>
+            <a:r>
+              <a:rPr lang="en-US" sz="2800" b="0" u="none" strike="noStrike">
+                <a:solidFill>
+                  <a:srgbClr val="000000"/>
+                </a:solidFill>
+                <a:effectLst/>
+                <a:uFillTx/>
+                <a:latin typeface="Arial"/>
+              </a:rPr>
+              <a:t>r</a:t>
+            </a:r>
+            <a:r>
+              <a:rPr lang="en-US" sz="2800" b="0" u="none" strike="noStrike">
+                <a:solidFill>
+                  <a:srgbClr val="000000"/>
+                </a:solidFill>
+                <a:effectLst/>
+                <a:uFillTx/>
+                <a:latin typeface="Arial"/>
+              </a:rPr>
+              <a:t>l</a:t>
+            </a:r>
+            <a:r>
+              <a:rPr lang="en-US" sz="2800" b="0" u="none" strike="noStrike">
+                <a:solidFill>
+                  <a:srgbClr val="000000"/>
+                </a:solidFill>
+                <a:effectLst/>
+                <a:uFillTx/>
+                <a:latin typeface="Arial"/>
+              </a:rPr>
+              <a:t>.</a:t>
+            </a:r>
+            <a:r>
+              <a:rPr lang="en-US" sz="2800" b="0" u="none" strike="noStrike">
+                <a:solidFill>
+                  <a:srgbClr val="000000"/>
+                </a:solidFill>
+                <a:effectLst/>
+                <a:uFillTx/>
+                <a:latin typeface="Arial"/>
+              </a:rPr>
+              <a:t>c</a:t>
+            </a:r>
+            <a:r>
+              <a:rPr lang="en-US" sz="2800" b="0" u="none" strike="noStrike">
+                <a:solidFill>
+                  <a:srgbClr val="000000"/>
+                </a:solidFill>
+                <a:effectLst/>
+                <a:uFillTx/>
+                <a:latin typeface="Arial"/>
+              </a:rPr>
+              <a:t>o</a:t>
+            </a:r>
+            <a:r>
+              <a:rPr lang="en-US" sz="2800" b="0" u="none" strike="noStrike">
+                <a:solidFill>
+                  <a:srgbClr val="000000"/>
+                </a:solidFill>
+                <a:effectLst/>
+                <a:uFillTx/>
+                <a:latin typeface="Arial"/>
+              </a:rPr>
+              <a:t>m</a:t>
+            </a:r>
+            <a:r>
+              <a:rPr lang="en-US" sz="2800" b="0" u="none" strike="noStrike">
+                <a:solidFill>
+                  <a:srgbClr val="000000"/>
+                </a:solidFill>
+                <a:effectLst/>
+                <a:uFillTx/>
+                <a:latin typeface="Arial"/>
+              </a:rPr>
+              <a:t>/</a:t>
+            </a:r>
+            <a:r>
+              <a:rPr lang="en-US" sz="2800" b="0" u="none" strike="noStrike">
+                <a:solidFill>
+                  <a:srgbClr val="000000"/>
+                </a:solidFill>
+                <a:effectLst/>
+                <a:uFillTx/>
+                <a:latin typeface="Arial"/>
+              </a:rPr>
+              <a:t>4</a:t>
+            </a:r>
+            <a:r>
+              <a:rPr lang="en-US" sz="2800" b="0" u="none" strike="noStrike">
+                <a:solidFill>
+                  <a:srgbClr val="000000"/>
+                </a:solidFill>
+                <a:effectLst/>
+                <a:uFillTx/>
+                <a:latin typeface="Arial"/>
+              </a:rPr>
+              <a:t>7</a:t>
+            </a:r>
+            <a:r>
+              <a:rPr lang="en-US" sz="2800" b="0" u="none" strike="noStrike">
+                <a:solidFill>
+                  <a:srgbClr val="000000"/>
+                </a:solidFill>
+                <a:effectLst/>
+                <a:uFillTx/>
+                <a:latin typeface="Arial"/>
+              </a:rPr>
+              <a:t>v</a:t>
+            </a:r>
+            <a:r>
+              <a:rPr lang="en-US" sz="2800" b="0" u="none" strike="noStrike">
+                <a:solidFill>
+                  <a:srgbClr val="000000"/>
+                </a:solidFill>
+                <a:effectLst/>
+                <a:uFillTx/>
+                <a:latin typeface="Arial"/>
+              </a:rPr>
+              <a:t>v</a:t>
+            </a:r>
+            <a:r>
+              <a:rPr lang="en-US" sz="2800" b="0" u="none" strike="noStrike">
+                <a:solidFill>
+                  <a:srgbClr val="000000"/>
+                </a:solidFill>
+                <a:effectLst/>
+                <a:uFillTx/>
+                <a:latin typeface="Arial"/>
+              </a:rPr>
+              <a:t>h</a:t>
+            </a:r>
+            <a:r>
+              <a:rPr lang="en-US" sz="2800" b="0" u="none" strike="noStrike">
+                <a:solidFill>
+                  <a:srgbClr val="000000"/>
+                </a:solidFill>
+                <a:effectLst/>
+                <a:uFillTx/>
+                <a:latin typeface="Arial"/>
+              </a:rPr>
+              <a:t>4</a:t>
+            </a:r>
+            <a:r>
+              <a:rPr lang="en-US" sz="2800" b="0" u="none" strike="noStrike">
+                <a:solidFill>
+                  <a:srgbClr val="000000"/>
+                </a:solidFill>
+                <a:effectLst/>
+                <a:uFillTx/>
+                <a:latin typeface="Arial"/>
+              </a:rPr>
+              <a:t>4</a:t>
+            </a:r>
+            <a:r>
+              <a:rPr lang="en-US" sz="2800" b="0" u="none" strike="noStrike">
+                <a:solidFill>
+                  <a:srgbClr val="000000"/>
+                </a:solidFill>
+                <a:effectLst/>
+                <a:uFillTx/>
+                <a:latin typeface="Arial"/>
+              </a:rPr>
+              <a:t>7</a:t>
+            </a:r>
+            <a:endParaRPr lang="en-US" sz="2800" b="0" u="none" strike="noStrike">
+              <a:solidFill>
+                <a:srgbClr val="000000"/>
+              </a:solidFill>
+              <a:effectLst/>
+              <a:uFillTx/>
+              <a:latin typeface="Arial"/>
+            </a:endParaRPr>
+          </a:p>
+        </p:txBody>
+      </p:sp>
+      <p:pic>
+        <p:nvPicPr>
+          <p:cNvPr id="15" name=""/>
+          <p:cNvPicPr/>
+          <p:nvPr/>
+        </p:nvPicPr>
+        <p:blipFill>
+          <a:blip r:embed="rId1"/>
+          <a:stretch/>
+        </p:blipFill>
+        <p:spPr>
+          <a:xfrm>
+            <a:off x="7086600" y="2743200"/>
+            <a:ext cx="3283920" cy="3283920"/>
+          </a:xfrm>
+          <a:prstGeom prst="rect">
+            <a:avLst/>
+          </a:prstGeom>
+          <a:noFill/>
+          <a:ln w="0">
+            <a:noFill/>
+          </a:ln>
+        </p:spPr>
+      </p:pic>
     </p:spTree>
   </p:cSld>
   <mc:AlternateContent>
@@ -2921,14 +3242,14 @@
       </p:grpSpPr>
       <p:sp>
         <p:nvSpPr>
-          <p:cNvPr id="50" name="TextBox 5"/>
+          <p:cNvPr id="51" name="TextBox 5"/>
           <p:cNvSpPr/>
           <p:nvPr/>
         </p:nvSpPr>
         <p:spPr>
           <a:xfrm>
             <a:off x="502920" y="201240"/>
-            <a:ext cx="11154960" cy="486360"/>
+            <a:ext cx="11154600" cy="485640"/>
           </a:xfrm>
           <a:prstGeom prst="rect">
             <a:avLst/>
@@ -2981,14 +3302,14 @@
       </p:sp>
       <p:sp>
         <p:nvSpPr>
-          <p:cNvPr id="51" name="Rounded Rectangle 10"/>
+          <p:cNvPr id="52" name="Rounded Rectangle 10"/>
           <p:cNvSpPr/>
           <p:nvPr/>
         </p:nvSpPr>
         <p:spPr>
           <a:xfrm>
             <a:off x="274320" y="2499840"/>
-            <a:ext cx="1924920" cy="1599120"/>
+            <a:ext cx="1924560" cy="1598760"/>
           </a:xfrm>
           <a:prstGeom prst="roundRect">
             <a:avLst>
@@ -3082,14 +3403,14 @@
       </p:sp>
       <p:cxnSp>
         <p:nvCxnSpPr>
-          <p:cNvPr id="52" name="Connector 3"/>
+          <p:cNvPr id="53" name="Connector 3"/>
           <p:cNvCxnSpPr/>
           <p:nvPr/>
         </p:nvCxnSpPr>
         <p:spPr>
           <a:xfrm>
             <a:off x="2199960" y="3299760"/>
-            <a:ext cx="400680" cy="720"/>
+            <a:ext cx="401040" cy="1080"/>
           </a:xfrm>
           <a:prstGeom prst="straightConnector1">
             <a:avLst/>
@@ -3105,14 +3426,14 @@
       </p:cxnSp>
       <p:sp>
         <p:nvSpPr>
-          <p:cNvPr id="53" name="Rounded Rectangle 11"/>
+          <p:cNvPr id="54" name="Rounded Rectangle 11"/>
           <p:cNvSpPr/>
           <p:nvPr/>
         </p:nvSpPr>
         <p:spPr>
           <a:xfrm>
             <a:off x="2350080" y="1100160"/>
-            <a:ext cx="9567000" cy="4199400"/>
+            <a:ext cx="9566640" cy="4199040"/>
           </a:xfrm>
           <a:prstGeom prst="roundRect">
             <a:avLst>
@@ -3177,14 +3498,14 @@
       </p:sp>
       <p:sp>
         <p:nvSpPr>
-          <p:cNvPr id="54" name="Rounded Rectangle 17"/>
+          <p:cNvPr id="55" name="Rounded Rectangle 17"/>
           <p:cNvSpPr/>
           <p:nvPr/>
         </p:nvSpPr>
         <p:spPr>
           <a:xfrm>
             <a:off x="2599920" y="1599840"/>
-            <a:ext cx="3299400" cy="2999160"/>
+            <a:ext cx="3299040" cy="2998800"/>
           </a:xfrm>
           <a:prstGeom prst="roundRect">
             <a:avLst>
@@ -3336,14 +3657,14 @@
       </p:sp>
       <p:sp>
         <p:nvSpPr>
-          <p:cNvPr id="55" name="Rounded Rectangle 18"/>
+          <p:cNvPr id="56" name="Rounded Rectangle 18"/>
           <p:cNvSpPr/>
           <p:nvPr/>
         </p:nvSpPr>
         <p:spPr>
           <a:xfrm>
             <a:off x="6149880" y="1599840"/>
-            <a:ext cx="2949120" cy="2999160"/>
+            <a:ext cx="2948760" cy="2998800"/>
           </a:xfrm>
           <a:prstGeom prst="roundRect">
             <a:avLst>
@@ -3495,14 +3816,14 @@
       </p:sp>
       <p:sp>
         <p:nvSpPr>
-          <p:cNvPr id="56" name="TextBox 6"/>
+          <p:cNvPr id="57" name="TextBox 6"/>
           <p:cNvSpPr/>
           <p:nvPr/>
         </p:nvSpPr>
         <p:spPr>
           <a:xfrm>
             <a:off x="9249840" y="1239840"/>
-            <a:ext cx="2549160" cy="333360"/>
+            <a:ext cx="2548800" cy="333360"/>
           </a:xfrm>
           <a:prstGeom prst="rect">
             <a:avLst/>
@@ -3555,14 +3876,14 @@
       </p:sp>
       <p:sp>
         <p:nvSpPr>
-          <p:cNvPr id="57" name="Rounded Rectangle 19"/>
+          <p:cNvPr id="58" name="Rounded Rectangle 19"/>
           <p:cNvSpPr/>
           <p:nvPr/>
         </p:nvSpPr>
         <p:spPr>
           <a:xfrm>
             <a:off x="9249840" y="1599840"/>
-            <a:ext cx="2549160" cy="699120"/>
+            <a:ext cx="2548800" cy="698760"/>
           </a:xfrm>
           <a:prstGeom prst="roundRect">
             <a:avLst>
@@ -3656,14 +3977,14 @@
       </p:sp>
       <p:sp>
         <p:nvSpPr>
-          <p:cNvPr id="58" name="Rounded Rectangle 20"/>
+          <p:cNvPr id="59" name="Rounded Rectangle 20"/>
           <p:cNvSpPr/>
           <p:nvPr/>
         </p:nvSpPr>
         <p:spPr>
           <a:xfrm>
             <a:off x="9249840" y="2400120"/>
-            <a:ext cx="2549160" cy="699120"/>
+            <a:ext cx="2548800" cy="698760"/>
           </a:xfrm>
           <a:prstGeom prst="roundRect">
             <a:avLst>
@@ -3742,18 +4063,7 @@
                 <a:uFillTx/>
                 <a:latin typeface="Arial"/>
               </a:rPr>
-              <a:t>4 cores, 16 GB, </a:t>
-            </a:r>
-            <a:r>
-              <a:rPr lang="en-US" sz="1600" b="1" u="none" strike="noStrike">
-                <a:solidFill>
-                  <a:srgbClr val="2E7D32"/>
-                </a:solidFill>
-                <a:effectLst/>
-                <a:uFillTx/>
-                <a:latin typeface="Arial"/>
-              </a:rPr>
-              <a:t>busy</a:t>
+              <a:t>4 cores, 16 GB, busy</a:t>
             </a:r>
             <a:endParaRPr lang="en-US" sz="1600" b="0" u="none" strike="noStrike">
               <a:solidFill>
@@ -3768,14 +4078,14 @@
       </p:sp>
       <p:sp>
         <p:nvSpPr>
-          <p:cNvPr id="59" name="Rounded Rectangle 21"/>
+          <p:cNvPr id="60" name="Rounded Rectangle 21"/>
           <p:cNvSpPr/>
           <p:nvPr/>
         </p:nvSpPr>
         <p:spPr>
           <a:xfrm>
             <a:off x="9249840" y="3200040"/>
-            <a:ext cx="2549160" cy="699120"/>
+            <a:ext cx="2548800" cy="698760"/>
           </a:xfrm>
           <a:prstGeom prst="roundRect">
             <a:avLst>
@@ -3869,14 +4179,14 @@
       </p:sp>
       <p:sp>
         <p:nvSpPr>
-          <p:cNvPr id="60" name="Rounded Rectangle 22"/>
+          <p:cNvPr id="61" name="Rounded Rectangle 22"/>
           <p:cNvSpPr/>
           <p:nvPr/>
         </p:nvSpPr>
         <p:spPr>
           <a:xfrm>
             <a:off x="9249840" y="3999960"/>
-            <a:ext cx="2549160" cy="699120"/>
+            <a:ext cx="2548800" cy="698760"/>
           </a:xfrm>
           <a:prstGeom prst="roundRect">
             <a:avLst>
@@ -3970,14 +4280,14 @@
       </p:sp>
       <p:cxnSp>
         <p:nvCxnSpPr>
-          <p:cNvPr id="61" name="Connector 5"/>
+          <p:cNvPr id="62" name="Connector 5"/>
           <p:cNvCxnSpPr/>
           <p:nvPr/>
         </p:nvCxnSpPr>
         <p:spPr>
           <a:xfrm>
             <a:off x="5899680" y="3299760"/>
-            <a:ext cx="250920" cy="720"/>
+            <a:ext cx="251280" cy="1080"/>
           </a:xfrm>
           <a:prstGeom prst="straightConnector1">
             <a:avLst/>
@@ -3993,14 +4303,14 @@
       </p:cxnSp>
       <p:sp>
         <p:nvSpPr>
-          <p:cNvPr id="62" name="TextBox 7"/>
+          <p:cNvPr id="63" name="TextBox 7"/>
           <p:cNvSpPr/>
           <p:nvPr/>
         </p:nvSpPr>
         <p:spPr>
           <a:xfrm>
             <a:off x="3899880" y="5450040"/>
-            <a:ext cx="3399120" cy="334080"/>
+            <a:ext cx="3398760" cy="333360"/>
           </a:xfrm>
           <a:prstGeom prst="rect">
             <a:avLst/>
@@ -4053,14 +4363,14 @@
       </p:sp>
       <p:cxnSp>
         <p:nvCxnSpPr>
-          <p:cNvPr id="63" name="Connector 6"/>
+          <p:cNvPr id="64" name="Connector 6"/>
           <p:cNvCxnSpPr/>
           <p:nvPr/>
         </p:nvCxnSpPr>
         <p:spPr>
           <a:xfrm>
             <a:off x="9099720" y="3299760"/>
-            <a:ext cx="150840" cy="720"/>
+            <a:ext cx="151200" cy="1080"/>
           </a:xfrm>
           <a:prstGeom prst="straightConnector1">
             <a:avLst/>
@@ -4076,14 +4386,14 @@
       </p:cxnSp>
       <p:sp>
         <p:nvSpPr>
-          <p:cNvPr id="64" name="TextBox 8"/>
+          <p:cNvPr id="65" name="TextBox 8"/>
           <p:cNvSpPr/>
           <p:nvPr/>
         </p:nvSpPr>
         <p:spPr>
           <a:xfrm>
             <a:off x="7300080" y="5450040"/>
-            <a:ext cx="3799440" cy="334080"/>
+            <a:ext cx="3799080" cy="333360"/>
           </a:xfrm>
           <a:prstGeom prst="rect">
             <a:avLst/>
@@ -4166,14 +4476,14 @@
       </p:grpSpPr>
       <p:sp>
         <p:nvSpPr>
-          <p:cNvPr id="65" name="TextBox 22"/>
+          <p:cNvPr id="66" name="TextBox 22"/>
           <p:cNvSpPr/>
           <p:nvPr/>
         </p:nvSpPr>
         <p:spPr>
           <a:xfrm>
             <a:off x="502920" y="201240"/>
-            <a:ext cx="11154960" cy="486360"/>
+            <a:ext cx="11154600" cy="485640"/>
           </a:xfrm>
           <a:prstGeom prst="rect">
             <a:avLst/>
@@ -4226,14 +4536,14 @@
       </p:sp>
       <p:sp>
         <p:nvSpPr>
-          <p:cNvPr id="66" name="TextBox 23"/>
+          <p:cNvPr id="67" name="TextBox 23"/>
           <p:cNvSpPr/>
           <p:nvPr/>
         </p:nvSpPr>
         <p:spPr>
           <a:xfrm>
             <a:off x="502920" y="1249920"/>
-            <a:ext cx="11246400" cy="305280"/>
+            <a:ext cx="11246040" cy="304920"/>
           </a:xfrm>
           <a:prstGeom prst="rect">
             <a:avLst/>
@@ -4294,14 +4604,14 @@
       </p:sp>
       <p:sp>
         <p:nvSpPr>
-          <p:cNvPr id="67" name="TextBox 24"/>
+          <p:cNvPr id="68" name="TextBox 24"/>
           <p:cNvSpPr/>
           <p:nvPr/>
         </p:nvSpPr>
         <p:spPr>
           <a:xfrm>
             <a:off x="502920" y="1869840"/>
-            <a:ext cx="11246400" cy="305280"/>
+            <a:ext cx="11246040" cy="304920"/>
           </a:xfrm>
           <a:prstGeom prst="rect">
             <a:avLst/>
@@ -4362,14 +4672,14 @@
       </p:sp>
       <p:sp>
         <p:nvSpPr>
-          <p:cNvPr id="68" name="TextBox 25"/>
+          <p:cNvPr id="69" name="TextBox 25"/>
           <p:cNvSpPr/>
           <p:nvPr/>
         </p:nvSpPr>
         <p:spPr>
           <a:xfrm>
             <a:off x="502920" y="2490120"/>
-            <a:ext cx="11246400" cy="305280"/>
+            <a:ext cx="11246040" cy="304920"/>
           </a:xfrm>
           <a:prstGeom prst="rect">
             <a:avLst/>
@@ -4430,14 +4740,14 @@
       </p:sp>
       <p:sp>
         <p:nvSpPr>
-          <p:cNvPr id="69" name="TextBox 26"/>
+          <p:cNvPr id="70" name="TextBox 26"/>
           <p:cNvSpPr/>
           <p:nvPr/>
         </p:nvSpPr>
         <p:spPr>
           <a:xfrm>
             <a:off x="502920" y="3110040"/>
-            <a:ext cx="11246400" cy="305280"/>
+            <a:ext cx="11246040" cy="304920"/>
           </a:xfrm>
           <a:prstGeom prst="rect">
             <a:avLst/>
@@ -4498,14 +4808,14 @@
       </p:sp>
       <p:sp>
         <p:nvSpPr>
-          <p:cNvPr id="70" name="TextBox 27"/>
+          <p:cNvPr id="71" name="TextBox 27"/>
           <p:cNvSpPr/>
           <p:nvPr/>
         </p:nvSpPr>
         <p:spPr>
           <a:xfrm>
             <a:off x="502920" y="3729960"/>
-            <a:ext cx="11246400" cy="305280"/>
+            <a:ext cx="11246040" cy="304920"/>
           </a:xfrm>
           <a:prstGeom prst="rect">
             <a:avLst/>
@@ -4566,14 +4876,14 @@
       </p:sp>
       <p:sp>
         <p:nvSpPr>
-          <p:cNvPr id="71" name="TextBox 28"/>
+          <p:cNvPr id="72" name="TextBox 28"/>
           <p:cNvSpPr/>
           <p:nvPr/>
         </p:nvSpPr>
         <p:spPr>
           <a:xfrm>
             <a:off x="502920" y="4349880"/>
-            <a:ext cx="11246400" cy="305280"/>
+            <a:ext cx="11246040" cy="304920"/>
           </a:xfrm>
           <a:prstGeom prst="rect">
             <a:avLst/>
@@ -4634,14 +4944,14 @@
       </p:sp>
       <p:sp>
         <p:nvSpPr>
-          <p:cNvPr id="72" name="TextBox 29"/>
+          <p:cNvPr id="73" name="TextBox 29"/>
           <p:cNvSpPr/>
           <p:nvPr/>
         </p:nvSpPr>
         <p:spPr>
           <a:xfrm>
             <a:off x="502920" y="5150160"/>
-            <a:ext cx="11246400" cy="938160"/>
+            <a:ext cx="11246040" cy="938160"/>
           </a:xfrm>
           <a:prstGeom prst="rect">
             <a:avLst/>
@@ -4753,7 +5063,7 @@
       </p:grpSpPr>
       <p:pic>
         <p:nvPicPr>
-          <p:cNvPr id="73" name=""/>
+          <p:cNvPr id="74" name=""/>
           <p:cNvPicPr/>
           <p:nvPr/>
         </p:nvPicPr>
@@ -4764,7 +5074,7 @@
         <p:spPr>
           <a:xfrm>
             <a:off x="228600" y="228600"/>
-            <a:ext cx="11592720" cy="6205680"/>
+            <a:ext cx="11592360" cy="6205320"/>
           </a:xfrm>
           <a:prstGeom prst="rect">
             <a:avLst/>
@@ -4777,14 +5087,14 @@
       </p:pic>
       <p:sp>
         <p:nvSpPr>
-          <p:cNvPr id="74" name=""/>
+          <p:cNvPr id="75" name=""/>
           <p:cNvSpPr/>
           <p:nvPr/>
         </p:nvSpPr>
         <p:spPr>
           <a:xfrm>
             <a:off x="241560" y="4862160"/>
-            <a:ext cx="5701680" cy="1309320"/>
+            <a:ext cx="5701320" cy="1309320"/>
           </a:xfrm>
           <a:prstGeom prst="rect">
             <a:avLst/>
@@ -4907,7 +5217,7 @@
       </p:grpSpPr>
       <p:pic>
         <p:nvPicPr>
-          <p:cNvPr id="75" name=""/>
+          <p:cNvPr id="76" name=""/>
           <p:cNvPicPr/>
           <p:nvPr/>
         </p:nvPicPr>
@@ -4918,7 +5228,7 @@
         <p:spPr>
           <a:xfrm>
             <a:off x="228600" y="228600"/>
-            <a:ext cx="11592720" cy="6205680"/>
+            <a:ext cx="11592360" cy="6205320"/>
           </a:xfrm>
           <a:prstGeom prst="rect">
             <a:avLst/>
@@ -4931,14 +5241,14 @@
       </p:pic>
       <p:sp>
         <p:nvSpPr>
-          <p:cNvPr id="76" name=""/>
+          <p:cNvPr id="77" name=""/>
           <p:cNvSpPr/>
           <p:nvPr/>
         </p:nvSpPr>
         <p:spPr>
           <a:xfrm>
             <a:off x="230400" y="1600200"/>
-            <a:ext cx="5255640" cy="699480"/>
+            <a:ext cx="5255280" cy="699480"/>
           </a:xfrm>
           <a:prstGeom prst="rect">
             <a:avLst/>
@@ -5001,18 +5311,7 @@
                 <a:uFillTx/>
                 <a:latin typeface="Arial"/>
               </a:rPr>
-              <a:t>Steve show examples, </a:t>
-            </a:r>
-            <a:r>
-              <a:rPr lang="en-US" sz="2000" b="0" u="none" strike="noStrike">
-                <a:solidFill>
-                  <a:srgbClr val="FF00FF"/>
-                </a:solidFill>
-                <a:effectLst/>
-                <a:uFillTx/>
-                <a:latin typeface="Arial"/>
-              </a:rPr>
-              <a:t>participants try it</a:t>
+              <a:t>Steve show examples, participants try it</a:t>
             </a:r>
             <a:endParaRPr lang="en-US" sz="2000" b="0" u="none" strike="noStrike">
               <a:solidFill>
@@ -5057,7 +5356,7 @@
       </p:grpSpPr>
       <p:pic>
         <p:nvPicPr>
-          <p:cNvPr id="77" name=""/>
+          <p:cNvPr id="78" name=""/>
           <p:cNvPicPr/>
           <p:nvPr/>
         </p:nvPicPr>
@@ -5068,7 +5367,7 @@
         <p:spPr>
           <a:xfrm>
             <a:off x="228600" y="228600"/>
-            <a:ext cx="11592720" cy="6205680"/>
+            <a:ext cx="11592360" cy="6205320"/>
           </a:xfrm>
           <a:prstGeom prst="rect">
             <a:avLst/>
@@ -5081,14 +5380,14 @@
       </p:pic>
       <p:sp>
         <p:nvSpPr>
-          <p:cNvPr id="78" name=""/>
+          <p:cNvPr id="79" name=""/>
           <p:cNvSpPr/>
           <p:nvPr/>
         </p:nvSpPr>
         <p:spPr>
           <a:xfrm>
             <a:off x="6631200" y="4114800"/>
-            <a:ext cx="5255640" cy="1004400"/>
+            <a:ext cx="5255280" cy="1004400"/>
           </a:xfrm>
           <a:prstGeom prst="rect">
             <a:avLst/>
@@ -5222,14 +5521,14 @@
       </p:grpSpPr>
       <p:sp>
         <p:nvSpPr>
-          <p:cNvPr id="79" name=""/>
+          <p:cNvPr id="80" name=""/>
           <p:cNvSpPr/>
           <p:nvPr/>
         </p:nvSpPr>
         <p:spPr>
           <a:xfrm>
             <a:off x="1371600" y="1143000"/>
-            <a:ext cx="9143640" cy="5093640"/>
+            <a:ext cx="9143280" cy="5093280"/>
           </a:xfrm>
           <a:prstGeom prst="rect">
             <a:avLst/>
@@ -5711,14 +6010,14 @@
       </p:grpSpPr>
       <p:sp>
         <p:nvSpPr>
-          <p:cNvPr id="80" name=""/>
+          <p:cNvPr id="81" name=""/>
           <p:cNvSpPr/>
           <p:nvPr/>
         </p:nvSpPr>
         <p:spPr>
           <a:xfrm>
             <a:off x="1371600" y="1371600"/>
-            <a:ext cx="6400440" cy="3161520"/>
+            <a:ext cx="6400080" cy="3161160"/>
           </a:xfrm>
           <a:prstGeom prst="rect">
             <a:avLst/>
@@ -5966,7 +6265,7 @@
       </p:grpSpPr>
       <p:pic>
         <p:nvPicPr>
-          <p:cNvPr id="81" name=""/>
+          <p:cNvPr id="82" name=""/>
           <p:cNvPicPr/>
           <p:nvPr/>
         </p:nvPicPr>
@@ -5977,7 +6276,7 @@
         <p:spPr>
           <a:xfrm>
             <a:off x="105120" y="525240"/>
-            <a:ext cx="10147680" cy="5785920"/>
+            <a:ext cx="10147320" cy="5785560"/>
           </a:xfrm>
           <a:prstGeom prst="rect">
             <a:avLst/>
@@ -5990,14 +6289,14 @@
       </p:pic>
       <p:sp>
         <p:nvSpPr>
-          <p:cNvPr id="82" name=""/>
+          <p:cNvPr id="83" name=""/>
           <p:cNvSpPr/>
           <p:nvPr/>
         </p:nvSpPr>
         <p:spPr>
           <a:xfrm>
             <a:off x="105120" y="5029200"/>
-            <a:ext cx="2055240" cy="912240"/>
+            <a:ext cx="2054880" cy="911880"/>
           </a:xfrm>
           <a:prstGeom prst="rect">
             <a:avLst/>
@@ -6034,14 +6333,14 @@
       </p:sp>
       <p:sp>
         <p:nvSpPr>
-          <p:cNvPr id="83" name=""/>
+          <p:cNvPr id="84" name=""/>
           <p:cNvSpPr/>
           <p:nvPr/>
         </p:nvSpPr>
         <p:spPr>
           <a:xfrm>
             <a:off x="2286000" y="5373000"/>
-            <a:ext cx="4112640" cy="1309320"/>
+            <a:ext cx="4112280" cy="1309320"/>
           </a:xfrm>
           <a:prstGeom prst="rect">
             <a:avLst/>
@@ -6188,7 +6487,7 @@
       </p:grpSpPr>
       <p:pic>
         <p:nvPicPr>
-          <p:cNvPr id="84" name=""/>
+          <p:cNvPr id="85" name=""/>
           <p:cNvPicPr/>
           <p:nvPr/>
         </p:nvPicPr>
@@ -6199,7 +6498,7 @@
         <p:spPr>
           <a:xfrm>
             <a:off x="25920" y="576360"/>
-            <a:ext cx="10056240" cy="5575680"/>
+            <a:ext cx="10055880" cy="5575320"/>
           </a:xfrm>
           <a:prstGeom prst="rect">
             <a:avLst/>
@@ -6212,14 +6511,14 @@
       </p:pic>
       <p:sp>
         <p:nvSpPr>
-          <p:cNvPr id="85" name=""/>
+          <p:cNvPr id="86" name=""/>
           <p:cNvSpPr/>
           <p:nvPr/>
         </p:nvSpPr>
         <p:spPr>
           <a:xfrm>
             <a:off x="105480" y="5029200"/>
-            <a:ext cx="2055240" cy="912240"/>
+            <a:ext cx="2054880" cy="911880"/>
           </a:xfrm>
           <a:prstGeom prst="rect">
             <a:avLst/>
@@ -6256,14 +6555,14 @@
       </p:sp>
       <p:sp>
         <p:nvSpPr>
-          <p:cNvPr id="86" name=""/>
+          <p:cNvPr id="87" name=""/>
           <p:cNvSpPr/>
           <p:nvPr/>
         </p:nvSpPr>
         <p:spPr>
           <a:xfrm>
             <a:off x="2286000" y="4800600"/>
-            <a:ext cx="4112640" cy="1309320"/>
+            <a:ext cx="4112280" cy="1309320"/>
           </a:xfrm>
           <a:prstGeom prst="rect">
             <a:avLst/>
@@ -6298,8 +6597,23 @@
                 <a:uFillTx/>
                 <a:latin typeface="Arial"/>
               </a:rPr>
-              <a:t>setwd(“src”</a:t>
-            </a:r>
+              <a:t>setwd(“src”) = </a:t>
+            </a:r>
+            <a:endParaRPr lang="en-US" sz="2000" b="0" u="none" strike="noStrike">
+              <a:solidFill>
+                <a:srgbClr val="000000"/>
+              </a:solidFill>
+              <a:effectLst/>
+              <a:uFillTx/>
+              <a:latin typeface="Arial"/>
+            </a:endParaRPr>
+          </a:p>
+          <a:p>
+            <a:pPr>
+              <a:lnSpc>
+                <a:spcPct val="100000"/>
+              </a:lnSpc>
+            </a:pPr>
             <a:r>
               <a:rPr lang="en-US" sz="2000" b="0" u="none" strike="noStrike">
                 <a:solidFill>
@@ -6309,7 +6623,7 @@
                 <a:uFillTx/>
                 <a:latin typeface="Arial"/>
               </a:rPr>
-              <a:t>) = </a:t>
+              <a:t>Set working directory src</a:t>
             </a:r>
             <a:endParaRPr lang="en-US" sz="2000" b="0" u="none" strike="noStrike">
               <a:solidFill>
@@ -6335,40 +6649,7 @@
                 <a:uFillTx/>
                 <a:latin typeface="Arial"/>
               </a:rPr>
-              <a:t>Set </a:t>
-            </a:r>
-            <a:r>
-              <a:rPr lang="en-US" sz="2000" b="0" u="none" strike="noStrike">
-                <a:solidFill>
-                  <a:srgbClr val="FF00FF"/>
-                </a:solidFill>
-                <a:effectLst/>
-                <a:uFillTx/>
-                <a:latin typeface="Arial"/>
-              </a:rPr>
-              <a:t>working </a:t>
-            </a:r>
-            <a:r>
-              <a:rPr lang="en-US" sz="2000" b="0" u="none" strike="noStrike">
-                <a:solidFill>
-                  <a:srgbClr val="FF00FF"/>
-                </a:solidFill>
-                <a:effectLst/>
-                <a:uFillTx/>
-                <a:latin typeface="Arial"/>
-              </a:rPr>
-              <a:t>directory </a:t>
-            </a:r>
-            <a:r>
-              <a:rPr lang="en-US" sz="2000" b="0" u="none" strike="noStrike">
-                <a:solidFill>
-                  <a:srgbClr val="FF00FF"/>
-                </a:solidFill>
-                <a:effectLst/>
-                <a:uFillTx/>
-                <a:latin typeface="Arial"/>
-              </a:rPr>
-              <a:t>src</a:t>
+              <a:t>Then getwd – get working directory</a:t>
             </a:r>
             <a:endParaRPr lang="en-US" sz="2000" b="0" u="none" strike="noStrike">
               <a:solidFill>
@@ -6379,88 +6660,18 @@
               <a:latin typeface="Arial"/>
             </a:endParaRPr>
           </a:p>
-          <a:p>
-            <a:pPr>
-              <a:lnSpc>
-                <a:spcPct val="100000"/>
-              </a:lnSpc>
-            </a:pPr>
-            <a:r>
-              <a:rPr lang="en-US" sz="2000" b="0" u="none" strike="noStrike">
-                <a:solidFill>
-                  <a:srgbClr val="FF00FF"/>
-                </a:solidFill>
-                <a:effectLst/>
-                <a:uFillTx/>
-                <a:latin typeface="Arial"/>
-              </a:rPr>
-              <a:t>Then </a:t>
-            </a:r>
-            <a:r>
-              <a:rPr lang="en-US" sz="2000" b="0" u="none" strike="noStrike">
-                <a:solidFill>
-                  <a:srgbClr val="FF00FF"/>
-                </a:solidFill>
-                <a:effectLst/>
-                <a:uFillTx/>
-                <a:latin typeface="Arial"/>
-              </a:rPr>
-              <a:t>getwd – </a:t>
-            </a:r>
-            <a:r>
-              <a:rPr lang="en-US" sz="2000" b="0" u="none" strike="noStrike">
-                <a:solidFill>
-                  <a:srgbClr val="FF00FF"/>
-                </a:solidFill>
-                <a:effectLst/>
-                <a:uFillTx/>
-                <a:latin typeface="Arial"/>
-              </a:rPr>
-              <a:t>get </a:t>
-            </a:r>
-            <a:r>
-              <a:rPr lang="en-US" sz="2000" b="0" u="none" strike="noStrike">
-                <a:solidFill>
-                  <a:srgbClr val="FF00FF"/>
-                </a:solidFill>
-                <a:effectLst/>
-                <a:uFillTx/>
-                <a:latin typeface="Arial"/>
-              </a:rPr>
-              <a:t>working </a:t>
-            </a:r>
-            <a:r>
-              <a:rPr lang="en-US" sz="2000" b="0" u="none" strike="noStrike">
-                <a:solidFill>
-                  <a:srgbClr val="FF00FF"/>
-                </a:solidFill>
-                <a:effectLst/>
-                <a:uFillTx/>
-                <a:latin typeface="Arial"/>
-              </a:rPr>
-              <a:t>directory</a:t>
-            </a:r>
-            <a:endParaRPr lang="en-US" sz="2000" b="0" u="none" strike="noStrike">
-              <a:solidFill>
-                <a:srgbClr val="000000"/>
-              </a:solidFill>
-              <a:effectLst/>
-              <a:uFillTx/>
-              <a:latin typeface="Arial"/>
-            </a:endParaRPr>
-          </a:p>
-        </p:txBody>
-      </p:sp>
-      <p:sp>
-        <p:nvSpPr>
-          <p:cNvPr id="87" name=""/>
+        </p:txBody>
+      </p:sp>
+      <p:sp>
+        <p:nvSpPr>
+          <p:cNvPr id="88" name=""/>
           <p:cNvSpPr/>
           <p:nvPr/>
         </p:nvSpPr>
         <p:spPr>
           <a:xfrm>
             <a:off x="7315200" y="4034160"/>
-            <a:ext cx="4112640" cy="394560"/>
+            <a:ext cx="4112280" cy="394560"/>
           </a:xfrm>
           <a:prstGeom prst="rect">
             <a:avLst/>
@@ -6540,7 +6751,7 @@
       </p:grpSpPr>
       <p:pic>
         <p:nvPicPr>
-          <p:cNvPr id="88" name=""/>
+          <p:cNvPr id="89" name=""/>
           <p:cNvPicPr/>
           <p:nvPr/>
         </p:nvPicPr>
@@ -6551,7 +6762,7 @@
         <p:spPr>
           <a:xfrm>
             <a:off x="25920" y="576360"/>
-            <a:ext cx="10056240" cy="5575680"/>
+            <a:ext cx="10055880" cy="5575320"/>
           </a:xfrm>
           <a:prstGeom prst="rect">
             <a:avLst/>
@@ -6564,14 +6775,14 @@
       </p:pic>
       <p:sp>
         <p:nvSpPr>
-          <p:cNvPr id="89" name=""/>
+          <p:cNvPr id="90" name=""/>
           <p:cNvSpPr/>
           <p:nvPr/>
         </p:nvSpPr>
         <p:spPr>
           <a:xfrm>
             <a:off x="105480" y="5029200"/>
-            <a:ext cx="2055240" cy="912240"/>
+            <a:ext cx="2054880" cy="911880"/>
           </a:xfrm>
           <a:prstGeom prst="rect">
             <a:avLst/>
@@ -6608,14 +6819,14 @@
       </p:sp>
       <p:sp>
         <p:nvSpPr>
-          <p:cNvPr id="90" name=""/>
+          <p:cNvPr id="91" name=""/>
           <p:cNvSpPr/>
           <p:nvPr/>
         </p:nvSpPr>
         <p:spPr>
           <a:xfrm>
             <a:off x="2286000" y="4800600"/>
-            <a:ext cx="4112640" cy="1309320"/>
+            <a:ext cx="4112280" cy="1309320"/>
           </a:xfrm>
           <a:prstGeom prst="rect">
             <a:avLst/>
@@ -6717,14 +6928,14 @@
       </p:sp>
       <p:sp>
         <p:nvSpPr>
-          <p:cNvPr id="91" name=""/>
+          <p:cNvPr id="92" name=""/>
           <p:cNvSpPr/>
           <p:nvPr/>
         </p:nvSpPr>
         <p:spPr>
           <a:xfrm>
             <a:off x="7315200" y="4034160"/>
-            <a:ext cx="4112640" cy="394560"/>
+            <a:ext cx="4112280" cy="394560"/>
           </a:xfrm>
           <a:prstGeom prst="rect">
             <a:avLst/>
@@ -6774,14 +6985,14 @@
       </p:sp>
       <p:sp>
         <p:nvSpPr>
-          <p:cNvPr id="92" name=""/>
+          <p:cNvPr id="93" name=""/>
           <p:cNvSpPr/>
           <p:nvPr/>
         </p:nvSpPr>
         <p:spPr>
           <a:xfrm>
             <a:off x="914400" y="804960"/>
-            <a:ext cx="912240" cy="335880"/>
+            <a:ext cx="911880" cy="335520"/>
           </a:xfrm>
           <a:prstGeom prst="rect">
             <a:avLst/>
@@ -6848,14 +7059,14 @@
       </p:grpSpPr>
       <p:sp>
         <p:nvSpPr>
-          <p:cNvPr id="15" name=""/>
+          <p:cNvPr id="16" name=""/>
           <p:cNvSpPr/>
           <p:nvPr/>
         </p:nvSpPr>
         <p:spPr>
           <a:xfrm>
             <a:off x="685800" y="914400"/>
-            <a:ext cx="10972080" cy="6063120"/>
+            <a:ext cx="10971720" cy="6062760"/>
           </a:xfrm>
           <a:prstGeom prst="rect">
             <a:avLst/>
@@ -7323,7 +7534,7 @@
       </p:grpSpPr>
       <p:pic>
         <p:nvPicPr>
-          <p:cNvPr id="93" name=""/>
+          <p:cNvPr id="94" name=""/>
           <p:cNvPicPr/>
           <p:nvPr/>
         </p:nvPicPr>
@@ -7334,7 +7545,7 @@
         <p:spPr>
           <a:xfrm>
             <a:off x="25920" y="576360"/>
-            <a:ext cx="10056240" cy="5575680"/>
+            <a:ext cx="10055880" cy="5575320"/>
           </a:xfrm>
           <a:prstGeom prst="rect">
             <a:avLst/>
@@ -7347,14 +7558,14 @@
       </p:pic>
       <p:sp>
         <p:nvSpPr>
-          <p:cNvPr id="94" name=""/>
+          <p:cNvPr id="95" name=""/>
           <p:cNvSpPr/>
           <p:nvPr/>
         </p:nvSpPr>
         <p:spPr>
           <a:xfrm>
             <a:off x="5943600" y="2971800"/>
-            <a:ext cx="912240" cy="335880"/>
+            <a:ext cx="911880" cy="335520"/>
           </a:xfrm>
           <a:prstGeom prst="rect">
             <a:avLst/>
@@ -7391,14 +7602,14 @@
       </p:sp>
       <p:sp>
         <p:nvSpPr>
-          <p:cNvPr id="95" name=""/>
+          <p:cNvPr id="96" name=""/>
           <p:cNvSpPr/>
           <p:nvPr/>
         </p:nvSpPr>
         <p:spPr>
           <a:xfrm>
             <a:off x="6400800" y="4034160"/>
-            <a:ext cx="4112640" cy="1309320"/>
+            <a:ext cx="4112280" cy="1309320"/>
           </a:xfrm>
           <a:prstGeom prst="rect">
             <a:avLst/>
@@ -7478,7 +7689,7 @@
       </p:grpSpPr>
       <p:pic>
         <p:nvPicPr>
-          <p:cNvPr id="96" name=""/>
+          <p:cNvPr id="97" name=""/>
           <p:cNvPicPr/>
           <p:nvPr/>
         </p:nvPicPr>
@@ -7489,7 +7700,7 @@
         <p:spPr>
           <a:xfrm>
             <a:off x="243000" y="117000"/>
-            <a:ext cx="11754720" cy="6641640"/>
+            <a:ext cx="11754360" cy="6641280"/>
           </a:xfrm>
           <a:prstGeom prst="rect">
             <a:avLst/>
@@ -7502,14 +7713,14 @@
       </p:pic>
       <p:sp>
         <p:nvSpPr>
-          <p:cNvPr id="97" name=""/>
+          <p:cNvPr id="98" name=""/>
           <p:cNvSpPr/>
           <p:nvPr/>
         </p:nvSpPr>
         <p:spPr>
           <a:xfrm>
             <a:off x="1828800" y="2743200"/>
-            <a:ext cx="4112640" cy="394560"/>
+            <a:ext cx="4112280" cy="394560"/>
           </a:xfrm>
           <a:prstGeom prst="rect">
             <a:avLst/>
@@ -7559,14 +7770,14 @@
       </p:sp>
       <p:sp>
         <p:nvSpPr>
-          <p:cNvPr id="98" name=""/>
+          <p:cNvPr id="99" name=""/>
           <p:cNvSpPr/>
           <p:nvPr/>
         </p:nvSpPr>
         <p:spPr>
           <a:xfrm>
             <a:off x="2286000" y="1574280"/>
-            <a:ext cx="4112640" cy="1004400"/>
+            <a:ext cx="4112280" cy="1004400"/>
           </a:xfrm>
           <a:prstGeom prst="rect">
             <a:avLst/>
@@ -7631,14 +7842,14 @@
       </p:sp>
       <p:sp>
         <p:nvSpPr>
-          <p:cNvPr id="99" name=""/>
+          <p:cNvPr id="100" name=""/>
           <p:cNvSpPr/>
           <p:nvPr/>
         </p:nvSpPr>
         <p:spPr>
           <a:xfrm>
             <a:off x="228600" y="1143000"/>
-            <a:ext cx="2055240" cy="912240"/>
+            <a:ext cx="2054880" cy="911880"/>
           </a:xfrm>
           <a:prstGeom prst="rect">
             <a:avLst/>
@@ -7705,14 +7916,14 @@
       </p:grpSpPr>
       <p:sp>
         <p:nvSpPr>
-          <p:cNvPr id="100" name=""/>
+          <p:cNvPr id="101" name=""/>
           <p:cNvSpPr/>
           <p:nvPr/>
         </p:nvSpPr>
         <p:spPr>
           <a:xfrm>
             <a:off x="1371600" y="1371600"/>
-            <a:ext cx="6400440" cy="4478760"/>
+            <a:ext cx="6400080" cy="4478760"/>
           </a:xfrm>
           <a:prstGeom prst="rect">
             <a:avLst/>
@@ -8083,14 +8294,14 @@
       </p:grpSpPr>
       <p:sp>
         <p:nvSpPr>
-          <p:cNvPr id="101" name=""/>
+          <p:cNvPr id="102" name=""/>
           <p:cNvSpPr/>
           <p:nvPr/>
         </p:nvSpPr>
         <p:spPr>
           <a:xfrm>
             <a:off x="685800" y="286560"/>
-            <a:ext cx="10742400" cy="4539600"/>
+            <a:ext cx="10742040" cy="4539600"/>
           </a:xfrm>
           <a:prstGeom prst="rect">
             <a:avLst/>
@@ -8494,14 +8705,14 @@
       </p:grpSpPr>
       <p:sp>
         <p:nvSpPr>
-          <p:cNvPr id="102" name=""/>
+          <p:cNvPr id="103" name=""/>
           <p:cNvSpPr/>
           <p:nvPr/>
         </p:nvSpPr>
         <p:spPr>
           <a:xfrm>
             <a:off x="1143000" y="931680"/>
-            <a:ext cx="9600840" cy="2954520"/>
+            <a:ext cx="9600480" cy="2954520"/>
           </a:xfrm>
           <a:prstGeom prst="rect">
             <a:avLst/>
@@ -8760,14 +8971,14 @@
       </p:grpSpPr>
       <p:sp>
         <p:nvSpPr>
-          <p:cNvPr id="103" name=""/>
-          <p:cNvSpPr txBox="1"/>
+          <p:cNvPr id="104" name=""/>
+          <p:cNvSpPr/>
           <p:nvPr/>
         </p:nvSpPr>
         <p:spPr>
           <a:xfrm>
             <a:off x="914400" y="914400"/>
-            <a:ext cx="10287000" cy="4953600"/>
+            <a:ext cx="10286640" cy="4953240"/>
           </a:xfrm>
           <a:prstGeom prst="rect">
             <a:avLst/>
@@ -8777,11 +8988,22 @@
             <a:noFill/>
           </a:ln>
         </p:spPr>
+        <p:style>
+          <a:lnRef idx="0"/>
+          <a:fillRef idx="0"/>
+          <a:effectRef idx="0"/>
+          <a:fontRef idx="minor"/>
+        </p:style>
         <p:txBody>
           <a:bodyPr lIns="90000" tIns="45000" rIns="90000" bIns="45000" anchor="t">
             <a:spAutoFit/>
           </a:bodyPr>
           <a:p>
+            <a:pPr>
+              <a:lnSpc>
+                <a:spcPct val="100000"/>
+              </a:lnSpc>
+            </a:pPr>
             <a:r>
               <a:rPr lang="en-US" sz="1800" b="0" u="none" strike="noStrike">
                 <a:solidFill>
@@ -8803,6 +9025,11 @@
             </a:endParaRPr>
           </a:p>
           <a:p>
+            <a:pPr>
+              <a:lnSpc>
+                <a:spcPct val="100000"/>
+              </a:lnSpc>
+            </a:pPr>
             <a:endParaRPr lang="en-US" sz="1800" b="0" u="none" strike="noStrike">
               <a:solidFill>
                 <a:srgbClr val="000000"/>
@@ -8813,6 +9040,11 @@
             </a:endParaRPr>
           </a:p>
           <a:p>
+            <a:pPr>
+              <a:lnSpc>
+                <a:spcPct val="100000"/>
+              </a:lnSpc>
+            </a:pPr>
             <a:r>
               <a:rPr lang="en-US" sz="1800" b="0" u="none" strike="noStrike">
                 <a:solidFill>
@@ -8834,6 +9066,11 @@
             </a:endParaRPr>
           </a:p>
           <a:p>
+            <a:pPr>
+              <a:lnSpc>
+                <a:spcPct val="100000"/>
+              </a:lnSpc>
+            </a:pPr>
             <a:endParaRPr lang="en-US" sz="1800" b="0" u="none" strike="noStrike">
               <a:solidFill>
                 <a:srgbClr val="000000"/>
@@ -8844,6 +9081,11 @@
             </a:endParaRPr>
           </a:p>
           <a:p>
+            <a:pPr>
+              <a:lnSpc>
+                <a:spcPct val="100000"/>
+              </a:lnSpc>
+            </a:pPr>
             <a:r>
               <a:rPr lang="en-US" sz="1800" b="0" u="none" strike="noStrike">
                 <a:solidFill>
@@ -8865,6 +9107,11 @@
             </a:endParaRPr>
           </a:p>
           <a:p>
+            <a:pPr>
+              <a:lnSpc>
+                <a:spcPct val="100000"/>
+              </a:lnSpc>
+            </a:pPr>
             <a:endParaRPr lang="en-US" sz="1800" b="0" u="none" strike="noStrike">
               <a:solidFill>
                 <a:srgbClr val="000000"/>
@@ -8875,6 +9122,11 @@
             </a:endParaRPr>
           </a:p>
           <a:p>
+            <a:pPr>
+              <a:lnSpc>
+                <a:spcPct val="100000"/>
+              </a:lnSpc>
+            </a:pPr>
             <a:r>
               <a:rPr lang="en-US" sz="1800" b="0" u="none" strike="noStrike">
                 <a:solidFill>
@@ -8896,6 +9148,11 @@
             </a:endParaRPr>
           </a:p>
           <a:p>
+            <a:pPr>
+              <a:lnSpc>
+                <a:spcPct val="100000"/>
+              </a:lnSpc>
+            </a:pPr>
             <a:endParaRPr lang="en-US" sz="1800" b="0" u="none" strike="noStrike">
               <a:solidFill>
                 <a:srgbClr val="000000"/>
@@ -8906,6 +9163,11 @@
             </a:endParaRPr>
           </a:p>
           <a:p>
+            <a:pPr>
+              <a:lnSpc>
+                <a:spcPct val="100000"/>
+              </a:lnSpc>
+            </a:pPr>
             <a:endParaRPr lang="en-US" sz="1800" b="0" u="none" strike="noStrike">
               <a:solidFill>
                 <a:srgbClr val="000000"/>
@@ -8916,6 +9178,11 @@
             </a:endParaRPr>
           </a:p>
           <a:p>
+            <a:pPr>
+              <a:lnSpc>
+                <a:spcPct val="100000"/>
+              </a:lnSpc>
+            </a:pPr>
             <a:r>
               <a:rPr lang="en-US" sz="1800" b="0" u="none" strike="noStrike">
                 <a:solidFill>
@@ -8937,6 +9204,11 @@
             </a:endParaRPr>
           </a:p>
           <a:p>
+            <a:pPr>
+              <a:lnSpc>
+                <a:spcPct val="100000"/>
+              </a:lnSpc>
+            </a:pPr>
             <a:endParaRPr lang="en-US" sz="1800" b="0" u="none" strike="noStrike">
               <a:solidFill>
                 <a:srgbClr val="000000"/>
@@ -8947,6 +9219,11 @@
             </a:endParaRPr>
           </a:p>
           <a:p>
+            <a:pPr>
+              <a:lnSpc>
+                <a:spcPct val="100000"/>
+              </a:lnSpc>
+            </a:pPr>
             <a:r>
               <a:rPr lang="en-US" sz="1800" b="0" u="none" strike="noStrike">
                 <a:solidFill>
@@ -8968,6 +9245,11 @@
             </a:endParaRPr>
           </a:p>
           <a:p>
+            <a:pPr>
+              <a:lnSpc>
+                <a:spcPct val="100000"/>
+              </a:lnSpc>
+            </a:pPr>
             <a:endParaRPr lang="en-US" sz="1800" b="0" u="none" strike="noStrike">
               <a:solidFill>
                 <a:srgbClr val="000000"/>
@@ -8978,6 +9260,11 @@
             </a:endParaRPr>
           </a:p>
           <a:p>
+            <a:pPr>
+              <a:lnSpc>
+                <a:spcPct val="100000"/>
+              </a:lnSpc>
+            </a:pPr>
             <a:r>
               <a:rPr lang="en-US" sz="1800" b="0" u="none" strike="noStrike">
                 <a:solidFill>
@@ -8999,6 +9286,11 @@
             </a:endParaRPr>
           </a:p>
           <a:p>
+            <a:pPr>
+              <a:lnSpc>
+                <a:spcPct val="100000"/>
+              </a:lnSpc>
+            </a:pPr>
             <a:endParaRPr lang="en-US" sz="1800" b="0" u="none" strike="noStrike">
               <a:solidFill>
                 <a:srgbClr val="000000"/>
@@ -9009,6 +9301,11 @@
             </a:endParaRPr>
           </a:p>
           <a:p>
+            <a:pPr>
+              <a:lnSpc>
+                <a:spcPct val="100000"/>
+              </a:lnSpc>
+            </a:pPr>
             <a:endParaRPr lang="en-US" sz="1800" b="0" u="none" strike="noStrike">
               <a:solidFill>
                 <a:srgbClr val="000000"/>
@@ -9019,6 +9316,11 @@
             </a:endParaRPr>
           </a:p>
           <a:p>
+            <a:pPr>
+              <a:lnSpc>
+                <a:spcPct val="100000"/>
+              </a:lnSpc>
+            </a:pPr>
             <a:endParaRPr lang="en-US" sz="1800" b="0" u="none" strike="noStrike">
               <a:solidFill>
                 <a:srgbClr val="000000"/>
@@ -9062,7 +9364,7 @@
       </p:grpSpPr>
       <p:sp>
         <p:nvSpPr>
-          <p:cNvPr id="104" name="PlaceHolder 1"/>
+          <p:cNvPr id="105" name="PlaceHolder 1"/>
           <p:cNvSpPr>
             <a:spLocks noGrp="1"/>
           </p:cNvSpPr>
@@ -9073,7 +9375,7 @@
         <p:spPr>
           <a:xfrm>
             <a:off x="609480" y="1604520"/>
-            <a:ext cx="10970640" cy="3975480"/>
+            <a:ext cx="10970280" cy="3975120"/>
           </a:xfrm>
           <a:prstGeom prst="rect">
             <a:avLst/>
@@ -9107,14 +9409,14 @@
       </p:sp>
       <p:sp>
         <p:nvSpPr>
-          <p:cNvPr id="105" name="TextBox 4"/>
+          <p:cNvPr id="106" name="TextBox 4"/>
           <p:cNvSpPr/>
           <p:nvPr/>
         </p:nvSpPr>
         <p:spPr>
           <a:xfrm>
             <a:off x="502920" y="201240"/>
-            <a:ext cx="11155320" cy="396360"/>
+            <a:ext cx="11154960" cy="396000"/>
           </a:xfrm>
           <a:prstGeom prst="rect">
             <a:avLst/>
@@ -9164,14 +9466,14 @@
       </p:sp>
       <p:sp>
         <p:nvSpPr>
-          <p:cNvPr id="106" name="TextBox 30"/>
+          <p:cNvPr id="107" name="TextBox 30"/>
           <p:cNvSpPr/>
           <p:nvPr/>
         </p:nvSpPr>
         <p:spPr>
           <a:xfrm>
             <a:off x="502920" y="1051560"/>
-            <a:ext cx="11246760" cy="488160"/>
+            <a:ext cx="11246400" cy="487800"/>
           </a:xfrm>
           <a:prstGeom prst="rect">
             <a:avLst/>
@@ -9217,29 +9519,7 @@
                 <a:uFillTx/>
                 <a:latin typeface="Arial"/>
               </a:rPr>
-              <a:t>   terminal AI pair </a:t>
-            </a:r>
-            <a:r>
-              <a:rPr lang="en-US" sz="1800" b="0" u="none" strike="noStrike">
-                <a:solidFill>
-                  <a:srgbClr val="404040"/>
-                </a:solidFill>
-                <a:effectLst/>
-                <a:uFillTx/>
-                <a:latin typeface="Arial"/>
-              </a:rPr>
-              <a:t>programming, any model </a:t>
-            </a:r>
-            <a:r>
-              <a:rPr lang="en-US" sz="1800" b="0" u="none" strike="noStrike">
-                <a:solidFill>
-                  <a:srgbClr val="404040"/>
-                </a:solidFill>
-                <a:effectLst/>
-                <a:uFillTx/>
-                <a:latin typeface="Arial"/>
-              </a:rPr>
-              <a:t>via LiteLLM</a:t>
+              <a:t>   terminal AI pair programming, any model via LiteLLM</a:t>
             </a:r>
             <a:endParaRPr lang="en-US" sz="1800" b="0" u="none" strike="noStrike">
               <a:solidFill>
@@ -9265,18 +9545,7 @@
                 <a:uFillTx/>
                 <a:latin typeface="Courier New"/>
               </a:rPr>
-              <a:t>https://github.com/Aider-</a:t>
-            </a:r>
-            <a:r>
-              <a:rPr lang="en-US" sz="1400" b="0" u="none" strike="noStrike">
-                <a:solidFill>
-                  <a:srgbClr val="666666"/>
-                </a:solidFill>
-                <a:effectLst/>
-                <a:uFillTx/>
-                <a:latin typeface="Courier New"/>
-              </a:rPr>
-              <a:t>AI/aider</a:t>
+              <a:t>https://github.com/Aider-AI/aider</a:t>
             </a:r>
             <a:endParaRPr lang="en-US" sz="1400" b="0" u="none" strike="noStrike">
               <a:solidFill>
@@ -9291,14 +9560,14 @@
       </p:sp>
       <p:sp>
         <p:nvSpPr>
-          <p:cNvPr id="107" name="TextBox 31"/>
+          <p:cNvPr id="108" name="TextBox 31"/>
           <p:cNvSpPr/>
           <p:nvPr/>
         </p:nvSpPr>
         <p:spPr>
           <a:xfrm>
             <a:off x="502920" y="1856160"/>
-            <a:ext cx="11246760" cy="488160"/>
+            <a:ext cx="11246400" cy="487800"/>
           </a:xfrm>
           <a:prstGeom prst="rect">
             <a:avLst/>
@@ -9385,14 +9654,14 @@
       </p:sp>
       <p:sp>
         <p:nvSpPr>
-          <p:cNvPr id="108" name="TextBox 32"/>
+          <p:cNvPr id="109" name="TextBox 32"/>
           <p:cNvSpPr/>
           <p:nvPr/>
         </p:nvSpPr>
         <p:spPr>
           <a:xfrm>
             <a:off x="502920" y="2660760"/>
-            <a:ext cx="11246760" cy="488160"/>
+            <a:ext cx="11246400" cy="487800"/>
           </a:xfrm>
           <a:prstGeom prst="rect">
             <a:avLst/>
@@ -9479,14 +9748,14 @@
       </p:sp>
       <p:sp>
         <p:nvSpPr>
-          <p:cNvPr id="109" name="TextBox 33"/>
+          <p:cNvPr id="110" name="TextBox 33"/>
           <p:cNvSpPr/>
           <p:nvPr/>
         </p:nvSpPr>
         <p:spPr>
           <a:xfrm>
             <a:off x="502920" y="3465720"/>
-            <a:ext cx="11246760" cy="488160"/>
+            <a:ext cx="11246400" cy="487800"/>
           </a:xfrm>
           <a:prstGeom prst="rect">
             <a:avLst/>
@@ -9573,14 +9842,14 @@
       </p:sp>
       <p:sp>
         <p:nvSpPr>
-          <p:cNvPr id="110" name="TextBox 34"/>
+          <p:cNvPr id="111" name="TextBox 34"/>
           <p:cNvSpPr/>
           <p:nvPr/>
         </p:nvSpPr>
         <p:spPr>
           <a:xfrm>
             <a:off x="502920" y="4270320"/>
-            <a:ext cx="11246760" cy="488160"/>
+            <a:ext cx="11246400" cy="487800"/>
           </a:xfrm>
           <a:prstGeom prst="rect">
             <a:avLst/>
@@ -9667,14 +9936,14 @@
       </p:sp>
       <p:sp>
         <p:nvSpPr>
-          <p:cNvPr id="111" name="TextBox 35"/>
+          <p:cNvPr id="112" name="TextBox 35"/>
           <p:cNvSpPr/>
           <p:nvPr/>
         </p:nvSpPr>
         <p:spPr>
           <a:xfrm>
             <a:off x="502920" y="5074920"/>
-            <a:ext cx="11246760" cy="488160"/>
+            <a:ext cx="11246400" cy="487800"/>
           </a:xfrm>
           <a:prstGeom prst="rect">
             <a:avLst/>
@@ -9761,14 +10030,14 @@
       </p:sp>
       <p:sp>
         <p:nvSpPr>
-          <p:cNvPr id="112" name="TextBox 36"/>
+          <p:cNvPr id="113" name="TextBox 36"/>
           <p:cNvSpPr/>
           <p:nvPr/>
         </p:nvSpPr>
         <p:spPr>
           <a:xfrm>
             <a:off x="502920" y="5943600"/>
-            <a:ext cx="11246760" cy="244080"/>
+            <a:ext cx="11246400" cy="243720"/>
           </a:xfrm>
           <a:prstGeom prst="rect">
             <a:avLst/>
@@ -9848,7 +10117,7 @@
       </p:grpSpPr>
       <p:sp>
         <p:nvSpPr>
-          <p:cNvPr id="113" name="PlaceHolder 1"/>
+          <p:cNvPr id="114" name="PlaceHolder 1"/>
           <p:cNvSpPr>
             <a:spLocks noGrp="1"/>
           </p:cNvSpPr>
@@ -9859,7 +10128,7 @@
         <p:spPr>
           <a:xfrm>
             <a:off x="609480" y="1604520"/>
-            <a:ext cx="10970640" cy="3975480"/>
+            <a:ext cx="10970280" cy="3975120"/>
           </a:xfrm>
           <a:prstGeom prst="rect">
             <a:avLst/>
@@ -9893,14 +10162,14 @@
       </p:sp>
       <p:sp>
         <p:nvSpPr>
-          <p:cNvPr id="114" name="TextBox 2"/>
+          <p:cNvPr id="115" name="TextBox 2"/>
           <p:cNvSpPr/>
           <p:nvPr/>
         </p:nvSpPr>
         <p:spPr>
           <a:xfrm>
             <a:off x="502920" y="201240"/>
-            <a:ext cx="11155320" cy="791640"/>
+            <a:ext cx="11154960" cy="791640"/>
           </a:xfrm>
           <a:prstGeom prst="rect">
             <a:avLst/>
@@ -9976,14 +10245,14 @@
       </p:sp>
       <p:sp>
         <p:nvSpPr>
-          <p:cNvPr id="115" name="TextBox 37"/>
+          <p:cNvPr id="116" name="TextBox 37"/>
           <p:cNvSpPr/>
           <p:nvPr/>
         </p:nvSpPr>
         <p:spPr>
           <a:xfrm>
             <a:off x="502920" y="1149840"/>
-            <a:ext cx="11246760" cy="274680"/>
+            <a:ext cx="11246400" cy="274320"/>
           </a:xfrm>
           <a:prstGeom prst="rect">
             <a:avLst/>
@@ -10033,14 +10302,14 @@
       </p:sp>
       <p:sp>
         <p:nvSpPr>
-          <p:cNvPr id="116" name="TextBox 38"/>
+          <p:cNvPr id="117" name="TextBox 38"/>
           <p:cNvSpPr/>
           <p:nvPr/>
         </p:nvSpPr>
         <p:spPr>
           <a:xfrm>
             <a:off x="502920" y="1417320"/>
-            <a:ext cx="11246760" cy="488160"/>
+            <a:ext cx="11246400" cy="487800"/>
           </a:xfrm>
           <a:prstGeom prst="rect">
             <a:avLst/>
@@ -10127,14 +10396,14 @@
       </p:sp>
       <p:sp>
         <p:nvSpPr>
-          <p:cNvPr id="117" name="TextBox 39"/>
+          <p:cNvPr id="118" name="TextBox 39"/>
           <p:cNvSpPr/>
           <p:nvPr/>
         </p:nvSpPr>
         <p:spPr>
           <a:xfrm>
             <a:off x="502920" y="2176200"/>
-            <a:ext cx="11246760" cy="488160"/>
+            <a:ext cx="11246400" cy="487800"/>
           </a:xfrm>
           <a:prstGeom prst="rect">
             <a:avLst/>
@@ -10221,14 +10490,14 @@
       </p:sp>
       <p:sp>
         <p:nvSpPr>
-          <p:cNvPr id="118" name="TextBox 40"/>
+          <p:cNvPr id="119" name="TextBox 40"/>
           <p:cNvSpPr/>
           <p:nvPr/>
         </p:nvSpPr>
         <p:spPr>
           <a:xfrm>
             <a:off x="502920" y="2935080"/>
-            <a:ext cx="11246760" cy="488160"/>
+            <a:ext cx="11246400" cy="487800"/>
           </a:xfrm>
           <a:prstGeom prst="rect">
             <a:avLst/>
@@ -10315,14 +10584,14 @@
       </p:sp>
       <p:sp>
         <p:nvSpPr>
-          <p:cNvPr id="119" name="TextBox 41"/>
+          <p:cNvPr id="120" name="TextBox 41"/>
           <p:cNvSpPr/>
           <p:nvPr/>
         </p:nvSpPr>
         <p:spPr>
           <a:xfrm>
             <a:off x="502920" y="3694320"/>
-            <a:ext cx="11246760" cy="488160"/>
+            <a:ext cx="11246400" cy="487800"/>
           </a:xfrm>
           <a:prstGeom prst="rect">
             <a:avLst/>
@@ -10409,14 +10678,14 @@
       </p:sp>
       <p:sp>
         <p:nvSpPr>
-          <p:cNvPr id="120" name="TextBox 42"/>
+          <p:cNvPr id="121" name="TextBox 42"/>
           <p:cNvSpPr/>
           <p:nvPr/>
         </p:nvSpPr>
         <p:spPr>
           <a:xfrm>
             <a:off x="502920" y="4572000"/>
-            <a:ext cx="11246760" cy="274680"/>
+            <a:ext cx="11246400" cy="274320"/>
           </a:xfrm>
           <a:prstGeom prst="rect">
             <a:avLst/>
@@ -10466,14 +10735,14 @@
       </p:sp>
       <p:sp>
         <p:nvSpPr>
-          <p:cNvPr id="121" name="TextBox 43"/>
+          <p:cNvPr id="122" name="TextBox 43"/>
           <p:cNvSpPr/>
           <p:nvPr/>
         </p:nvSpPr>
         <p:spPr>
           <a:xfrm>
             <a:off x="502920" y="4983480"/>
-            <a:ext cx="11246760" cy="488160"/>
+            <a:ext cx="11246400" cy="487800"/>
           </a:xfrm>
           <a:prstGeom prst="rect">
             <a:avLst/>
@@ -10560,14 +10829,14 @@
       </p:sp>
       <p:sp>
         <p:nvSpPr>
-          <p:cNvPr id="122" name="TextBox 44"/>
+          <p:cNvPr id="123" name="TextBox 44"/>
           <p:cNvSpPr/>
           <p:nvPr/>
         </p:nvSpPr>
         <p:spPr>
           <a:xfrm>
             <a:off x="502920" y="5742360"/>
-            <a:ext cx="11246760" cy="488160"/>
+            <a:ext cx="11246400" cy="487800"/>
           </a:xfrm>
           <a:prstGeom prst="rect">
             <a:avLst/>
@@ -10684,14 +10953,14 @@
       </p:grpSpPr>
       <p:sp>
         <p:nvSpPr>
-          <p:cNvPr id="123" name=""/>
-          <p:cNvSpPr txBox="1"/>
+          <p:cNvPr id="124" name=""/>
+          <p:cNvSpPr/>
           <p:nvPr/>
         </p:nvSpPr>
         <p:spPr>
           <a:xfrm>
             <a:off x="1828800" y="914400"/>
-            <a:ext cx="8001000" cy="2971800"/>
+            <a:ext cx="8000640" cy="2971440"/>
           </a:xfrm>
           <a:prstGeom prst="rect">
             <a:avLst/>
@@ -10701,11 +10970,22 @@
             <a:noFill/>
           </a:ln>
         </p:spPr>
+        <p:style>
+          <a:lnRef idx="0"/>
+          <a:fillRef idx="0"/>
+          <a:effectRef idx="0"/>
+          <a:fontRef idx="minor"/>
+        </p:style>
         <p:txBody>
           <a:bodyPr lIns="90000" tIns="45000" rIns="90000" bIns="45000" anchor="t">
             <a:spAutoFit/>
           </a:bodyPr>
           <a:p>
+            <a:pPr>
+              <a:lnSpc>
+                <a:spcPct val="100000"/>
+              </a:lnSpc>
+            </a:pPr>
             <a:r>
               <a:rPr lang="en-US" sz="4000" b="0" u="none" strike="noStrike">
                 <a:solidFill>
@@ -10727,6 +11007,11 @@
             </a:endParaRPr>
           </a:p>
           <a:p>
+            <a:pPr>
+              <a:lnSpc>
+                <a:spcPct val="100000"/>
+              </a:lnSpc>
+            </a:pPr>
             <a:endParaRPr lang="en-US" sz="4000" b="0" u="none" strike="noStrike">
               <a:solidFill>
                 <a:srgbClr val="000000"/>
@@ -10737,6 +11022,11 @@
             </a:endParaRPr>
           </a:p>
           <a:p>
+            <a:pPr>
+              <a:lnSpc>
+                <a:spcPct val="100000"/>
+              </a:lnSpc>
+            </a:pPr>
             <a:endParaRPr lang="en-US" sz="4000" b="0" u="none" strike="noStrike">
               <a:solidFill>
                 <a:srgbClr val="000000"/>
@@ -10780,7 +11070,7 @@
       </p:grpSpPr>
       <p:pic>
         <p:nvPicPr>
-          <p:cNvPr id="124" name=""/>
+          <p:cNvPr id="125" name=""/>
           <p:cNvPicPr/>
           <p:nvPr/>
         </p:nvPicPr>
@@ -10791,7 +11081,7 @@
         <p:spPr>
           <a:xfrm>
             <a:off x="457200" y="1371600"/>
-            <a:ext cx="10603080" cy="5309640"/>
+            <a:ext cx="10602720" cy="5309280"/>
           </a:xfrm>
           <a:prstGeom prst="rect">
             <a:avLst/>
@@ -10804,14 +11094,14 @@
       </p:pic>
       <p:sp>
         <p:nvSpPr>
-          <p:cNvPr id="125" name=""/>
-          <p:cNvSpPr txBox="1"/>
+          <p:cNvPr id="126" name=""/>
+          <p:cNvSpPr/>
           <p:nvPr/>
         </p:nvSpPr>
         <p:spPr>
           <a:xfrm>
             <a:off x="685800" y="228600"/>
-            <a:ext cx="10744200" cy="940680"/>
+            <a:ext cx="10743840" cy="940320"/>
           </a:xfrm>
           <a:prstGeom prst="rect">
             <a:avLst/>
@@ -10821,11 +11111,22 @@
             <a:noFill/>
           </a:ln>
         </p:spPr>
+        <p:style>
+          <a:lnRef idx="0"/>
+          <a:fillRef idx="0"/>
+          <a:effectRef idx="0"/>
+          <a:fontRef idx="minor"/>
+        </p:style>
         <p:txBody>
           <a:bodyPr lIns="90000" tIns="45000" rIns="90000" bIns="45000" anchor="t">
             <a:spAutoFit/>
           </a:bodyPr>
           <a:p>
+            <a:pPr>
+              <a:lnSpc>
+                <a:spcPct val="100000"/>
+              </a:lnSpc>
+            </a:pPr>
             <a:r>
               <a:rPr lang="en-US" sz="3000" b="0" u="none" strike="noStrike">
                 <a:solidFill>
@@ -10880,14 +11181,14 @@
       </p:grpSpPr>
       <p:sp>
         <p:nvSpPr>
-          <p:cNvPr id="16" name=""/>
+          <p:cNvPr id="17" name=""/>
           <p:cNvSpPr/>
           <p:nvPr/>
         </p:nvSpPr>
         <p:spPr>
           <a:xfrm>
             <a:off x="914400" y="685800"/>
-            <a:ext cx="10514520" cy="1551960"/>
+            <a:ext cx="10514160" cy="1551960"/>
           </a:xfrm>
           <a:prstGeom prst="rect">
             <a:avLst/>
@@ -11023,7 +11324,7 @@
       </p:grpSpPr>
       <p:pic>
         <p:nvPicPr>
-          <p:cNvPr id="126" name=""/>
+          <p:cNvPr id="127" name=""/>
           <p:cNvPicPr/>
           <p:nvPr/>
         </p:nvPicPr>
@@ -11034,7 +11335,7 @@
         <p:spPr>
           <a:xfrm>
             <a:off x="457200" y="1090440"/>
-            <a:ext cx="11119320" cy="5538960"/>
+            <a:ext cx="11118960" cy="5538600"/>
           </a:xfrm>
           <a:prstGeom prst="rect">
             <a:avLst/>
@@ -11047,14 +11348,14 @@
       </p:pic>
       <p:sp>
         <p:nvSpPr>
-          <p:cNvPr id="127" name=""/>
-          <p:cNvSpPr txBox="1"/>
+          <p:cNvPr id="128" name=""/>
+          <p:cNvSpPr/>
           <p:nvPr/>
         </p:nvSpPr>
         <p:spPr>
           <a:xfrm>
             <a:off x="686160" y="228960"/>
-            <a:ext cx="10744200" cy="855360"/>
+            <a:ext cx="10743840" cy="855000"/>
           </a:xfrm>
           <a:prstGeom prst="rect">
             <a:avLst/>
@@ -11064,11 +11365,22 @@
             <a:noFill/>
           </a:ln>
         </p:spPr>
+        <p:style>
+          <a:lnRef idx="0"/>
+          <a:fillRef idx="0"/>
+          <a:effectRef idx="0"/>
+          <a:fontRef idx="minor"/>
+        </p:style>
         <p:txBody>
           <a:bodyPr lIns="90000" tIns="45000" rIns="90000" bIns="45000" anchor="t">
             <a:spAutoFit/>
           </a:bodyPr>
           <a:p>
+            <a:pPr>
+              <a:lnSpc>
+                <a:spcPct val="100000"/>
+              </a:lnSpc>
+            </a:pPr>
             <a:r>
               <a:rPr lang="en-US" sz="3000" b="0" u="none" strike="noStrike">
                 <a:solidFill>
@@ -11134,7 +11446,7 @@
       </p:grpSpPr>
       <p:sp>
         <p:nvSpPr>
-          <p:cNvPr id="128" name="PlaceHolder 1"/>
+          <p:cNvPr id="129" name="PlaceHolder 1"/>
           <p:cNvSpPr>
             <a:spLocks noGrp="1"/>
           </p:cNvSpPr>
@@ -11145,7 +11457,7 @@
         <p:spPr>
           <a:xfrm>
             <a:off x="609480" y="1604520"/>
-            <a:ext cx="10970640" cy="3975480"/>
+            <a:ext cx="10970280" cy="3975120"/>
           </a:xfrm>
           <a:prstGeom prst="rect">
             <a:avLst/>
@@ -11179,14 +11491,14 @@
       </p:sp>
       <p:sp>
         <p:nvSpPr>
-          <p:cNvPr id="129" name="TextBox 3"/>
+          <p:cNvPr id="130" name="TextBox 3"/>
           <p:cNvSpPr/>
           <p:nvPr/>
         </p:nvSpPr>
         <p:spPr>
           <a:xfrm>
             <a:off x="502920" y="201240"/>
-            <a:ext cx="11155320" cy="396360"/>
+            <a:ext cx="11154960" cy="396000"/>
           </a:xfrm>
           <a:prstGeom prst="rect">
             <a:avLst/>
@@ -11236,14 +11548,14 @@
       </p:sp>
       <p:sp>
         <p:nvSpPr>
-          <p:cNvPr id="130" name="Rounded Rectangle 12"/>
+          <p:cNvPr id="131" name="Rounded Rectangle 12"/>
           <p:cNvSpPr/>
           <p:nvPr/>
         </p:nvSpPr>
         <p:spPr>
           <a:xfrm>
             <a:off x="365760" y="914400"/>
-            <a:ext cx="7863480" cy="2925720"/>
+            <a:ext cx="7863120" cy="2925360"/>
           </a:xfrm>
           <a:prstGeom prst="roundRect">
             <a:avLst>
@@ -11305,14 +11617,14 @@
       </p:sp>
       <p:sp>
         <p:nvSpPr>
-          <p:cNvPr id="131" name="Rounded Rectangle 13"/>
+          <p:cNvPr id="132" name="Rounded Rectangle 13"/>
           <p:cNvSpPr/>
           <p:nvPr/>
         </p:nvSpPr>
         <p:spPr>
           <a:xfrm>
             <a:off x="640080" y="1600200"/>
-            <a:ext cx="1782720" cy="2102760"/>
+            <a:ext cx="1782360" cy="2102400"/>
           </a:xfrm>
           <a:prstGeom prst="roundRect">
             <a:avLst>
@@ -11426,14 +11738,14 @@
       </p:sp>
       <p:sp>
         <p:nvSpPr>
-          <p:cNvPr id="132" name="Rounded Rectangle 14"/>
+          <p:cNvPr id="133" name="Rounded Rectangle 14"/>
           <p:cNvSpPr/>
           <p:nvPr/>
         </p:nvSpPr>
         <p:spPr>
           <a:xfrm>
             <a:off x="3406320" y="1600200"/>
-            <a:ext cx="1782720" cy="2102760"/>
+            <a:ext cx="1782360" cy="2102400"/>
           </a:xfrm>
           <a:prstGeom prst="roundRect">
             <a:avLst>
@@ -11547,14 +11859,14 @@
       </p:sp>
       <p:sp>
         <p:nvSpPr>
-          <p:cNvPr id="133" name="Rounded Rectangle 15"/>
+          <p:cNvPr id="134" name="Rounded Rectangle 15"/>
           <p:cNvSpPr/>
           <p:nvPr/>
         </p:nvSpPr>
         <p:spPr>
           <a:xfrm>
             <a:off x="6172200" y="1600200"/>
-            <a:ext cx="1782720" cy="2102760"/>
+            <a:ext cx="1782360" cy="2102400"/>
           </a:xfrm>
           <a:prstGeom prst="roundRect">
             <a:avLst>
@@ -11668,14 +11980,14 @@
       </p:sp>
       <p:sp>
         <p:nvSpPr>
-          <p:cNvPr id="134" name="Rounded Rectangle 16"/>
+          <p:cNvPr id="135" name="Rounded Rectangle 16"/>
           <p:cNvSpPr/>
           <p:nvPr/>
         </p:nvSpPr>
         <p:spPr>
           <a:xfrm>
             <a:off x="9052560" y="1600200"/>
-            <a:ext cx="2788560" cy="2102760"/>
+            <a:ext cx="2788200" cy="2102400"/>
           </a:xfrm>
           <a:prstGeom prst="roundRect">
             <a:avLst>
@@ -11789,14 +12101,14 @@
       </p:sp>
       <p:cxnSp>
         <p:nvCxnSpPr>
-          <p:cNvPr id="135" name="Connector 13"/>
+          <p:cNvPr id="136" name="Connector 13"/>
           <p:cNvCxnSpPr/>
           <p:nvPr/>
         </p:nvCxnSpPr>
         <p:spPr>
           <a:xfrm>
             <a:off x="2423160" y="3063240"/>
-            <a:ext cx="983160" cy="360"/>
+            <a:ext cx="983520" cy="720"/>
           </a:xfrm>
           <a:prstGeom prst="straightConnector1">
             <a:avLst/>
@@ -11805,20 +12117,21 @@
             <a:solidFill>
               <a:srgbClr val="595959"/>
             </a:solidFill>
+            <a:round/>
             <a:tailEnd len="med" type="triangle" w="med"/>
           </a:ln>
         </p:spPr>
       </p:cxnSp>
       <p:sp>
         <p:nvSpPr>
-          <p:cNvPr id="136" name="TextBox 16"/>
+          <p:cNvPr id="137" name="TextBox 16"/>
           <p:cNvSpPr/>
           <p:nvPr/>
         </p:nvSpPr>
         <p:spPr>
           <a:xfrm>
             <a:off x="2274480" y="2660760"/>
-            <a:ext cx="1279800" cy="335160"/>
+            <a:ext cx="1279440" cy="335160"/>
           </a:xfrm>
           <a:prstGeom prst="rect">
             <a:avLst/>
@@ -11894,14 +12207,14 @@
       </p:sp>
       <p:cxnSp>
         <p:nvCxnSpPr>
-          <p:cNvPr id="137" name="Connector 14"/>
+          <p:cNvPr id="138" name="Connector 14"/>
           <p:cNvCxnSpPr/>
           <p:nvPr/>
         </p:nvCxnSpPr>
         <p:spPr>
           <a:xfrm>
             <a:off x="5189040" y="3063240"/>
-            <a:ext cx="983520" cy="360"/>
+            <a:ext cx="983880" cy="720"/>
           </a:xfrm>
           <a:prstGeom prst="straightConnector1">
             <a:avLst/>
@@ -11910,20 +12223,21 @@
             <a:solidFill>
               <a:srgbClr val="595959"/>
             </a:solidFill>
+            <a:round/>
             <a:tailEnd len="med" type="triangle" w="med"/>
           </a:ln>
         </p:spPr>
       </p:cxnSp>
       <p:sp>
         <p:nvSpPr>
-          <p:cNvPr id="138" name="TextBox 17"/>
+          <p:cNvPr id="139" name="TextBox 17"/>
           <p:cNvSpPr/>
           <p:nvPr/>
         </p:nvSpPr>
         <p:spPr>
           <a:xfrm>
             <a:off x="5040720" y="2660760"/>
-            <a:ext cx="1279800" cy="335160"/>
+            <a:ext cx="1279440" cy="335160"/>
           </a:xfrm>
           <a:prstGeom prst="rect">
             <a:avLst/>
@@ -11999,14 +12313,14 @@
       </p:sp>
       <p:cxnSp>
         <p:nvCxnSpPr>
-          <p:cNvPr id="139" name="Connector 15"/>
+          <p:cNvPr id="140" name="Connector 15"/>
           <p:cNvCxnSpPr/>
           <p:nvPr/>
         </p:nvCxnSpPr>
         <p:spPr>
           <a:xfrm>
             <a:off x="7954920" y="3063240"/>
-            <a:ext cx="1098000" cy="360"/>
+            <a:ext cx="1098360" cy="720"/>
           </a:xfrm>
           <a:prstGeom prst="straightConnector1">
             <a:avLst/>
@@ -12015,20 +12329,21 @@
             <a:solidFill>
               <a:srgbClr val="595959"/>
             </a:solidFill>
+            <a:round/>
             <a:tailEnd len="med" type="triangle" w="med"/>
           </a:ln>
         </p:spPr>
       </p:cxnSp>
       <p:sp>
         <p:nvSpPr>
-          <p:cNvPr id="140" name="TextBox 18"/>
+          <p:cNvPr id="141" name="TextBox 18"/>
           <p:cNvSpPr/>
           <p:nvPr/>
         </p:nvSpPr>
         <p:spPr>
           <a:xfrm>
             <a:off x="7863840" y="2660760"/>
-            <a:ext cx="1279800" cy="335160"/>
+            <a:ext cx="1279440" cy="335160"/>
           </a:xfrm>
           <a:prstGeom prst="rect">
             <a:avLst/>
@@ -12104,14 +12419,14 @@
       </p:sp>
       <p:cxnSp>
         <p:nvCxnSpPr>
-          <p:cNvPr id="141" name="Connector 16"/>
+          <p:cNvPr id="142" name="Connector 16"/>
           <p:cNvCxnSpPr/>
           <p:nvPr/>
         </p:nvCxnSpPr>
         <p:spPr>
           <a:xfrm>
             <a:off x="10424160" y="3703320"/>
-            <a:ext cx="360" cy="823320"/>
+            <a:ext cx="720" cy="823680"/>
           </a:xfrm>
           <a:prstGeom prst="straightConnector1">
             <a:avLst/>
@@ -12120,19 +12435,20 @@
             <a:solidFill>
               <a:srgbClr val="595959"/>
             </a:solidFill>
+            <a:round/>
           </a:ln>
         </p:spPr>
       </p:cxnSp>
       <p:cxnSp>
         <p:nvCxnSpPr>
-          <p:cNvPr id="142" name="Connector 17"/>
+          <p:cNvPr id="143" name="Connector 17"/>
           <p:cNvCxnSpPr/>
           <p:nvPr/>
         </p:nvCxnSpPr>
         <p:spPr>
           <a:xfrm flipH="1">
             <a:off x="1536120" y="4526280"/>
-            <a:ext cx="8888400" cy="360"/>
+            <a:ext cx="8888760" cy="720"/>
           </a:xfrm>
           <a:prstGeom prst="straightConnector1">
             <a:avLst/>
@@ -12141,19 +12457,20 @@
             <a:solidFill>
               <a:srgbClr val="595959"/>
             </a:solidFill>
+            <a:round/>
           </a:ln>
         </p:spPr>
       </p:cxnSp>
       <p:cxnSp>
         <p:nvCxnSpPr>
-          <p:cNvPr id="143" name="Connector 18"/>
+          <p:cNvPr id="144" name="Connector 18"/>
           <p:cNvCxnSpPr/>
           <p:nvPr/>
         </p:nvCxnSpPr>
         <p:spPr>
           <a:xfrm flipV="1">
             <a:off x="1536120" y="3840480"/>
-            <a:ext cx="360" cy="686160"/>
+            <a:ext cx="720" cy="686520"/>
           </a:xfrm>
           <a:prstGeom prst="straightConnector1">
             <a:avLst/>
@@ -12162,20 +12479,21 @@
             <a:solidFill>
               <a:srgbClr val="595959"/>
             </a:solidFill>
+            <a:round/>
             <a:tailEnd len="med" type="triangle" w="med"/>
           </a:ln>
         </p:spPr>
       </p:cxnSp>
       <p:sp>
         <p:nvSpPr>
-          <p:cNvPr id="144" name="TextBox 19"/>
+          <p:cNvPr id="145" name="TextBox 19"/>
           <p:cNvSpPr/>
           <p:nvPr/>
         </p:nvSpPr>
         <p:spPr>
           <a:xfrm>
             <a:off x="3566160" y="4142160"/>
-            <a:ext cx="5120280" cy="198720"/>
+            <a:ext cx="5119920" cy="198360"/>
           </a:xfrm>
           <a:prstGeom prst="rect">
             <a:avLst/>
@@ -12236,14 +12554,14 @@
       </p:sp>
       <p:cxnSp>
         <p:nvCxnSpPr>
-          <p:cNvPr id="145" name="Connector 19"/>
+          <p:cNvPr id="146" name="Connector 19"/>
           <p:cNvCxnSpPr/>
           <p:nvPr/>
         </p:nvCxnSpPr>
         <p:spPr>
           <a:xfrm>
             <a:off x="11155680" y="3703320"/>
-            <a:ext cx="360" cy="1737720"/>
+            <a:ext cx="720" cy="1738080"/>
           </a:xfrm>
           <a:prstGeom prst="straightConnector1">
             <a:avLst/>
@@ -12253,19 +12571,20 @@
               <a:srgbClr val="595959"/>
             </a:solidFill>
             <a:prstDash val="dash"/>
+            <a:round/>
           </a:ln>
         </p:spPr>
       </p:cxnSp>
       <p:cxnSp>
         <p:nvCxnSpPr>
-          <p:cNvPr id="146" name="Connector 20"/>
+          <p:cNvPr id="147" name="Connector 20"/>
           <p:cNvCxnSpPr/>
           <p:nvPr/>
         </p:nvCxnSpPr>
         <p:spPr>
           <a:xfrm flipH="1">
             <a:off x="2743200" y="5440680"/>
-            <a:ext cx="8412840" cy="360"/>
+            <a:ext cx="8413200" cy="720"/>
           </a:xfrm>
           <a:prstGeom prst="straightConnector1">
             <a:avLst/>
@@ -12275,19 +12594,20 @@
               <a:srgbClr val="595959"/>
             </a:solidFill>
             <a:prstDash val="dash"/>
+            <a:round/>
           </a:ln>
         </p:spPr>
       </p:cxnSp>
       <p:cxnSp>
         <p:nvCxnSpPr>
-          <p:cNvPr id="147" name="Connector 21"/>
+          <p:cNvPr id="148" name="Connector 21"/>
           <p:cNvCxnSpPr/>
           <p:nvPr/>
         </p:nvCxnSpPr>
         <p:spPr>
           <a:xfrm flipV="1">
             <a:off x="2743200" y="3840480"/>
-            <a:ext cx="360" cy="1600560"/>
+            <a:ext cx="720" cy="1600920"/>
           </a:xfrm>
           <a:prstGeom prst="straightConnector1">
             <a:avLst/>
@@ -12297,20 +12617,21 @@
               <a:srgbClr val="595959"/>
             </a:solidFill>
             <a:prstDash val="dash"/>
+            <a:round/>
             <a:tailEnd len="med" type="triangle" w="med"/>
           </a:ln>
         </p:spPr>
       </p:cxnSp>
       <p:sp>
         <p:nvSpPr>
-          <p:cNvPr id="148" name="TextBox 20"/>
+          <p:cNvPr id="149" name="TextBox 20"/>
           <p:cNvSpPr/>
           <p:nvPr/>
         </p:nvSpPr>
         <p:spPr>
           <a:xfrm>
             <a:off x="4937760" y="5056560"/>
-            <a:ext cx="5120280" cy="198720"/>
+            <a:ext cx="5119920" cy="198360"/>
           </a:xfrm>
           <a:prstGeom prst="rect">
             <a:avLst/>
@@ -12371,14 +12692,14 @@
       </p:sp>
       <p:sp>
         <p:nvSpPr>
-          <p:cNvPr id="149" name="TextBox 21"/>
+          <p:cNvPr id="150" name="TextBox 21"/>
           <p:cNvSpPr/>
           <p:nvPr/>
         </p:nvSpPr>
         <p:spPr>
           <a:xfrm>
             <a:off x="411840" y="5790960"/>
-            <a:ext cx="11246760" cy="487080"/>
+            <a:ext cx="11246400" cy="487080"/>
           </a:xfrm>
           <a:prstGeom prst="rect">
             <a:avLst/>
@@ -12458,14 +12779,14 @@
       </p:grpSpPr>
       <p:sp>
         <p:nvSpPr>
-          <p:cNvPr id="150" name=""/>
-          <p:cNvSpPr txBox="1"/>
+          <p:cNvPr id="151" name=""/>
+          <p:cNvSpPr/>
           <p:nvPr/>
         </p:nvSpPr>
         <p:spPr>
           <a:xfrm>
             <a:off x="2514600" y="1600200"/>
-            <a:ext cx="7086600" cy="2286000"/>
+            <a:ext cx="7086240" cy="2285640"/>
           </a:xfrm>
           <a:prstGeom prst="rect">
             <a:avLst/>
@@ -12475,11 +12796,22 @@
             <a:noFill/>
           </a:ln>
         </p:spPr>
+        <p:style>
+          <a:lnRef idx="0"/>
+          <a:fillRef idx="0"/>
+          <a:effectRef idx="0"/>
+          <a:fontRef idx="minor"/>
+        </p:style>
         <p:txBody>
           <a:bodyPr lIns="90000" tIns="45000" rIns="90000" bIns="45000" anchor="t">
             <a:spAutoFit/>
           </a:bodyPr>
           <a:p>
+            <a:pPr>
+              <a:lnSpc>
+                <a:spcPct val="100000"/>
+              </a:lnSpc>
+            </a:pPr>
             <a:r>
               <a:rPr lang="en-US" sz="4000" b="0" u="none" strike="noStrike">
                 <a:solidFill>
@@ -12534,14 +12866,14 @@
       </p:grpSpPr>
       <p:sp>
         <p:nvSpPr>
-          <p:cNvPr id="151" name=""/>
+          <p:cNvPr id="152" name=""/>
           <p:cNvSpPr/>
           <p:nvPr/>
         </p:nvSpPr>
         <p:spPr>
           <a:xfrm>
             <a:off x="1373400" y="2286000"/>
-            <a:ext cx="10056600" cy="1004040"/>
+            <a:ext cx="10056240" cy="1004040"/>
           </a:xfrm>
           <a:prstGeom prst="rect">
             <a:avLst/>
@@ -12654,14 +12986,14 @@
       </p:grpSpPr>
       <p:sp>
         <p:nvSpPr>
-          <p:cNvPr id="152" name="Text 0"/>
+          <p:cNvPr id="153" name="Text 0"/>
           <p:cNvSpPr/>
           <p:nvPr/>
         </p:nvSpPr>
         <p:spPr>
           <a:xfrm>
             <a:off x="457200" y="274320"/>
-            <a:ext cx="10329120" cy="499320"/>
+            <a:ext cx="10328760" cy="498960"/>
           </a:xfrm>
           <a:prstGeom prst="rect">
             <a:avLst/>
@@ -12715,14 +13047,14 @@
       </p:sp>
       <p:sp>
         <p:nvSpPr>
-          <p:cNvPr id="153" name="Text 1"/>
+          <p:cNvPr id="154" name="Text 1"/>
           <p:cNvSpPr/>
           <p:nvPr/>
         </p:nvSpPr>
         <p:spPr>
           <a:xfrm>
             <a:off x="457200" y="822960"/>
-            <a:ext cx="10420560" cy="307440"/>
+            <a:ext cx="10420200" cy="307080"/>
           </a:xfrm>
           <a:prstGeom prst="rect">
             <a:avLst/>
@@ -12776,14 +13108,14 @@
       </p:sp>
       <p:sp>
         <p:nvSpPr>
-          <p:cNvPr id="154" name="Shape 2"/>
+          <p:cNvPr id="155" name="Shape 2"/>
           <p:cNvSpPr/>
           <p:nvPr/>
         </p:nvSpPr>
         <p:spPr>
           <a:xfrm>
             <a:off x="11036880" y="311040"/>
-            <a:ext cx="380520" cy="380520"/>
+            <a:ext cx="380160" cy="380160"/>
           </a:xfrm>
           <a:prstGeom prst="ellipse">
             <a:avLst/>
@@ -12819,7 +13151,7 @@
       </p:sp>
       <p:pic>
         <p:nvPicPr>
-          <p:cNvPr id="155" name="Image 0" descr="preencoded.png"/>
+          <p:cNvPr id="156" name="Image 0" descr="preencoded.png"/>
           <p:cNvPicPr/>
           <p:nvPr/>
         </p:nvPicPr>
@@ -12830,7 +13162,7 @@
         <p:spPr>
           <a:xfrm>
             <a:off x="11106000" y="380160"/>
-            <a:ext cx="242280" cy="242280"/>
+            <a:ext cx="241920" cy="241920"/>
           </a:xfrm>
           <a:prstGeom prst="rect">
             <a:avLst/>
@@ -12843,14 +13175,14 @@
       </p:pic>
       <p:sp>
         <p:nvSpPr>
-          <p:cNvPr id="156" name="Shape 3"/>
+          <p:cNvPr id="157" name="Shape 3"/>
           <p:cNvSpPr/>
           <p:nvPr/>
         </p:nvSpPr>
         <p:spPr>
           <a:xfrm>
             <a:off x="11494080" y="311040"/>
-            <a:ext cx="380520" cy="380520"/>
+            <a:ext cx="380160" cy="380160"/>
           </a:xfrm>
           <a:prstGeom prst="ellipse">
             <a:avLst/>
@@ -12886,7 +13218,7 @@
       </p:sp>
       <p:pic>
         <p:nvPicPr>
-          <p:cNvPr id="157" name="Image 1" descr="preencoded.png"/>
+          <p:cNvPr id="158" name="Image 1" descr="preencoded.png"/>
           <p:cNvPicPr/>
           <p:nvPr/>
         </p:nvPicPr>
@@ -12897,7 +13229,7 @@
         <p:spPr>
           <a:xfrm>
             <a:off x="11563200" y="380160"/>
-            <a:ext cx="242280" cy="242280"/>
+            <a:ext cx="241920" cy="241920"/>
           </a:xfrm>
           <a:prstGeom prst="rect">
             <a:avLst/>
@@ -12910,14 +13242,14 @@
       </p:pic>
       <p:sp>
         <p:nvSpPr>
-          <p:cNvPr id="158" name="Shape 4"/>
+          <p:cNvPr id="159" name="Shape 4"/>
           <p:cNvSpPr/>
           <p:nvPr/>
         </p:nvSpPr>
         <p:spPr>
           <a:xfrm>
             <a:off x="457200" y="1207080"/>
-            <a:ext cx="5455440" cy="2236680"/>
+            <a:ext cx="5455080" cy="2236320"/>
           </a:xfrm>
           <a:prstGeom prst="roundRect">
             <a:avLst>
@@ -12965,14 +13297,14 @@
       </p:sp>
       <p:sp>
         <p:nvSpPr>
-          <p:cNvPr id="159" name="Text 5"/>
+          <p:cNvPr id="160" name="Text 5"/>
           <p:cNvSpPr/>
           <p:nvPr/>
         </p:nvSpPr>
         <p:spPr>
           <a:xfrm>
             <a:off x="676800" y="1334880"/>
-            <a:ext cx="5016600" cy="362160"/>
+            <a:ext cx="5016240" cy="361800"/>
           </a:xfrm>
           <a:prstGeom prst="rect">
             <a:avLst/>
@@ -13026,14 +13358,14 @@
       </p:sp>
       <p:sp>
         <p:nvSpPr>
-          <p:cNvPr id="160" name="Shape 6"/>
+          <p:cNvPr id="161" name="Shape 6"/>
           <p:cNvSpPr/>
           <p:nvPr/>
         </p:nvSpPr>
         <p:spPr>
           <a:xfrm>
             <a:off x="694800" y="1774080"/>
-            <a:ext cx="398880" cy="398880"/>
+            <a:ext cx="398520" cy="398520"/>
           </a:xfrm>
           <a:prstGeom prst="ellipse">
             <a:avLst/>
@@ -13069,7 +13401,7 @@
       </p:sp>
       <p:pic>
         <p:nvPicPr>
-          <p:cNvPr id="161" name="Image 2" descr="preencoded.png"/>
+          <p:cNvPr id="162" name="Image 2" descr="preencoded.png"/>
           <p:cNvPicPr/>
           <p:nvPr/>
         </p:nvPicPr>
@@ -13080,7 +13412,7 @@
         <p:spPr>
           <a:xfrm>
             <a:off x="767520" y="1846440"/>
-            <a:ext cx="253800" cy="253800"/>
+            <a:ext cx="253440" cy="253440"/>
           </a:xfrm>
           <a:prstGeom prst="rect">
             <a:avLst/>
@@ -13093,14 +13425,14 @@
       </p:pic>
       <p:sp>
         <p:nvSpPr>
-          <p:cNvPr id="162" name="Text 7"/>
+          <p:cNvPr id="163" name="Text 7"/>
           <p:cNvSpPr/>
           <p:nvPr/>
         </p:nvSpPr>
         <p:spPr>
           <a:xfrm>
             <a:off x="1207080" y="1774080"/>
-            <a:ext cx="4485960" cy="398880"/>
+            <a:ext cx="4485600" cy="398520"/>
           </a:xfrm>
           <a:prstGeom prst="rect">
             <a:avLst/>
@@ -13154,14 +13486,14 @@
       </p:sp>
       <p:sp>
         <p:nvSpPr>
-          <p:cNvPr id="163" name="Shape 8"/>
+          <p:cNvPr id="164" name="Shape 8"/>
           <p:cNvSpPr/>
           <p:nvPr/>
         </p:nvSpPr>
         <p:spPr>
           <a:xfrm>
             <a:off x="694800" y="2249280"/>
-            <a:ext cx="398880" cy="398880"/>
+            <a:ext cx="398520" cy="398520"/>
           </a:xfrm>
           <a:prstGeom prst="ellipse">
             <a:avLst/>
@@ -13197,7 +13529,7 @@
       </p:sp>
       <p:pic>
         <p:nvPicPr>
-          <p:cNvPr id="164" name="Image 3" descr="preencoded.png"/>
+          <p:cNvPr id="165" name="Image 3" descr="preencoded.png"/>
           <p:cNvPicPr/>
           <p:nvPr/>
         </p:nvPicPr>
@@ -13208,7 +13540,7 @@
         <p:spPr>
           <a:xfrm>
             <a:off x="767520" y="2322000"/>
-            <a:ext cx="253800" cy="253800"/>
+            <a:ext cx="253440" cy="253440"/>
           </a:xfrm>
           <a:prstGeom prst="rect">
             <a:avLst/>
@@ -13221,14 +13553,14 @@
       </p:pic>
       <p:sp>
         <p:nvSpPr>
-          <p:cNvPr id="165" name="Text 9"/>
+          <p:cNvPr id="166" name="Text 9"/>
           <p:cNvSpPr/>
           <p:nvPr/>
         </p:nvSpPr>
         <p:spPr>
           <a:xfrm>
             <a:off x="1207080" y="2249280"/>
-            <a:ext cx="4485960" cy="398880"/>
+            <a:ext cx="4485600" cy="398520"/>
           </a:xfrm>
           <a:prstGeom prst="rect">
             <a:avLst/>
@@ -13282,14 +13614,14 @@
       </p:sp>
       <p:sp>
         <p:nvSpPr>
-          <p:cNvPr id="166" name="Text 10"/>
+          <p:cNvPr id="167" name="Text 10"/>
           <p:cNvSpPr/>
           <p:nvPr/>
         </p:nvSpPr>
         <p:spPr>
           <a:xfrm>
             <a:off x="713160" y="2779920"/>
-            <a:ext cx="4943160" cy="554040"/>
+            <a:ext cx="4942800" cy="553680"/>
           </a:xfrm>
           <a:prstGeom prst="rect">
             <a:avLst/>
@@ -13343,14 +13675,14 @@
       </p:sp>
       <p:sp>
         <p:nvSpPr>
-          <p:cNvPr id="167" name="Shape 11"/>
+          <p:cNvPr id="168" name="Shape 11"/>
           <p:cNvSpPr/>
           <p:nvPr/>
         </p:nvSpPr>
         <p:spPr>
           <a:xfrm>
             <a:off x="6245280" y="1207080"/>
-            <a:ext cx="5455440" cy="2236680"/>
+            <a:ext cx="5455080" cy="2236320"/>
           </a:xfrm>
           <a:prstGeom prst="roundRect">
             <a:avLst>
@@ -13398,14 +13730,14 @@
       </p:sp>
       <p:sp>
         <p:nvSpPr>
-          <p:cNvPr id="168" name="Text 12"/>
+          <p:cNvPr id="169" name="Text 12"/>
           <p:cNvSpPr/>
           <p:nvPr/>
         </p:nvSpPr>
         <p:spPr>
           <a:xfrm>
             <a:off x="6464880" y="1334880"/>
-            <a:ext cx="5016600" cy="362160"/>
+            <a:ext cx="5016240" cy="361800"/>
           </a:xfrm>
           <a:prstGeom prst="rect">
             <a:avLst/>
@@ -13459,14 +13791,14 @@
       </p:sp>
       <p:sp>
         <p:nvSpPr>
-          <p:cNvPr id="169" name="Shape 13"/>
+          <p:cNvPr id="170" name="Shape 13"/>
           <p:cNvSpPr/>
           <p:nvPr/>
         </p:nvSpPr>
         <p:spPr>
           <a:xfrm>
             <a:off x="6483240" y="1774080"/>
-            <a:ext cx="398880" cy="398880"/>
+            <a:ext cx="398520" cy="398520"/>
           </a:xfrm>
           <a:prstGeom prst="ellipse">
             <a:avLst/>
@@ -13502,7 +13834,7 @@
       </p:sp>
       <p:pic>
         <p:nvPicPr>
-          <p:cNvPr id="170" name="Image 4" descr="preencoded.png"/>
+          <p:cNvPr id="171" name="Image 4" descr="preencoded.png"/>
           <p:cNvPicPr/>
           <p:nvPr/>
         </p:nvPicPr>
@@ -13513,7 +13845,7 @@
         <p:spPr>
           <a:xfrm>
             <a:off x="6555600" y="1846440"/>
-            <a:ext cx="253800" cy="253800"/>
+            <a:ext cx="253440" cy="253440"/>
           </a:xfrm>
           <a:prstGeom prst="rect">
             <a:avLst/>
@@ -13526,14 +13858,14 @@
       </p:pic>
       <p:sp>
         <p:nvSpPr>
-          <p:cNvPr id="171" name="Text 14"/>
+          <p:cNvPr id="172" name="Text 14"/>
           <p:cNvSpPr/>
           <p:nvPr/>
         </p:nvSpPr>
         <p:spPr>
           <a:xfrm>
             <a:off x="6995160" y="1774080"/>
-            <a:ext cx="4485960" cy="398880"/>
+            <a:ext cx="4485600" cy="398520"/>
           </a:xfrm>
           <a:prstGeom prst="rect">
             <a:avLst/>
@@ -13587,14 +13919,14 @@
       </p:sp>
       <p:sp>
         <p:nvSpPr>
-          <p:cNvPr id="172" name="Shape 15"/>
+          <p:cNvPr id="173" name="Shape 15"/>
           <p:cNvSpPr/>
           <p:nvPr/>
         </p:nvSpPr>
         <p:spPr>
           <a:xfrm>
             <a:off x="6483240" y="2249280"/>
-            <a:ext cx="398880" cy="398880"/>
+            <a:ext cx="398520" cy="398520"/>
           </a:xfrm>
           <a:prstGeom prst="ellipse">
             <a:avLst/>
@@ -13630,7 +13962,7 @@
       </p:sp>
       <p:pic>
         <p:nvPicPr>
-          <p:cNvPr id="173" name="Image 5" descr="preencoded.png"/>
+          <p:cNvPr id="174" name="Image 5" descr="preencoded.png"/>
           <p:cNvPicPr/>
           <p:nvPr/>
         </p:nvPicPr>
@@ -13641,7 +13973,7 @@
         <p:spPr>
           <a:xfrm>
             <a:off x="6555600" y="2322000"/>
-            <a:ext cx="253800" cy="253800"/>
+            <a:ext cx="253440" cy="253440"/>
           </a:xfrm>
           <a:prstGeom prst="rect">
             <a:avLst/>
@@ -13654,14 +13986,14 @@
       </p:pic>
       <p:sp>
         <p:nvSpPr>
-          <p:cNvPr id="174" name="Text 16"/>
+          <p:cNvPr id="175" name="Text 16"/>
           <p:cNvSpPr/>
           <p:nvPr/>
         </p:nvSpPr>
         <p:spPr>
           <a:xfrm>
             <a:off x="6995160" y="2249280"/>
-            <a:ext cx="4485960" cy="398880"/>
+            <a:ext cx="4485600" cy="398520"/>
           </a:xfrm>
           <a:prstGeom prst="rect">
             <a:avLst/>
@@ -13715,14 +14047,14 @@
       </p:sp>
       <p:sp>
         <p:nvSpPr>
-          <p:cNvPr id="175" name="Text 17"/>
+          <p:cNvPr id="176" name="Text 17"/>
           <p:cNvSpPr/>
           <p:nvPr/>
         </p:nvSpPr>
         <p:spPr>
           <a:xfrm>
             <a:off x="6501240" y="2779920"/>
-            <a:ext cx="4943160" cy="554040"/>
+            <a:ext cx="4942800" cy="553680"/>
           </a:xfrm>
           <a:prstGeom prst="rect">
             <a:avLst/>
@@ -13776,14 +14108,14 @@
       </p:sp>
       <p:sp>
         <p:nvSpPr>
-          <p:cNvPr id="176" name="Shape 18"/>
+          <p:cNvPr id="177" name="Shape 18"/>
           <p:cNvSpPr/>
           <p:nvPr/>
         </p:nvSpPr>
         <p:spPr>
           <a:xfrm>
             <a:off x="457200" y="3566160"/>
-            <a:ext cx="5455440" cy="2236680"/>
+            <a:ext cx="5455080" cy="2236320"/>
           </a:xfrm>
           <a:prstGeom prst="roundRect">
             <a:avLst>
@@ -13831,14 +14163,14 @@
       </p:sp>
       <p:sp>
         <p:nvSpPr>
-          <p:cNvPr id="177" name="Text 19"/>
+          <p:cNvPr id="178" name="Text 19"/>
           <p:cNvSpPr/>
           <p:nvPr/>
         </p:nvSpPr>
         <p:spPr>
           <a:xfrm>
             <a:off x="676800" y="3694320"/>
-            <a:ext cx="5016600" cy="362160"/>
+            <a:ext cx="5016240" cy="361800"/>
           </a:xfrm>
           <a:prstGeom prst="rect">
             <a:avLst/>
@@ -13892,14 +14224,14 @@
       </p:sp>
       <p:sp>
         <p:nvSpPr>
-          <p:cNvPr id="178" name="Shape 20"/>
+          <p:cNvPr id="179" name="Shape 20"/>
           <p:cNvSpPr/>
           <p:nvPr/>
         </p:nvSpPr>
         <p:spPr>
           <a:xfrm>
             <a:off x="694800" y="4133160"/>
-            <a:ext cx="398880" cy="398880"/>
+            <a:ext cx="398520" cy="398520"/>
           </a:xfrm>
           <a:prstGeom prst="ellipse">
             <a:avLst/>
@@ -13935,7 +14267,7 @@
       </p:sp>
       <p:pic>
         <p:nvPicPr>
-          <p:cNvPr id="179" name="Image 6" descr="preencoded.png"/>
+          <p:cNvPr id="180" name="Image 6" descr="preencoded.png"/>
           <p:cNvPicPr/>
           <p:nvPr/>
         </p:nvPicPr>
@@ -13946,7 +14278,7 @@
         <p:spPr>
           <a:xfrm>
             <a:off x="767520" y="4205520"/>
-            <a:ext cx="253800" cy="253800"/>
+            <a:ext cx="253440" cy="253440"/>
           </a:xfrm>
           <a:prstGeom prst="rect">
             <a:avLst/>
@@ -13959,14 +14291,14 @@
       </p:pic>
       <p:sp>
         <p:nvSpPr>
-          <p:cNvPr id="180" name="Text 21"/>
+          <p:cNvPr id="181" name="Text 21"/>
           <p:cNvSpPr/>
           <p:nvPr/>
         </p:nvSpPr>
         <p:spPr>
           <a:xfrm>
             <a:off x="1207080" y="4133160"/>
-            <a:ext cx="4485960" cy="398880"/>
+            <a:ext cx="4485600" cy="398520"/>
           </a:xfrm>
           <a:prstGeom prst="rect">
             <a:avLst/>
@@ -14020,14 +14352,14 @@
       </p:sp>
       <p:sp>
         <p:nvSpPr>
-          <p:cNvPr id="181" name="Shape 22"/>
+          <p:cNvPr id="182" name="Shape 22"/>
           <p:cNvSpPr/>
           <p:nvPr/>
         </p:nvSpPr>
         <p:spPr>
           <a:xfrm>
             <a:off x="694800" y="4608720"/>
-            <a:ext cx="398880" cy="398880"/>
+            <a:ext cx="398520" cy="398520"/>
           </a:xfrm>
           <a:prstGeom prst="ellipse">
             <a:avLst/>
@@ -14063,7 +14395,7 @@
       </p:sp>
       <p:pic>
         <p:nvPicPr>
-          <p:cNvPr id="182" name="Image 7" descr="preencoded.png"/>
+          <p:cNvPr id="183" name="Image 7" descr="preencoded.png"/>
           <p:cNvPicPr/>
           <p:nvPr/>
         </p:nvPicPr>
@@ -14074,7 +14406,7 @@
         <p:spPr>
           <a:xfrm>
             <a:off x="767520" y="4681080"/>
-            <a:ext cx="253800" cy="253800"/>
+            <a:ext cx="253440" cy="253440"/>
           </a:xfrm>
           <a:prstGeom prst="rect">
             <a:avLst/>
@@ -14087,14 +14419,14 @@
       </p:pic>
       <p:sp>
         <p:nvSpPr>
-          <p:cNvPr id="183" name="Text 23"/>
+          <p:cNvPr id="184" name="Text 23"/>
           <p:cNvSpPr/>
           <p:nvPr/>
         </p:nvSpPr>
         <p:spPr>
           <a:xfrm>
             <a:off x="1207080" y="4608720"/>
-            <a:ext cx="4485960" cy="398880"/>
+            <a:ext cx="4485600" cy="398520"/>
           </a:xfrm>
           <a:prstGeom prst="rect">
             <a:avLst/>
@@ -14160,14 +14492,14 @@
       </p:sp>
       <p:sp>
         <p:nvSpPr>
-          <p:cNvPr id="184" name="Text 24"/>
+          <p:cNvPr id="185" name="Text 24"/>
           <p:cNvSpPr/>
           <p:nvPr/>
         </p:nvSpPr>
         <p:spPr>
           <a:xfrm>
             <a:off x="713160" y="5139000"/>
-            <a:ext cx="4943160" cy="554040"/>
+            <a:ext cx="4942800" cy="553680"/>
           </a:xfrm>
           <a:prstGeom prst="rect">
             <a:avLst/>
@@ -14221,14 +14553,14 @@
       </p:sp>
       <p:sp>
         <p:nvSpPr>
-          <p:cNvPr id="185" name="Shape 25"/>
+          <p:cNvPr id="186" name="Shape 25"/>
           <p:cNvSpPr/>
           <p:nvPr/>
         </p:nvSpPr>
         <p:spPr>
           <a:xfrm>
             <a:off x="6245280" y="3566160"/>
-            <a:ext cx="5455440" cy="2236680"/>
+            <a:ext cx="5455080" cy="2236320"/>
           </a:xfrm>
           <a:prstGeom prst="roundRect">
             <a:avLst>
@@ -14276,14 +14608,14 @@
       </p:sp>
       <p:sp>
         <p:nvSpPr>
-          <p:cNvPr id="186" name="Text 26"/>
+          <p:cNvPr id="187" name="Text 26"/>
           <p:cNvSpPr/>
           <p:nvPr/>
         </p:nvSpPr>
         <p:spPr>
           <a:xfrm>
             <a:off x="6464880" y="3694320"/>
-            <a:ext cx="5016600" cy="362160"/>
+            <a:ext cx="5016240" cy="361800"/>
           </a:xfrm>
           <a:prstGeom prst="rect">
             <a:avLst/>
@@ -14337,14 +14669,14 @@
       </p:sp>
       <p:sp>
         <p:nvSpPr>
-          <p:cNvPr id="187" name="Shape 27"/>
+          <p:cNvPr id="188" name="Shape 27"/>
           <p:cNvSpPr/>
           <p:nvPr/>
         </p:nvSpPr>
         <p:spPr>
           <a:xfrm>
             <a:off x="6483240" y="4133160"/>
-            <a:ext cx="398880" cy="398880"/>
+            <a:ext cx="398520" cy="398520"/>
           </a:xfrm>
           <a:prstGeom prst="ellipse">
             <a:avLst/>
@@ -14380,7 +14712,7 @@
       </p:sp>
       <p:pic>
         <p:nvPicPr>
-          <p:cNvPr id="188" name="Image 8" descr="preencoded.png"/>
+          <p:cNvPr id="189" name="Image 8" descr="preencoded.png"/>
           <p:cNvPicPr/>
           <p:nvPr/>
         </p:nvPicPr>
@@ -14391,7 +14723,7 @@
         <p:spPr>
           <a:xfrm>
             <a:off x="6555600" y="4205520"/>
-            <a:ext cx="253800" cy="253800"/>
+            <a:ext cx="253440" cy="253440"/>
           </a:xfrm>
           <a:prstGeom prst="rect">
             <a:avLst/>
@@ -14404,14 +14736,14 @@
       </p:pic>
       <p:sp>
         <p:nvSpPr>
-          <p:cNvPr id="189" name="Text 28"/>
+          <p:cNvPr id="190" name="Text 28"/>
           <p:cNvSpPr/>
           <p:nvPr/>
         </p:nvSpPr>
         <p:spPr>
           <a:xfrm>
             <a:off x="6995160" y="4133160"/>
-            <a:ext cx="4485960" cy="398880"/>
+            <a:ext cx="4485600" cy="398520"/>
           </a:xfrm>
           <a:prstGeom prst="rect">
             <a:avLst/>
@@ -14465,14 +14797,14 @@
       </p:sp>
       <p:sp>
         <p:nvSpPr>
-          <p:cNvPr id="190" name="Shape 29"/>
+          <p:cNvPr id="191" name="Shape 29"/>
           <p:cNvSpPr/>
           <p:nvPr/>
         </p:nvSpPr>
         <p:spPr>
           <a:xfrm>
             <a:off x="6483240" y="4608720"/>
-            <a:ext cx="398880" cy="398880"/>
+            <a:ext cx="398520" cy="398520"/>
           </a:xfrm>
           <a:prstGeom prst="ellipse">
             <a:avLst/>
@@ -14508,7 +14840,7 @@
       </p:sp>
       <p:pic>
         <p:nvPicPr>
-          <p:cNvPr id="191" name="Image 9" descr="preencoded.png"/>
+          <p:cNvPr id="192" name="Image 9" descr="preencoded.png"/>
           <p:cNvPicPr/>
           <p:nvPr/>
         </p:nvPicPr>
@@ -14519,7 +14851,7 @@
         <p:spPr>
           <a:xfrm>
             <a:off x="6555600" y="4681080"/>
-            <a:ext cx="253800" cy="253800"/>
+            <a:ext cx="253440" cy="253440"/>
           </a:xfrm>
           <a:prstGeom prst="rect">
             <a:avLst/>
@@ -14532,14 +14864,14 @@
       </p:pic>
       <p:sp>
         <p:nvSpPr>
-          <p:cNvPr id="192" name="Text 30"/>
+          <p:cNvPr id="193" name="Text 30"/>
           <p:cNvSpPr/>
           <p:nvPr/>
         </p:nvSpPr>
         <p:spPr>
           <a:xfrm>
             <a:off x="6995160" y="4608720"/>
-            <a:ext cx="4485960" cy="398880"/>
+            <a:ext cx="4485600" cy="398520"/>
           </a:xfrm>
           <a:prstGeom prst="rect">
             <a:avLst/>
@@ -14593,14 +14925,14 @@
       </p:sp>
       <p:sp>
         <p:nvSpPr>
-          <p:cNvPr id="193" name="Text 31"/>
+          <p:cNvPr id="194" name="Text 31"/>
           <p:cNvSpPr/>
           <p:nvPr/>
         </p:nvSpPr>
         <p:spPr>
           <a:xfrm>
             <a:off x="6501240" y="5139000"/>
-            <a:ext cx="4943160" cy="554040"/>
+            <a:ext cx="4942800" cy="553680"/>
           </a:xfrm>
           <a:prstGeom prst="rect">
             <a:avLst/>
@@ -14654,14 +14986,14 @@
       </p:sp>
       <p:sp>
         <p:nvSpPr>
-          <p:cNvPr id="194" name="Shape 32"/>
+          <p:cNvPr id="195" name="Shape 32"/>
           <p:cNvSpPr/>
           <p:nvPr/>
         </p:nvSpPr>
         <p:spPr>
           <a:xfrm>
             <a:off x="457200" y="5943600"/>
-            <a:ext cx="11243520" cy="471960"/>
+            <a:ext cx="11243160" cy="471600"/>
           </a:xfrm>
           <a:prstGeom prst="roundRect">
             <a:avLst>
@@ -14702,14 +15034,14 @@
       </p:sp>
       <p:sp>
         <p:nvSpPr>
-          <p:cNvPr id="195" name="Text 33"/>
+          <p:cNvPr id="196" name="Text 33"/>
           <p:cNvSpPr/>
           <p:nvPr/>
         </p:nvSpPr>
         <p:spPr>
           <a:xfrm>
             <a:off x="658440" y="5943600"/>
-            <a:ext cx="10877760" cy="471960"/>
+            <a:ext cx="10877400" cy="471600"/>
           </a:xfrm>
           <a:prstGeom prst="rect">
             <a:avLst/>
@@ -14811,14 +15143,14 @@
       </p:sp>
       <p:sp>
         <p:nvSpPr>
-          <p:cNvPr id="196" name="Text 34"/>
+          <p:cNvPr id="197" name="Text 34"/>
           <p:cNvSpPr/>
           <p:nvPr/>
         </p:nvSpPr>
         <p:spPr>
           <a:xfrm>
             <a:off x="10881360" y="6537960"/>
-            <a:ext cx="819360" cy="225000"/>
+            <a:ext cx="819000" cy="224640"/>
           </a:xfrm>
           <a:prstGeom prst="rect">
             <a:avLst/>
@@ -14909,14 +15241,14 @@
       </p:grpSpPr>
       <p:sp>
         <p:nvSpPr>
-          <p:cNvPr id="197" name="Text 0"/>
+          <p:cNvPr id="198" name="Text 0"/>
           <p:cNvSpPr/>
           <p:nvPr/>
         </p:nvSpPr>
         <p:spPr>
           <a:xfrm>
             <a:off x="457200" y="274320"/>
-            <a:ext cx="10329120" cy="499320"/>
+            <a:ext cx="10328760" cy="498960"/>
           </a:xfrm>
           <a:prstGeom prst="rect">
             <a:avLst/>
@@ -14970,14 +15302,14 @@
       </p:sp>
       <p:sp>
         <p:nvSpPr>
-          <p:cNvPr id="198" name="Text 1"/>
+          <p:cNvPr id="199" name="Text 1"/>
           <p:cNvSpPr/>
           <p:nvPr/>
         </p:nvSpPr>
         <p:spPr>
           <a:xfrm>
             <a:off x="457200" y="822960"/>
-            <a:ext cx="10420560" cy="307440"/>
+            <a:ext cx="10420200" cy="307080"/>
           </a:xfrm>
           <a:prstGeom prst="rect">
             <a:avLst/>
@@ -15031,14 +15363,14 @@
       </p:sp>
       <p:sp>
         <p:nvSpPr>
-          <p:cNvPr id="199" name="Shape 2"/>
+          <p:cNvPr id="200" name="Shape 2"/>
           <p:cNvSpPr/>
           <p:nvPr/>
         </p:nvSpPr>
         <p:spPr>
           <a:xfrm>
             <a:off x="11036880" y="311040"/>
-            <a:ext cx="380520" cy="380520"/>
+            <a:ext cx="380160" cy="380160"/>
           </a:xfrm>
           <a:prstGeom prst="ellipse">
             <a:avLst/>
@@ -15074,7 +15406,7 @@
       </p:sp>
       <p:pic>
         <p:nvPicPr>
-          <p:cNvPr id="200" name="Image 0" descr="preencoded.png"/>
+          <p:cNvPr id="201" name="Image 0" descr="preencoded.png"/>
           <p:cNvPicPr/>
           <p:nvPr/>
         </p:nvPicPr>
@@ -15085,7 +15417,7 @@
         <p:spPr>
           <a:xfrm>
             <a:off x="11106000" y="380160"/>
-            <a:ext cx="242280" cy="242280"/>
+            <a:ext cx="241920" cy="241920"/>
           </a:xfrm>
           <a:prstGeom prst="rect">
             <a:avLst/>
@@ -15098,14 +15430,14 @@
       </p:pic>
       <p:sp>
         <p:nvSpPr>
-          <p:cNvPr id="201" name="Shape 3"/>
+          <p:cNvPr id="202" name="Shape 3"/>
           <p:cNvSpPr/>
           <p:nvPr/>
         </p:nvSpPr>
         <p:spPr>
           <a:xfrm>
             <a:off x="11494080" y="311040"/>
-            <a:ext cx="380520" cy="380520"/>
+            <a:ext cx="380160" cy="380160"/>
           </a:xfrm>
           <a:prstGeom prst="ellipse">
             <a:avLst/>
@@ -15141,7 +15473,7 @@
       </p:sp>
       <p:pic>
         <p:nvPicPr>
-          <p:cNvPr id="202" name="Image 1" descr="preencoded.png"/>
+          <p:cNvPr id="203" name="Image 1" descr="preencoded.png"/>
           <p:cNvPicPr/>
           <p:nvPr/>
         </p:nvPicPr>
@@ -15152,7 +15484,7 @@
         <p:spPr>
           <a:xfrm>
             <a:off x="11563200" y="380160"/>
-            <a:ext cx="242280" cy="242280"/>
+            <a:ext cx="241920" cy="241920"/>
           </a:xfrm>
           <a:prstGeom prst="rect">
             <a:avLst/>
@@ -15165,14 +15497,14 @@
       </p:pic>
       <p:sp>
         <p:nvSpPr>
-          <p:cNvPr id="203" name="Shape 4"/>
+          <p:cNvPr id="204" name="Shape 4"/>
           <p:cNvSpPr/>
           <p:nvPr/>
         </p:nvSpPr>
         <p:spPr>
           <a:xfrm>
             <a:off x="457200" y="1207080"/>
-            <a:ext cx="5299920" cy="2328120"/>
+            <a:ext cx="5299560" cy="2327760"/>
           </a:xfrm>
           <a:prstGeom prst="roundRect">
             <a:avLst>
@@ -15220,14 +15552,14 @@
       </p:sp>
       <p:sp>
         <p:nvSpPr>
-          <p:cNvPr id="204" name="Text 5"/>
+          <p:cNvPr id="205" name="Text 5"/>
           <p:cNvSpPr/>
           <p:nvPr/>
         </p:nvSpPr>
         <p:spPr>
           <a:xfrm>
             <a:off x="676800" y="1334880"/>
-            <a:ext cx="4861080" cy="362160"/>
+            <a:ext cx="4860720" cy="361800"/>
           </a:xfrm>
           <a:prstGeom prst="rect">
             <a:avLst/>
@@ -15266,19 +15598,7 @@
                 <a:latin typeface="Calibri"/>
                 <a:ea typeface="Calibri"/>
               </a:rPr>
-              <a:t>List — a mixed </a:t>
-            </a:r>
-            <a:r>
-              <a:rPr lang="en-US" sz="1800" b="1" u="none" strike="noStrike">
-                <a:solidFill>
-                  <a:srgbClr val="1E2A44"/>
-                </a:solidFill>
-                <a:effectLst/>
-                <a:uFillTx/>
-                <a:latin typeface="Calibri"/>
-                <a:ea typeface="Calibri"/>
-              </a:rPr>
-              <a:t>bag</a:t>
+              <a:t>List — a mixed bag</a:t>
             </a:r>
             <a:endParaRPr lang="en-US" sz="1800" b="0" u="none" strike="noStrike">
               <a:solidFill>
@@ -15293,14 +15613,14 @@
       </p:sp>
       <p:sp>
         <p:nvSpPr>
-          <p:cNvPr id="205" name="Shape 6"/>
+          <p:cNvPr id="206" name="Shape 6"/>
           <p:cNvSpPr/>
           <p:nvPr/>
         </p:nvSpPr>
         <p:spPr>
           <a:xfrm>
             <a:off x="694800" y="1774080"/>
-            <a:ext cx="398880" cy="398880"/>
+            <a:ext cx="398520" cy="398520"/>
           </a:xfrm>
           <a:prstGeom prst="ellipse">
             <a:avLst/>
@@ -15336,7 +15656,7 @@
       </p:sp>
       <p:pic>
         <p:nvPicPr>
-          <p:cNvPr id="206" name="Image 2" descr="preencoded.png"/>
+          <p:cNvPr id="207" name="Image 2" descr="preencoded.png"/>
           <p:cNvPicPr/>
           <p:nvPr/>
         </p:nvPicPr>
@@ -15347,7 +15667,7 @@
         <p:spPr>
           <a:xfrm>
             <a:off x="767520" y="1846440"/>
-            <a:ext cx="253800" cy="253800"/>
+            <a:ext cx="253440" cy="253440"/>
           </a:xfrm>
           <a:prstGeom prst="rect">
             <a:avLst/>
@@ -15360,14 +15680,14 @@
       </p:pic>
       <p:sp>
         <p:nvSpPr>
-          <p:cNvPr id="207" name="Text 7"/>
+          <p:cNvPr id="208" name="Text 7"/>
           <p:cNvSpPr/>
           <p:nvPr/>
         </p:nvSpPr>
         <p:spPr>
           <a:xfrm>
             <a:off x="1207080" y="1774080"/>
-            <a:ext cx="4330800" cy="398880"/>
+            <a:ext cx="4330440" cy="398520"/>
           </a:xfrm>
           <a:prstGeom prst="rect">
             <a:avLst/>
@@ -15421,14 +15741,14 @@
       </p:sp>
       <p:sp>
         <p:nvSpPr>
-          <p:cNvPr id="208" name="Shape 8"/>
+          <p:cNvPr id="209" name="Shape 8"/>
           <p:cNvSpPr/>
           <p:nvPr/>
         </p:nvSpPr>
         <p:spPr>
           <a:xfrm>
             <a:off x="694800" y="2249280"/>
-            <a:ext cx="398880" cy="398880"/>
+            <a:ext cx="398520" cy="398520"/>
           </a:xfrm>
           <a:prstGeom prst="ellipse">
             <a:avLst/>
@@ -15464,7 +15784,7 @@
       </p:sp>
       <p:pic>
         <p:nvPicPr>
-          <p:cNvPr id="209" name="Image 3" descr="preencoded.png"/>
+          <p:cNvPr id="210" name="Image 3" descr="preencoded.png"/>
           <p:cNvPicPr/>
           <p:nvPr/>
         </p:nvPicPr>
@@ -15475,7 +15795,7 @@
         <p:spPr>
           <a:xfrm>
             <a:off x="767520" y="2322000"/>
-            <a:ext cx="253800" cy="253800"/>
+            <a:ext cx="253440" cy="253440"/>
           </a:xfrm>
           <a:prstGeom prst="rect">
             <a:avLst/>
@@ -15488,14 +15808,14 @@
       </p:pic>
       <p:sp>
         <p:nvSpPr>
-          <p:cNvPr id="210" name="Text 9"/>
+          <p:cNvPr id="211" name="Text 9"/>
           <p:cNvSpPr/>
           <p:nvPr/>
         </p:nvSpPr>
         <p:spPr>
           <a:xfrm>
             <a:off x="1207080" y="2249280"/>
-            <a:ext cx="4330800" cy="398880"/>
+            <a:ext cx="4330440" cy="398520"/>
           </a:xfrm>
           <a:prstGeom prst="rect">
             <a:avLst/>
@@ -15549,14 +15869,14 @@
       </p:sp>
       <p:sp>
         <p:nvSpPr>
-          <p:cNvPr id="211" name="Text 10"/>
+          <p:cNvPr id="212" name="Text 10"/>
           <p:cNvSpPr/>
           <p:nvPr/>
         </p:nvSpPr>
         <p:spPr>
           <a:xfrm>
             <a:off x="713160" y="2779920"/>
-            <a:ext cx="4788000" cy="645480"/>
+            <a:ext cx="4787640" cy="645120"/>
           </a:xfrm>
           <a:prstGeom prst="rect">
             <a:avLst/>
@@ -15610,14 +15930,14 @@
       </p:sp>
       <p:sp>
         <p:nvSpPr>
-          <p:cNvPr id="212" name="Shape 11"/>
+          <p:cNvPr id="213" name="Shape 11"/>
           <p:cNvSpPr/>
           <p:nvPr/>
         </p:nvSpPr>
         <p:spPr>
           <a:xfrm>
             <a:off x="457200" y="3657600"/>
-            <a:ext cx="5299920" cy="2328120"/>
+            <a:ext cx="5299560" cy="2327760"/>
           </a:xfrm>
           <a:prstGeom prst="roundRect">
             <a:avLst>
@@ -15665,14 +15985,14 @@
       </p:sp>
       <p:sp>
         <p:nvSpPr>
-          <p:cNvPr id="213" name="Text 12"/>
+          <p:cNvPr id="214" name="Text 12"/>
           <p:cNvSpPr/>
           <p:nvPr/>
         </p:nvSpPr>
         <p:spPr>
           <a:xfrm>
             <a:off x="676800" y="3785760"/>
-            <a:ext cx="4861080" cy="362160"/>
+            <a:ext cx="4860720" cy="361800"/>
           </a:xfrm>
           <a:prstGeom prst="rect">
             <a:avLst/>
@@ -15726,14 +16046,14 @@
       </p:sp>
       <p:sp>
         <p:nvSpPr>
-          <p:cNvPr id="214" name="Shape 13"/>
+          <p:cNvPr id="215" name="Shape 13"/>
           <p:cNvSpPr/>
           <p:nvPr/>
         </p:nvSpPr>
         <p:spPr>
           <a:xfrm>
             <a:off x="694800" y="4224600"/>
-            <a:ext cx="398880" cy="398880"/>
+            <a:ext cx="398520" cy="398520"/>
           </a:xfrm>
           <a:prstGeom prst="ellipse">
             <a:avLst/>
@@ -15769,7 +16089,7 @@
       </p:sp>
       <p:pic>
         <p:nvPicPr>
-          <p:cNvPr id="215" name="Image 4" descr="preencoded.png"/>
+          <p:cNvPr id="216" name="Image 4" descr="preencoded.png"/>
           <p:cNvPicPr/>
           <p:nvPr/>
         </p:nvPicPr>
@@ -15780,7 +16100,7 @@
         <p:spPr>
           <a:xfrm>
             <a:off x="767520" y="4296960"/>
-            <a:ext cx="253800" cy="253800"/>
+            <a:ext cx="253440" cy="253440"/>
           </a:xfrm>
           <a:prstGeom prst="rect">
             <a:avLst/>
@@ -15793,14 +16113,14 @@
       </p:pic>
       <p:sp>
         <p:nvSpPr>
-          <p:cNvPr id="216" name="Text 14"/>
+          <p:cNvPr id="217" name="Text 14"/>
           <p:cNvSpPr/>
           <p:nvPr/>
         </p:nvSpPr>
         <p:spPr>
           <a:xfrm>
             <a:off x="1207080" y="4224600"/>
-            <a:ext cx="4330800" cy="398880"/>
+            <a:ext cx="4330440" cy="398520"/>
           </a:xfrm>
           <a:prstGeom prst="rect">
             <a:avLst/>
@@ -15866,14 +16186,14 @@
       </p:sp>
       <p:sp>
         <p:nvSpPr>
-          <p:cNvPr id="217" name="Shape 15"/>
+          <p:cNvPr id="218" name="Shape 15"/>
           <p:cNvSpPr/>
           <p:nvPr/>
         </p:nvSpPr>
         <p:spPr>
           <a:xfrm>
             <a:off x="694800" y="4700160"/>
-            <a:ext cx="398880" cy="398880"/>
+            <a:ext cx="398520" cy="398520"/>
           </a:xfrm>
           <a:prstGeom prst="ellipse">
             <a:avLst/>
@@ -15909,7 +16229,7 @@
       </p:sp>
       <p:pic>
         <p:nvPicPr>
-          <p:cNvPr id="218" name="Image 5" descr="preencoded.png"/>
+          <p:cNvPr id="219" name="Image 5" descr="preencoded.png"/>
           <p:cNvPicPr/>
           <p:nvPr/>
         </p:nvPicPr>
@@ -15920,7 +16240,7 @@
         <p:spPr>
           <a:xfrm>
             <a:off x="767520" y="4772520"/>
-            <a:ext cx="253800" cy="253800"/>
+            <a:ext cx="253440" cy="253440"/>
           </a:xfrm>
           <a:prstGeom prst="rect">
             <a:avLst/>
@@ -15933,14 +16253,14 @@
       </p:pic>
       <p:sp>
         <p:nvSpPr>
-          <p:cNvPr id="219" name="Text 16"/>
+          <p:cNvPr id="220" name="Text 16"/>
           <p:cNvSpPr/>
           <p:nvPr/>
         </p:nvSpPr>
         <p:spPr>
           <a:xfrm>
             <a:off x="1207080" y="4700160"/>
-            <a:ext cx="4330800" cy="398880"/>
+            <a:ext cx="4330440" cy="398520"/>
           </a:xfrm>
           <a:prstGeom prst="rect">
             <a:avLst/>
@@ -16006,14 +16326,14 @@
       </p:sp>
       <p:sp>
         <p:nvSpPr>
-          <p:cNvPr id="220" name="Text 17"/>
+          <p:cNvPr id="221" name="Text 17"/>
           <p:cNvSpPr/>
           <p:nvPr/>
         </p:nvSpPr>
         <p:spPr>
           <a:xfrm>
             <a:off x="713160" y="5230440"/>
-            <a:ext cx="4788000" cy="645480"/>
+            <a:ext cx="4787640" cy="645120"/>
           </a:xfrm>
           <a:prstGeom prst="rect">
             <a:avLst/>
@@ -16067,14 +16387,14 @@
       </p:sp>
       <p:sp>
         <p:nvSpPr>
-          <p:cNvPr id="221" name="Shape 18"/>
+          <p:cNvPr id="222" name="Shape 18"/>
           <p:cNvSpPr/>
           <p:nvPr/>
         </p:nvSpPr>
         <p:spPr>
           <a:xfrm>
             <a:off x="5897880" y="1207080"/>
-            <a:ext cx="5802840" cy="1989720"/>
+            <a:ext cx="5802480" cy="1989360"/>
           </a:xfrm>
           <a:prstGeom prst="roundRect">
             <a:avLst>
@@ -16122,14 +16442,14 @@
       </p:sp>
       <p:sp>
         <p:nvSpPr>
-          <p:cNvPr id="222" name="Text 19"/>
+          <p:cNvPr id="223" name="Text 19"/>
           <p:cNvSpPr/>
           <p:nvPr/>
         </p:nvSpPr>
         <p:spPr>
           <a:xfrm>
             <a:off x="6117480" y="1334880"/>
-            <a:ext cx="5364000" cy="362160"/>
+            <a:ext cx="5363640" cy="361800"/>
           </a:xfrm>
           <a:prstGeom prst="rect">
             <a:avLst/>
@@ -16183,14 +16503,14 @@
       </p:sp>
       <p:sp>
         <p:nvSpPr>
-          <p:cNvPr id="223" name="Shape 20"/>
+          <p:cNvPr id="224" name="Shape 20"/>
           <p:cNvSpPr/>
           <p:nvPr/>
         </p:nvSpPr>
         <p:spPr>
           <a:xfrm>
             <a:off x="6135480" y="1774080"/>
-            <a:ext cx="398880" cy="398880"/>
+            <a:ext cx="398520" cy="398520"/>
           </a:xfrm>
           <a:prstGeom prst="ellipse">
             <a:avLst/>
@@ -16226,7 +16546,7 @@
       </p:sp>
       <p:pic>
         <p:nvPicPr>
-          <p:cNvPr id="224" name="Image 6" descr="preencoded.png"/>
+          <p:cNvPr id="225" name="Image 6" descr="preencoded.png"/>
           <p:cNvPicPr/>
           <p:nvPr/>
         </p:nvPicPr>
@@ -16237,7 +16557,7 @@
         <p:spPr>
           <a:xfrm>
             <a:off x="6208200" y="1846440"/>
-            <a:ext cx="253800" cy="253800"/>
+            <a:ext cx="253440" cy="253440"/>
           </a:xfrm>
           <a:prstGeom prst="rect">
             <a:avLst/>
@@ -16250,14 +16570,14 @@
       </p:pic>
       <p:sp>
         <p:nvSpPr>
-          <p:cNvPr id="225" name="Text 21"/>
+          <p:cNvPr id="226" name="Text 21"/>
           <p:cNvSpPr/>
           <p:nvPr/>
         </p:nvSpPr>
         <p:spPr>
           <a:xfrm>
             <a:off x="6647760" y="1774080"/>
-            <a:ext cx="4833720" cy="398880"/>
+            <a:ext cx="4833360" cy="398520"/>
           </a:xfrm>
           <a:prstGeom prst="rect">
             <a:avLst/>
@@ -16311,14 +16631,14 @@
       </p:sp>
       <p:sp>
         <p:nvSpPr>
-          <p:cNvPr id="226" name="Shape 22"/>
+          <p:cNvPr id="227" name="Shape 22"/>
           <p:cNvSpPr/>
           <p:nvPr/>
         </p:nvSpPr>
         <p:spPr>
           <a:xfrm>
             <a:off x="6135480" y="2249280"/>
-            <a:ext cx="398880" cy="398880"/>
+            <a:ext cx="398520" cy="398520"/>
           </a:xfrm>
           <a:prstGeom prst="ellipse">
             <a:avLst/>
@@ -16354,7 +16674,7 @@
       </p:sp>
       <p:pic>
         <p:nvPicPr>
-          <p:cNvPr id="227" name="Image 7" descr="preencoded.png"/>
+          <p:cNvPr id="228" name="Image 7" descr="preencoded.png"/>
           <p:cNvPicPr/>
           <p:nvPr/>
         </p:nvPicPr>
@@ -16365,7 +16685,7 @@
         <p:spPr>
           <a:xfrm>
             <a:off x="6208200" y="2322000"/>
-            <a:ext cx="253800" cy="253800"/>
+            <a:ext cx="253440" cy="253440"/>
           </a:xfrm>
           <a:prstGeom prst="rect">
             <a:avLst/>
@@ -16378,14 +16698,14 @@
       </p:pic>
       <p:sp>
         <p:nvSpPr>
-          <p:cNvPr id="228" name="Text 23"/>
+          <p:cNvPr id="229" name="Text 23"/>
           <p:cNvSpPr/>
           <p:nvPr/>
         </p:nvSpPr>
         <p:spPr>
           <a:xfrm>
             <a:off x="6647760" y="2249280"/>
-            <a:ext cx="4833720" cy="398880"/>
+            <a:ext cx="4833360" cy="398520"/>
           </a:xfrm>
           <a:prstGeom prst="rect">
             <a:avLst/>
@@ -16439,14 +16759,14 @@
       </p:sp>
       <p:sp>
         <p:nvSpPr>
-          <p:cNvPr id="229" name="Text 24"/>
+          <p:cNvPr id="230" name="Text 24"/>
           <p:cNvSpPr/>
           <p:nvPr/>
         </p:nvSpPr>
         <p:spPr>
           <a:xfrm>
             <a:off x="6153840" y="2779920"/>
-            <a:ext cx="5290920" cy="307440"/>
+            <a:ext cx="5290560" cy="307080"/>
           </a:xfrm>
           <a:prstGeom prst="rect">
             <a:avLst/>
@@ -16500,14 +16820,14 @@
       </p:sp>
       <p:sp>
         <p:nvSpPr>
-          <p:cNvPr id="230" name="Shape 25"/>
+          <p:cNvPr id="231" name="Shape 25"/>
           <p:cNvSpPr/>
           <p:nvPr/>
         </p:nvSpPr>
         <p:spPr>
           <a:xfrm>
             <a:off x="5897880" y="3319200"/>
-            <a:ext cx="5802840" cy="2666520"/>
+            <a:ext cx="5802480" cy="2666160"/>
           </a:xfrm>
           <a:prstGeom prst="roundRect">
             <a:avLst>
@@ -16555,14 +16875,14 @@
       </p:sp>
       <p:sp>
         <p:nvSpPr>
-          <p:cNvPr id="231" name="Text 26"/>
+          <p:cNvPr id="232" name="Text 26"/>
           <p:cNvSpPr/>
           <p:nvPr/>
         </p:nvSpPr>
         <p:spPr>
           <a:xfrm>
             <a:off x="6117480" y="3429000"/>
-            <a:ext cx="5364000" cy="343800"/>
+            <a:ext cx="5363640" cy="343440"/>
           </a:xfrm>
           <a:prstGeom prst="rect">
             <a:avLst/>
@@ -16616,14 +16936,14 @@
       </p:sp>
       <p:sp>
         <p:nvSpPr>
-          <p:cNvPr id="232" name="Text 27"/>
+          <p:cNvPr id="233" name="Text 27"/>
           <p:cNvSpPr/>
           <p:nvPr/>
         </p:nvSpPr>
         <p:spPr>
           <a:xfrm>
             <a:off x="6117480" y="3822120"/>
-            <a:ext cx="5364000" cy="563400"/>
+            <a:ext cx="5363640" cy="563040"/>
           </a:xfrm>
           <a:prstGeom prst="rect">
             <a:avLst/>
@@ -16677,14 +16997,14 @@
       </p:sp>
       <p:sp>
         <p:nvSpPr>
-          <p:cNvPr id="233" name="Shape 28"/>
+          <p:cNvPr id="234" name="Shape 28"/>
           <p:cNvSpPr/>
           <p:nvPr/>
         </p:nvSpPr>
         <p:spPr>
           <a:xfrm>
             <a:off x="6117480" y="4617720"/>
-            <a:ext cx="453600" cy="453600"/>
+            <a:ext cx="453240" cy="453240"/>
           </a:xfrm>
           <a:prstGeom prst="roundRect">
             <a:avLst>
@@ -16725,14 +17045,14 @@
       </p:sp>
       <p:sp>
         <p:nvSpPr>
-          <p:cNvPr id="234" name="Text 29"/>
+          <p:cNvPr id="235" name="Text 29"/>
           <p:cNvSpPr/>
           <p:nvPr/>
         </p:nvSpPr>
         <p:spPr>
           <a:xfrm>
             <a:off x="6117480" y="4617720"/>
-            <a:ext cx="453600" cy="453600"/>
+            <a:ext cx="453240" cy="453240"/>
           </a:xfrm>
           <a:prstGeom prst="rect">
             <a:avLst/>
@@ -16786,14 +17106,14 @@
       </p:sp>
       <p:sp>
         <p:nvSpPr>
-          <p:cNvPr id="235" name="Shape 30"/>
+          <p:cNvPr id="236" name="Shape 30"/>
           <p:cNvSpPr/>
           <p:nvPr/>
         </p:nvSpPr>
         <p:spPr>
           <a:xfrm>
             <a:off x="6629400" y="4617720"/>
-            <a:ext cx="453600" cy="453600"/>
+            <a:ext cx="453240" cy="453240"/>
           </a:xfrm>
           <a:prstGeom prst="roundRect">
             <a:avLst>
@@ -16834,14 +17154,14 @@
       </p:sp>
       <p:sp>
         <p:nvSpPr>
-          <p:cNvPr id="236" name="Text 31"/>
+          <p:cNvPr id="237" name="Text 31"/>
           <p:cNvSpPr/>
           <p:nvPr/>
         </p:nvSpPr>
         <p:spPr>
           <a:xfrm>
             <a:off x="6629400" y="4617720"/>
-            <a:ext cx="453600" cy="453600"/>
+            <a:ext cx="453240" cy="453240"/>
           </a:xfrm>
           <a:prstGeom prst="rect">
             <a:avLst/>
@@ -16895,14 +17215,14 @@
       </p:sp>
       <p:sp>
         <p:nvSpPr>
-          <p:cNvPr id="237" name="Shape 32"/>
+          <p:cNvPr id="238" name="Shape 32"/>
           <p:cNvSpPr/>
           <p:nvPr/>
         </p:nvSpPr>
         <p:spPr>
           <a:xfrm>
             <a:off x="7141320" y="4617720"/>
-            <a:ext cx="453600" cy="453600"/>
+            <a:ext cx="453240" cy="453240"/>
           </a:xfrm>
           <a:prstGeom prst="roundRect">
             <a:avLst>
@@ -16943,14 +17263,14 @@
       </p:sp>
       <p:sp>
         <p:nvSpPr>
-          <p:cNvPr id="238" name="Text 33"/>
+          <p:cNvPr id="239" name="Text 33"/>
           <p:cNvSpPr/>
           <p:nvPr/>
         </p:nvSpPr>
         <p:spPr>
           <a:xfrm>
             <a:off x="7141320" y="4617720"/>
-            <a:ext cx="453600" cy="453600"/>
+            <a:ext cx="453240" cy="453240"/>
           </a:xfrm>
           <a:prstGeom prst="rect">
             <a:avLst/>
@@ -17004,14 +17324,14 @@
       </p:sp>
       <p:sp>
         <p:nvSpPr>
-          <p:cNvPr id="239" name="Text 34"/>
+          <p:cNvPr id="240" name="Text 34"/>
           <p:cNvSpPr/>
           <p:nvPr/>
         </p:nvSpPr>
         <p:spPr>
           <a:xfrm>
             <a:off x="7653600" y="4599360"/>
-            <a:ext cx="325440" cy="490320"/>
+            <a:ext cx="325080" cy="489960"/>
           </a:xfrm>
           <a:prstGeom prst="rect">
             <a:avLst/>
@@ -17065,14 +17385,14 @@
       </p:sp>
       <p:sp>
         <p:nvSpPr>
-          <p:cNvPr id="240" name="Shape 35"/>
+          <p:cNvPr id="241" name="Shape 35"/>
           <p:cNvSpPr/>
           <p:nvPr/>
         </p:nvSpPr>
         <p:spPr>
           <a:xfrm>
             <a:off x="8019360" y="4617720"/>
-            <a:ext cx="453600" cy="453600"/>
+            <a:ext cx="453240" cy="453240"/>
           </a:xfrm>
           <a:prstGeom prst="roundRect">
             <a:avLst>
@@ -17113,14 +17433,14 @@
       </p:sp>
       <p:sp>
         <p:nvSpPr>
-          <p:cNvPr id="241" name="Text 36"/>
+          <p:cNvPr id="242" name="Text 36"/>
           <p:cNvSpPr/>
           <p:nvPr/>
         </p:nvSpPr>
         <p:spPr>
           <a:xfrm>
             <a:off x="8019360" y="4617720"/>
-            <a:ext cx="453600" cy="453600"/>
+            <a:ext cx="453240" cy="453240"/>
           </a:xfrm>
           <a:prstGeom prst="rect">
             <a:avLst/>
@@ -17174,14 +17494,14 @@
       </p:sp>
       <p:sp>
         <p:nvSpPr>
-          <p:cNvPr id="242" name="Shape 37"/>
+          <p:cNvPr id="243" name="Shape 37"/>
           <p:cNvSpPr/>
           <p:nvPr/>
         </p:nvSpPr>
         <p:spPr>
           <a:xfrm>
             <a:off x="8531280" y="4617720"/>
-            <a:ext cx="453600" cy="453600"/>
+            <a:ext cx="453240" cy="453240"/>
           </a:xfrm>
           <a:prstGeom prst="roundRect">
             <a:avLst>
@@ -17224,14 +17544,14 @@
       </p:sp>
       <p:sp>
         <p:nvSpPr>
-          <p:cNvPr id="243" name="Text 38"/>
+          <p:cNvPr id="244" name="Text 38"/>
           <p:cNvSpPr/>
           <p:nvPr/>
         </p:nvSpPr>
         <p:spPr>
           <a:xfrm>
             <a:off x="8531280" y="4617720"/>
-            <a:ext cx="453600" cy="453600"/>
+            <a:ext cx="453240" cy="453240"/>
           </a:xfrm>
           <a:prstGeom prst="rect">
             <a:avLst/>
@@ -17285,14 +17605,14 @@
       </p:sp>
       <p:sp>
         <p:nvSpPr>
-          <p:cNvPr id="244" name="Shape 39"/>
+          <p:cNvPr id="245" name="Shape 39"/>
           <p:cNvSpPr/>
           <p:nvPr/>
         </p:nvSpPr>
         <p:spPr>
           <a:xfrm>
             <a:off x="9043560" y="4617720"/>
-            <a:ext cx="453600" cy="453600"/>
+            <a:ext cx="453240" cy="453240"/>
           </a:xfrm>
           <a:prstGeom prst="roundRect">
             <a:avLst>
@@ -17335,14 +17655,14 @@
       </p:sp>
       <p:sp>
         <p:nvSpPr>
-          <p:cNvPr id="245" name="Text 40"/>
+          <p:cNvPr id="246" name="Text 40"/>
           <p:cNvSpPr/>
           <p:nvPr/>
         </p:nvSpPr>
         <p:spPr>
           <a:xfrm>
             <a:off x="9043560" y="4617720"/>
-            <a:ext cx="453600" cy="453600"/>
+            <a:ext cx="453240" cy="453240"/>
           </a:xfrm>
           <a:prstGeom prst="rect">
             <a:avLst/>
@@ -17396,14 +17716,14 @@
       </p:sp>
       <p:sp>
         <p:nvSpPr>
-          <p:cNvPr id="246" name="Text 41"/>
+          <p:cNvPr id="247" name="Text 41"/>
           <p:cNvSpPr/>
           <p:nvPr/>
         </p:nvSpPr>
         <p:spPr>
           <a:xfrm>
             <a:off x="9555480" y="4599360"/>
-            <a:ext cx="325440" cy="490320"/>
+            <a:ext cx="325080" cy="489960"/>
           </a:xfrm>
           <a:prstGeom prst="rect">
             <a:avLst/>
@@ -17457,14 +17777,14 @@
       </p:sp>
       <p:sp>
         <p:nvSpPr>
-          <p:cNvPr id="247" name="Shape 42"/>
+          <p:cNvPr id="248" name="Shape 42"/>
           <p:cNvSpPr/>
           <p:nvPr/>
         </p:nvSpPr>
         <p:spPr>
           <a:xfrm>
             <a:off x="9921240" y="4617720"/>
-            <a:ext cx="453600" cy="453600"/>
+            <a:ext cx="453240" cy="453240"/>
           </a:xfrm>
           <a:prstGeom prst="roundRect">
             <a:avLst>
@@ -17505,14 +17825,14 @@
       </p:sp>
       <p:sp>
         <p:nvSpPr>
-          <p:cNvPr id="248" name="Text 43"/>
+          <p:cNvPr id="249" name="Text 43"/>
           <p:cNvSpPr/>
           <p:nvPr/>
         </p:nvSpPr>
         <p:spPr>
           <a:xfrm>
             <a:off x="9921240" y="4617720"/>
-            <a:ext cx="453600" cy="453600"/>
+            <a:ext cx="453240" cy="453240"/>
           </a:xfrm>
           <a:prstGeom prst="rect">
             <a:avLst/>
@@ -17566,14 +17886,14 @@
       </p:sp>
       <p:sp>
         <p:nvSpPr>
-          <p:cNvPr id="249" name="Shape 44"/>
+          <p:cNvPr id="250" name="Shape 44"/>
           <p:cNvSpPr/>
           <p:nvPr/>
         </p:nvSpPr>
         <p:spPr>
           <a:xfrm>
             <a:off x="10433160" y="4617720"/>
-            <a:ext cx="453600" cy="453600"/>
+            <a:ext cx="453240" cy="453240"/>
           </a:xfrm>
           <a:prstGeom prst="roundRect">
             <a:avLst>
@@ -17614,14 +17934,14 @@
       </p:sp>
       <p:sp>
         <p:nvSpPr>
-          <p:cNvPr id="250" name="Text 45"/>
+          <p:cNvPr id="251" name="Text 45"/>
           <p:cNvSpPr/>
           <p:nvPr/>
         </p:nvSpPr>
         <p:spPr>
           <a:xfrm>
             <a:off x="10433160" y="4617720"/>
-            <a:ext cx="453600" cy="453600"/>
+            <a:ext cx="453240" cy="453240"/>
           </a:xfrm>
           <a:prstGeom prst="rect">
             <a:avLst/>
@@ -17675,14 +17995,14 @@
       </p:sp>
       <p:sp>
         <p:nvSpPr>
-          <p:cNvPr id="251" name="Shape 46"/>
+          <p:cNvPr id="252" name="Shape 46"/>
           <p:cNvSpPr/>
           <p:nvPr/>
         </p:nvSpPr>
         <p:spPr>
           <a:xfrm>
             <a:off x="10945440" y="4617720"/>
-            <a:ext cx="453600" cy="453600"/>
+            <a:ext cx="453240" cy="453240"/>
           </a:xfrm>
           <a:prstGeom prst="roundRect">
             <a:avLst>
@@ -17723,14 +18043,14 @@
       </p:sp>
       <p:sp>
         <p:nvSpPr>
-          <p:cNvPr id="252" name="Text 47"/>
+          <p:cNvPr id="253" name="Text 47"/>
           <p:cNvSpPr/>
           <p:nvPr/>
         </p:nvSpPr>
         <p:spPr>
           <a:xfrm>
             <a:off x="10945440" y="4617720"/>
-            <a:ext cx="453600" cy="453600"/>
+            <a:ext cx="453240" cy="453240"/>
           </a:xfrm>
           <a:prstGeom prst="rect">
             <a:avLst/>
@@ -17784,14 +18104,14 @@
       </p:sp>
       <p:sp>
         <p:nvSpPr>
-          <p:cNvPr id="253" name="Text 48"/>
+          <p:cNvPr id="254" name="Text 48"/>
           <p:cNvSpPr/>
           <p:nvPr/>
         </p:nvSpPr>
         <p:spPr>
           <a:xfrm>
             <a:off x="6117480" y="5257800"/>
-            <a:ext cx="5364000" cy="499320"/>
+            <a:ext cx="5363640" cy="498960"/>
           </a:xfrm>
           <a:prstGeom prst="rect">
             <a:avLst/>
@@ -17869,14 +18189,14 @@
       </p:sp>
       <p:sp>
         <p:nvSpPr>
-          <p:cNvPr id="254" name="Text 49"/>
+          <p:cNvPr id="255" name="Text 49"/>
           <p:cNvSpPr/>
           <p:nvPr/>
         </p:nvSpPr>
         <p:spPr>
           <a:xfrm>
             <a:off x="10881360" y="6537960"/>
-            <a:ext cx="819360" cy="225000"/>
+            <a:ext cx="819000" cy="224640"/>
           </a:xfrm>
           <a:prstGeom prst="rect">
             <a:avLst/>
@@ -17967,14 +18287,14 @@
       </p:grpSpPr>
       <p:sp>
         <p:nvSpPr>
-          <p:cNvPr id="255" name="Text 0"/>
+          <p:cNvPr id="256" name="Text 0"/>
           <p:cNvSpPr/>
           <p:nvPr/>
         </p:nvSpPr>
         <p:spPr>
           <a:xfrm>
             <a:off x="457200" y="274320"/>
-            <a:ext cx="10329120" cy="499320"/>
+            <a:ext cx="10328760" cy="498960"/>
           </a:xfrm>
           <a:prstGeom prst="rect">
             <a:avLst/>
@@ -18028,14 +18348,14 @@
       </p:sp>
       <p:sp>
         <p:nvSpPr>
-          <p:cNvPr id="256" name="Text 1"/>
+          <p:cNvPr id="257" name="Text 1"/>
           <p:cNvSpPr/>
           <p:nvPr/>
         </p:nvSpPr>
         <p:spPr>
           <a:xfrm>
             <a:off x="457200" y="822960"/>
-            <a:ext cx="10420560" cy="307440"/>
+            <a:ext cx="10420200" cy="307080"/>
           </a:xfrm>
           <a:prstGeom prst="rect">
             <a:avLst/>
@@ -18089,14 +18409,14 @@
       </p:sp>
       <p:sp>
         <p:nvSpPr>
-          <p:cNvPr id="257" name="Shape 2"/>
+          <p:cNvPr id="258" name="Shape 2"/>
           <p:cNvSpPr/>
           <p:nvPr/>
         </p:nvSpPr>
         <p:spPr>
           <a:xfrm>
             <a:off x="11036880" y="311040"/>
-            <a:ext cx="380520" cy="380520"/>
+            <a:ext cx="380160" cy="380160"/>
           </a:xfrm>
           <a:prstGeom prst="ellipse">
             <a:avLst/>
@@ -18132,7 +18452,7 @@
       </p:sp>
       <p:pic>
         <p:nvPicPr>
-          <p:cNvPr id="258" name="Image 0" descr="preencoded.png"/>
+          <p:cNvPr id="259" name="Image 0" descr="preencoded.png"/>
           <p:cNvPicPr/>
           <p:nvPr/>
         </p:nvPicPr>
@@ -18143,7 +18463,7 @@
         <p:spPr>
           <a:xfrm>
             <a:off x="11106000" y="380160"/>
-            <a:ext cx="242280" cy="242280"/>
+            <a:ext cx="241920" cy="241920"/>
           </a:xfrm>
           <a:prstGeom prst="rect">
             <a:avLst/>
@@ -18156,14 +18476,14 @@
       </p:pic>
       <p:sp>
         <p:nvSpPr>
-          <p:cNvPr id="259" name="Shape 3"/>
+          <p:cNvPr id="260" name="Shape 3"/>
           <p:cNvSpPr/>
           <p:nvPr/>
         </p:nvSpPr>
         <p:spPr>
           <a:xfrm>
             <a:off x="11494080" y="311040"/>
-            <a:ext cx="380520" cy="380520"/>
+            <a:ext cx="380160" cy="380160"/>
           </a:xfrm>
           <a:prstGeom prst="ellipse">
             <a:avLst/>
@@ -18199,7 +18519,7 @@
       </p:sp>
       <p:pic>
         <p:nvPicPr>
-          <p:cNvPr id="260" name="Image 1" descr="preencoded.png"/>
+          <p:cNvPr id="261" name="Image 1" descr="preencoded.png"/>
           <p:cNvPicPr/>
           <p:nvPr/>
         </p:nvPicPr>
@@ -18210,7 +18530,7 @@
         <p:spPr>
           <a:xfrm>
             <a:off x="11563200" y="380160"/>
-            <a:ext cx="242280" cy="242280"/>
+            <a:ext cx="241920" cy="241920"/>
           </a:xfrm>
           <a:prstGeom prst="rect">
             <a:avLst/>
@@ -18223,14 +18543,14 @@
       </p:pic>
       <p:sp>
         <p:nvSpPr>
-          <p:cNvPr id="261" name="Text 4"/>
+          <p:cNvPr id="262" name="Text 4"/>
           <p:cNvSpPr/>
           <p:nvPr/>
         </p:nvSpPr>
         <p:spPr>
           <a:xfrm>
             <a:off x="457200" y="1097280"/>
-            <a:ext cx="11243520" cy="289080"/>
+            <a:ext cx="11243160" cy="288720"/>
           </a:xfrm>
           <a:prstGeom prst="rect">
             <a:avLst/>
@@ -18284,7 +18604,7 @@
       </p:sp>
       <p:graphicFrame>
         <p:nvGraphicFramePr>
-          <p:cNvPr id="262" name="Table 0"/>
+          <p:cNvPr id="263" name="Table 0"/>
           <p:cNvGraphicFramePr/>
           <p:nvPr/>
         </p:nvGraphicFramePr>
@@ -19107,14 +19427,14 @@
       </p:graphicFrame>
       <p:sp>
         <p:nvSpPr>
-          <p:cNvPr id="263" name="Shape 5"/>
+          <p:cNvPr id="264" name="Shape 5"/>
           <p:cNvSpPr/>
           <p:nvPr/>
         </p:nvSpPr>
         <p:spPr>
           <a:xfrm>
             <a:off x="457200" y="2853000"/>
-            <a:ext cx="5482800" cy="435240"/>
+            <a:ext cx="5482440" cy="434880"/>
           </a:xfrm>
           <a:prstGeom prst="roundRect">
             <a:avLst>
@@ -19152,14 +19472,14 @@
       </p:sp>
       <p:sp>
         <p:nvSpPr>
-          <p:cNvPr id="264" name="Shape 6"/>
+          <p:cNvPr id="265" name="Shape 6"/>
           <p:cNvSpPr/>
           <p:nvPr/>
         </p:nvSpPr>
         <p:spPr>
           <a:xfrm>
             <a:off x="585360" y="2917080"/>
-            <a:ext cx="307440" cy="307440"/>
+            <a:ext cx="307080" cy="307080"/>
           </a:xfrm>
           <a:prstGeom prst="ellipse">
             <a:avLst/>
@@ -19195,7 +19515,7 @@
       </p:sp>
       <p:pic>
         <p:nvPicPr>
-          <p:cNvPr id="265" name="Image 2" descr="preencoded.png"/>
+          <p:cNvPr id="266" name="Image 2" descr="preencoded.png"/>
           <p:cNvPicPr/>
           <p:nvPr/>
         </p:nvPicPr>
@@ -19206,7 +19526,7 @@
         <p:spPr>
           <a:xfrm>
             <a:off x="641160" y="2972880"/>
-            <a:ext cx="195480" cy="195480"/>
+            <a:ext cx="195120" cy="195120"/>
           </a:xfrm>
           <a:prstGeom prst="rect">
             <a:avLst/>
@@ -19219,14 +19539,14 @@
       </p:pic>
       <p:sp>
         <p:nvSpPr>
-          <p:cNvPr id="266" name="Text 7"/>
+          <p:cNvPr id="267" name="Text 7"/>
           <p:cNvSpPr/>
           <p:nvPr/>
         </p:nvSpPr>
         <p:spPr>
           <a:xfrm>
             <a:off x="987480" y="2853000"/>
-            <a:ext cx="4842720" cy="435240"/>
+            <a:ext cx="4842360" cy="434880"/>
           </a:xfrm>
           <a:prstGeom prst="rect">
             <a:avLst/>
@@ -19280,14 +19600,14 @@
       </p:sp>
       <p:sp>
         <p:nvSpPr>
-          <p:cNvPr id="267" name="Shape 8"/>
+          <p:cNvPr id="268" name="Shape 8"/>
           <p:cNvSpPr/>
           <p:nvPr/>
         </p:nvSpPr>
         <p:spPr>
           <a:xfrm>
             <a:off x="457200" y="3401640"/>
-            <a:ext cx="5482800" cy="956520"/>
+            <a:ext cx="5482440" cy="956160"/>
           </a:xfrm>
           <a:prstGeom prst="roundRect">
             <a:avLst>
@@ -19335,14 +19655,14 @@
       </p:sp>
       <p:sp>
         <p:nvSpPr>
-          <p:cNvPr id="268" name="Text 9"/>
+          <p:cNvPr id="269" name="Text 9"/>
           <p:cNvSpPr/>
           <p:nvPr/>
         </p:nvSpPr>
         <p:spPr>
           <a:xfrm>
             <a:off x="640080" y="3493080"/>
-            <a:ext cx="5117040" cy="362160"/>
+            <a:ext cx="5116680" cy="361800"/>
           </a:xfrm>
           <a:prstGeom prst="rect">
             <a:avLst/>
@@ -19408,14 +19728,14 @@
       </p:sp>
       <p:sp>
         <p:nvSpPr>
-          <p:cNvPr id="269" name="Text 10"/>
+          <p:cNvPr id="270" name="Text 10"/>
           <p:cNvSpPr/>
           <p:nvPr/>
         </p:nvSpPr>
         <p:spPr>
           <a:xfrm>
             <a:off x="640080" y="3904560"/>
-            <a:ext cx="5117040" cy="389520"/>
+            <a:ext cx="5116680" cy="389160"/>
           </a:xfrm>
           <a:prstGeom prst="rect">
             <a:avLst/>
@@ -19469,14 +19789,14 @@
       </p:sp>
       <p:sp>
         <p:nvSpPr>
-          <p:cNvPr id="270" name="Shape 11"/>
+          <p:cNvPr id="271" name="Shape 11"/>
           <p:cNvSpPr/>
           <p:nvPr/>
         </p:nvSpPr>
         <p:spPr>
           <a:xfrm>
             <a:off x="457200" y="4471560"/>
-            <a:ext cx="5482800" cy="956520"/>
+            <a:ext cx="5482440" cy="956160"/>
           </a:xfrm>
           <a:prstGeom prst="roundRect">
             <a:avLst>
@@ -19524,14 +19844,14 @@
       </p:sp>
       <p:sp>
         <p:nvSpPr>
-          <p:cNvPr id="271" name="Text 12"/>
+          <p:cNvPr id="272" name="Text 12"/>
           <p:cNvSpPr/>
           <p:nvPr/>
         </p:nvSpPr>
         <p:spPr>
           <a:xfrm>
             <a:off x="640080" y="4563000"/>
-            <a:ext cx="5117040" cy="362160"/>
+            <a:ext cx="5116680" cy="361800"/>
           </a:xfrm>
           <a:prstGeom prst="rect">
             <a:avLst/>
@@ -19597,14 +19917,14 @@
       </p:sp>
       <p:sp>
         <p:nvSpPr>
-          <p:cNvPr id="272" name="Text 13"/>
+          <p:cNvPr id="273" name="Text 13"/>
           <p:cNvSpPr/>
           <p:nvPr/>
         </p:nvSpPr>
         <p:spPr>
           <a:xfrm>
             <a:off x="640080" y="4974480"/>
-            <a:ext cx="5117040" cy="389520"/>
+            <a:ext cx="5116680" cy="389160"/>
           </a:xfrm>
           <a:prstGeom prst="rect">
             <a:avLst/>
@@ -19658,14 +19978,14 @@
       </p:sp>
       <p:sp>
         <p:nvSpPr>
-          <p:cNvPr id="273" name="Shape 14"/>
+          <p:cNvPr id="274" name="Shape 14"/>
           <p:cNvSpPr/>
           <p:nvPr/>
         </p:nvSpPr>
         <p:spPr>
           <a:xfrm>
             <a:off x="457200" y="5541120"/>
-            <a:ext cx="5482800" cy="956520"/>
+            <a:ext cx="5482440" cy="956160"/>
           </a:xfrm>
           <a:prstGeom prst="roundRect">
             <a:avLst>
@@ -19713,14 +20033,14 @@
       </p:sp>
       <p:sp>
         <p:nvSpPr>
-          <p:cNvPr id="274" name="Text 15"/>
+          <p:cNvPr id="275" name="Text 15"/>
           <p:cNvSpPr/>
           <p:nvPr/>
         </p:nvSpPr>
         <p:spPr>
           <a:xfrm>
             <a:off x="640080" y="5632560"/>
-            <a:ext cx="5117040" cy="362160"/>
+            <a:ext cx="5116680" cy="361800"/>
           </a:xfrm>
           <a:prstGeom prst="rect">
             <a:avLst/>
@@ -19786,14 +20106,14 @@
       </p:sp>
       <p:sp>
         <p:nvSpPr>
-          <p:cNvPr id="275" name="Text 16"/>
+          <p:cNvPr id="276" name="Text 16"/>
           <p:cNvSpPr/>
           <p:nvPr/>
         </p:nvSpPr>
         <p:spPr>
           <a:xfrm>
             <a:off x="640080" y="6044040"/>
-            <a:ext cx="5117040" cy="389520"/>
+            <a:ext cx="5116680" cy="389160"/>
           </a:xfrm>
           <a:prstGeom prst="rect">
             <a:avLst/>
@@ -19847,14 +20167,14 @@
       </p:sp>
       <p:sp>
         <p:nvSpPr>
-          <p:cNvPr id="276" name="Shape 17"/>
+          <p:cNvPr id="277" name="Shape 17"/>
           <p:cNvSpPr/>
           <p:nvPr/>
         </p:nvSpPr>
         <p:spPr>
           <a:xfrm>
             <a:off x="6217920" y="2853000"/>
-            <a:ext cx="5482800" cy="435240"/>
+            <a:ext cx="5482440" cy="434880"/>
           </a:xfrm>
           <a:prstGeom prst="roundRect">
             <a:avLst>
@@ -19892,14 +20212,14 @@
       </p:sp>
       <p:sp>
         <p:nvSpPr>
-          <p:cNvPr id="277" name="Shape 18"/>
+          <p:cNvPr id="278" name="Shape 18"/>
           <p:cNvSpPr/>
           <p:nvPr/>
         </p:nvSpPr>
         <p:spPr>
           <a:xfrm>
             <a:off x="6346080" y="2917080"/>
-            <a:ext cx="307440" cy="307440"/>
+            <a:ext cx="307080" cy="307080"/>
           </a:xfrm>
           <a:prstGeom prst="ellipse">
             <a:avLst/>
@@ -19935,7 +20255,7 @@
       </p:sp>
       <p:pic>
         <p:nvPicPr>
-          <p:cNvPr id="278" name="Image 3" descr="preencoded.png"/>
+          <p:cNvPr id="279" name="Image 3" descr="preencoded.png"/>
           <p:cNvPicPr/>
           <p:nvPr/>
         </p:nvPicPr>
@@ -19946,7 +20266,7 @@
         <p:spPr>
           <a:xfrm>
             <a:off x="6401880" y="2972880"/>
-            <a:ext cx="195480" cy="195480"/>
+            <a:ext cx="195120" cy="195120"/>
           </a:xfrm>
           <a:prstGeom prst="rect">
             <a:avLst/>
@@ -19959,14 +20279,14 @@
       </p:pic>
       <p:sp>
         <p:nvSpPr>
-          <p:cNvPr id="279" name="Text 19"/>
+          <p:cNvPr id="280" name="Text 19"/>
           <p:cNvSpPr/>
           <p:nvPr/>
         </p:nvSpPr>
         <p:spPr>
           <a:xfrm>
             <a:off x="6748200" y="2853000"/>
-            <a:ext cx="4842720" cy="435240"/>
+            <a:ext cx="4842360" cy="434880"/>
           </a:xfrm>
           <a:prstGeom prst="rect">
             <a:avLst/>
@@ -20020,14 +20340,14 @@
       </p:sp>
       <p:sp>
         <p:nvSpPr>
-          <p:cNvPr id="280" name="Shape 20"/>
+          <p:cNvPr id="281" name="Shape 20"/>
           <p:cNvSpPr/>
           <p:nvPr/>
         </p:nvSpPr>
         <p:spPr>
           <a:xfrm>
             <a:off x="6217920" y="3401640"/>
-            <a:ext cx="5482800" cy="956520"/>
+            <a:ext cx="5482440" cy="956160"/>
           </a:xfrm>
           <a:prstGeom prst="roundRect">
             <a:avLst>
@@ -20075,14 +20395,14 @@
       </p:sp>
       <p:sp>
         <p:nvSpPr>
-          <p:cNvPr id="281" name="Text 21"/>
+          <p:cNvPr id="282" name="Text 21"/>
           <p:cNvSpPr/>
           <p:nvPr/>
         </p:nvSpPr>
         <p:spPr>
           <a:xfrm>
             <a:off x="6400800" y="3493080"/>
-            <a:ext cx="5117040" cy="362160"/>
+            <a:ext cx="5116680" cy="361800"/>
           </a:xfrm>
           <a:prstGeom prst="rect">
             <a:avLst/>
@@ -20148,14 +20468,14 @@
       </p:sp>
       <p:sp>
         <p:nvSpPr>
-          <p:cNvPr id="282" name="Text 22"/>
+          <p:cNvPr id="283" name="Text 22"/>
           <p:cNvSpPr/>
           <p:nvPr/>
         </p:nvSpPr>
         <p:spPr>
           <a:xfrm>
             <a:off x="6400800" y="3904560"/>
-            <a:ext cx="5117040" cy="389520"/>
+            <a:ext cx="5116680" cy="389160"/>
           </a:xfrm>
           <a:prstGeom prst="rect">
             <a:avLst/>
@@ -20209,14 +20529,14 @@
       </p:sp>
       <p:sp>
         <p:nvSpPr>
-          <p:cNvPr id="283" name="Shape 23"/>
+          <p:cNvPr id="284" name="Shape 23"/>
           <p:cNvSpPr/>
           <p:nvPr/>
         </p:nvSpPr>
         <p:spPr>
           <a:xfrm>
             <a:off x="6217920" y="4471560"/>
-            <a:ext cx="5482800" cy="956520"/>
+            <a:ext cx="5482440" cy="956160"/>
           </a:xfrm>
           <a:prstGeom prst="roundRect">
             <a:avLst>
@@ -20264,14 +20584,14 @@
       </p:sp>
       <p:sp>
         <p:nvSpPr>
-          <p:cNvPr id="284" name="Text 24"/>
+          <p:cNvPr id="285" name="Text 24"/>
           <p:cNvSpPr/>
           <p:nvPr/>
         </p:nvSpPr>
         <p:spPr>
           <a:xfrm>
             <a:off x="6400800" y="4563000"/>
-            <a:ext cx="5117040" cy="362160"/>
+            <a:ext cx="5116680" cy="361800"/>
           </a:xfrm>
           <a:prstGeom prst="rect">
             <a:avLst/>
@@ -20337,14 +20657,14 @@
       </p:sp>
       <p:sp>
         <p:nvSpPr>
-          <p:cNvPr id="285" name="Text 25"/>
+          <p:cNvPr id="286" name="Text 25"/>
           <p:cNvSpPr/>
           <p:nvPr/>
         </p:nvSpPr>
         <p:spPr>
           <a:xfrm>
             <a:off x="6400800" y="4974480"/>
-            <a:ext cx="5117040" cy="389520"/>
+            <a:ext cx="5116680" cy="389160"/>
           </a:xfrm>
           <a:prstGeom prst="rect">
             <a:avLst/>
@@ -20398,14 +20718,14 @@
       </p:sp>
       <p:sp>
         <p:nvSpPr>
-          <p:cNvPr id="286" name="Shape 26"/>
+          <p:cNvPr id="287" name="Shape 26"/>
           <p:cNvSpPr/>
           <p:nvPr/>
         </p:nvSpPr>
         <p:spPr>
           <a:xfrm>
             <a:off x="6217920" y="5541120"/>
-            <a:ext cx="5482800" cy="956520"/>
+            <a:ext cx="5482440" cy="956160"/>
           </a:xfrm>
           <a:prstGeom prst="roundRect">
             <a:avLst>
@@ -20453,14 +20773,14 @@
       </p:sp>
       <p:sp>
         <p:nvSpPr>
-          <p:cNvPr id="287" name="Text 27"/>
+          <p:cNvPr id="288" name="Text 27"/>
           <p:cNvSpPr/>
           <p:nvPr/>
         </p:nvSpPr>
         <p:spPr>
           <a:xfrm>
             <a:off x="6400800" y="5541120"/>
-            <a:ext cx="5117040" cy="956520"/>
+            <a:ext cx="5116680" cy="956160"/>
           </a:xfrm>
           <a:prstGeom prst="rect">
             <a:avLst/>
@@ -20622,14 +20942,14 @@
       </p:sp>
       <p:sp>
         <p:nvSpPr>
-          <p:cNvPr id="288" name="Text 28"/>
+          <p:cNvPr id="289" name="Text 28"/>
           <p:cNvSpPr/>
           <p:nvPr/>
         </p:nvSpPr>
         <p:spPr>
           <a:xfrm>
             <a:off x="10881360" y="6537960"/>
-            <a:ext cx="819360" cy="225000"/>
+            <a:ext cx="819000" cy="224640"/>
           </a:xfrm>
           <a:prstGeom prst="rect">
             <a:avLst/>
@@ -20720,14 +21040,14 @@
       </p:grpSpPr>
       <p:sp>
         <p:nvSpPr>
-          <p:cNvPr id="289" name="Text 0"/>
+          <p:cNvPr id="290" name="Text 0"/>
           <p:cNvSpPr/>
           <p:nvPr/>
         </p:nvSpPr>
         <p:spPr>
           <a:xfrm>
             <a:off x="457200" y="274320"/>
-            <a:ext cx="10329120" cy="499320"/>
+            <a:ext cx="10328760" cy="498960"/>
           </a:xfrm>
           <a:prstGeom prst="rect">
             <a:avLst/>
@@ -20781,14 +21101,14 @@
       </p:sp>
       <p:sp>
         <p:nvSpPr>
-          <p:cNvPr id="290" name="Text 1"/>
+          <p:cNvPr id="291" name="Text 1"/>
           <p:cNvSpPr/>
           <p:nvPr/>
         </p:nvSpPr>
         <p:spPr>
           <a:xfrm>
             <a:off x="457200" y="822960"/>
-            <a:ext cx="10420560" cy="307440"/>
+            <a:ext cx="10420200" cy="307080"/>
           </a:xfrm>
           <a:prstGeom prst="rect">
             <a:avLst/>
@@ -20842,14 +21162,14 @@
       </p:sp>
       <p:sp>
         <p:nvSpPr>
-          <p:cNvPr id="291" name="Shape 2"/>
+          <p:cNvPr id="292" name="Shape 2"/>
           <p:cNvSpPr/>
           <p:nvPr/>
         </p:nvSpPr>
         <p:spPr>
           <a:xfrm>
             <a:off x="11036880" y="311040"/>
-            <a:ext cx="380520" cy="380520"/>
+            <a:ext cx="380160" cy="380160"/>
           </a:xfrm>
           <a:prstGeom prst="ellipse">
             <a:avLst/>
@@ -20885,7 +21205,7 @@
       </p:sp>
       <p:pic>
         <p:nvPicPr>
-          <p:cNvPr id="292" name="Image 0" descr="preencoded.png"/>
+          <p:cNvPr id="293" name="Image 0" descr="preencoded.png"/>
           <p:cNvPicPr/>
           <p:nvPr/>
         </p:nvPicPr>
@@ -20896,7 +21216,7 @@
         <p:spPr>
           <a:xfrm>
             <a:off x="11106000" y="380160"/>
-            <a:ext cx="242280" cy="242280"/>
+            <a:ext cx="241920" cy="241920"/>
           </a:xfrm>
           <a:prstGeom prst="rect">
             <a:avLst/>
@@ -20909,14 +21229,14 @@
       </p:pic>
       <p:sp>
         <p:nvSpPr>
-          <p:cNvPr id="293" name="Shape 3"/>
+          <p:cNvPr id="294" name="Shape 3"/>
           <p:cNvSpPr/>
           <p:nvPr/>
         </p:nvSpPr>
         <p:spPr>
           <a:xfrm>
             <a:off x="11494080" y="311040"/>
-            <a:ext cx="380520" cy="380520"/>
+            <a:ext cx="380160" cy="380160"/>
           </a:xfrm>
           <a:prstGeom prst="ellipse">
             <a:avLst/>
@@ -20952,7 +21272,7 @@
       </p:sp>
       <p:pic>
         <p:nvPicPr>
-          <p:cNvPr id="294" name="Image 1" descr="preencoded.png"/>
+          <p:cNvPr id="295" name="Image 1" descr="preencoded.png"/>
           <p:cNvPicPr/>
           <p:nvPr/>
         </p:nvPicPr>
@@ -20963,7 +21283,7 @@
         <p:spPr>
           <a:xfrm>
             <a:off x="11563200" y="380160"/>
-            <a:ext cx="242280" cy="242280"/>
+            <a:ext cx="241920" cy="241920"/>
           </a:xfrm>
           <a:prstGeom prst="rect">
             <a:avLst/>
@@ -20976,14 +21296,14 @@
       </p:pic>
       <p:sp>
         <p:nvSpPr>
-          <p:cNvPr id="295" name="Shape 4"/>
+          <p:cNvPr id="296" name="Shape 4"/>
           <p:cNvSpPr/>
           <p:nvPr/>
         </p:nvSpPr>
         <p:spPr>
           <a:xfrm>
             <a:off x="457200" y="1280160"/>
-            <a:ext cx="11243520" cy="2392200"/>
+            <a:ext cx="11243160" cy="2391840"/>
           </a:xfrm>
           <a:prstGeom prst="roundRect">
             <a:avLst>
@@ -21031,14 +21351,14 @@
       </p:sp>
       <p:sp>
         <p:nvSpPr>
-          <p:cNvPr id="296" name="Shape 5"/>
+          <p:cNvPr id="297" name="Shape 5"/>
           <p:cNvSpPr/>
           <p:nvPr/>
         </p:nvSpPr>
         <p:spPr>
           <a:xfrm>
             <a:off x="731520" y="1463040"/>
-            <a:ext cx="453600" cy="453600"/>
+            <a:ext cx="453240" cy="453240"/>
           </a:xfrm>
           <a:prstGeom prst="ellipse">
             <a:avLst/>
@@ -21074,7 +21394,7 @@
       </p:sp>
       <p:pic>
         <p:nvPicPr>
-          <p:cNvPr id="297" name="Image 2" descr="preencoded.png"/>
+          <p:cNvPr id="298" name="Image 2" descr="preencoded.png"/>
           <p:cNvPicPr/>
           <p:nvPr/>
         </p:nvPicPr>
@@ -21085,7 +21405,7 @@
         <p:spPr>
           <a:xfrm>
             <a:off x="834480" y="1566000"/>
-            <a:ext cx="248040" cy="248040"/>
+            <a:ext cx="247680" cy="247680"/>
           </a:xfrm>
           <a:prstGeom prst="rect">
             <a:avLst/>
@@ -21098,14 +21418,14 @@
       </p:pic>
       <p:sp>
         <p:nvSpPr>
-          <p:cNvPr id="298" name="Text 6"/>
+          <p:cNvPr id="299" name="Text 6"/>
           <p:cNvSpPr/>
           <p:nvPr/>
         </p:nvSpPr>
         <p:spPr>
           <a:xfrm>
             <a:off x="1353240" y="1463040"/>
-            <a:ext cx="10146240" cy="453600"/>
+            <a:ext cx="10145880" cy="453240"/>
           </a:xfrm>
           <a:prstGeom prst="rect">
             <a:avLst/>
@@ -21159,14 +21479,14 @@
       </p:sp>
       <p:sp>
         <p:nvSpPr>
-          <p:cNvPr id="299" name="Shape 7"/>
+          <p:cNvPr id="300" name="Shape 7"/>
           <p:cNvSpPr/>
           <p:nvPr/>
         </p:nvSpPr>
         <p:spPr>
           <a:xfrm>
             <a:off x="768240" y="2048400"/>
-            <a:ext cx="398880" cy="398880"/>
+            <a:ext cx="398520" cy="398520"/>
           </a:xfrm>
           <a:prstGeom prst="ellipse">
             <a:avLst/>
@@ -21202,7 +21522,7 @@
       </p:sp>
       <p:pic>
         <p:nvPicPr>
-          <p:cNvPr id="300" name="Image 3" descr="preencoded.png"/>
+          <p:cNvPr id="301" name="Image 3" descr="preencoded.png"/>
           <p:cNvPicPr/>
           <p:nvPr/>
         </p:nvPicPr>
@@ -21213,7 +21533,7 @@
         <p:spPr>
           <a:xfrm>
             <a:off x="840600" y="2120760"/>
-            <a:ext cx="253800" cy="253800"/>
+            <a:ext cx="253440" cy="253440"/>
           </a:xfrm>
           <a:prstGeom prst="rect">
             <a:avLst/>
@@ -21226,14 +21546,14 @@
       </p:pic>
       <p:sp>
         <p:nvSpPr>
-          <p:cNvPr id="301" name="Text 8"/>
+          <p:cNvPr id="302" name="Text 8"/>
           <p:cNvSpPr/>
           <p:nvPr/>
         </p:nvSpPr>
         <p:spPr>
           <a:xfrm>
             <a:off x="1280160" y="2048400"/>
-            <a:ext cx="910800" cy="398880"/>
+            <a:ext cx="910440" cy="398520"/>
           </a:xfrm>
           <a:prstGeom prst="rect">
             <a:avLst/>
@@ -21287,14 +21607,14 @@
       </p:sp>
       <p:sp>
         <p:nvSpPr>
-          <p:cNvPr id="302" name="Text 9"/>
+          <p:cNvPr id="303" name="Text 9"/>
           <p:cNvSpPr/>
           <p:nvPr/>
         </p:nvSpPr>
         <p:spPr>
           <a:xfrm>
             <a:off x="2240280" y="2048400"/>
-            <a:ext cx="9231840" cy="398880"/>
+            <a:ext cx="9231480" cy="398520"/>
           </a:xfrm>
           <a:prstGeom prst="rect">
             <a:avLst/>
@@ -21348,14 +21668,14 @@
       </p:sp>
       <p:sp>
         <p:nvSpPr>
-          <p:cNvPr id="303" name="Shape 10"/>
+          <p:cNvPr id="304" name="Shape 10"/>
           <p:cNvSpPr/>
           <p:nvPr/>
         </p:nvSpPr>
         <p:spPr>
           <a:xfrm>
             <a:off x="768240" y="2578680"/>
-            <a:ext cx="398880" cy="398880"/>
+            <a:ext cx="398520" cy="398520"/>
           </a:xfrm>
           <a:prstGeom prst="ellipse">
             <a:avLst/>
@@ -21391,7 +21711,7 @@
       </p:sp>
       <p:pic>
         <p:nvPicPr>
-          <p:cNvPr id="304" name="Image 4" descr="preencoded.png"/>
+          <p:cNvPr id="305" name="Image 4" descr="preencoded.png"/>
           <p:cNvPicPr/>
           <p:nvPr/>
         </p:nvPicPr>
@@ -21402,7 +21722,7 @@
         <p:spPr>
           <a:xfrm>
             <a:off x="840600" y="2651040"/>
-            <a:ext cx="253800" cy="253800"/>
+            <a:ext cx="253440" cy="253440"/>
           </a:xfrm>
           <a:prstGeom prst="rect">
             <a:avLst/>
@@ -21415,14 +21735,14 @@
       </p:pic>
       <p:sp>
         <p:nvSpPr>
-          <p:cNvPr id="305" name="Text 11"/>
+          <p:cNvPr id="306" name="Text 11"/>
           <p:cNvSpPr/>
           <p:nvPr/>
         </p:nvSpPr>
         <p:spPr>
           <a:xfrm>
             <a:off x="1280160" y="2578680"/>
-            <a:ext cx="910800" cy="398880"/>
+            <a:ext cx="910440" cy="398520"/>
           </a:xfrm>
           <a:prstGeom prst="rect">
             <a:avLst/>
@@ -21476,14 +21796,14 @@
       </p:sp>
       <p:sp>
         <p:nvSpPr>
-          <p:cNvPr id="306" name="Text 12"/>
+          <p:cNvPr id="307" name="Text 12"/>
           <p:cNvSpPr/>
           <p:nvPr/>
         </p:nvSpPr>
         <p:spPr>
           <a:xfrm>
             <a:off x="2240280" y="2578680"/>
-            <a:ext cx="9231840" cy="398880"/>
+            <a:ext cx="9231480" cy="398520"/>
           </a:xfrm>
           <a:prstGeom prst="rect">
             <a:avLst/>
@@ -21537,14 +21857,14 @@
       </p:sp>
       <p:sp>
         <p:nvSpPr>
-          <p:cNvPr id="307" name="Text 13"/>
+          <p:cNvPr id="308" name="Text 13"/>
           <p:cNvSpPr/>
           <p:nvPr/>
         </p:nvSpPr>
         <p:spPr>
           <a:xfrm>
             <a:off x="786240" y="3090600"/>
-            <a:ext cx="10603440" cy="289080"/>
+            <a:ext cx="10603080" cy="288720"/>
           </a:xfrm>
           <a:prstGeom prst="rect">
             <a:avLst/>
@@ -21598,14 +21918,14 @@
       </p:sp>
       <p:sp>
         <p:nvSpPr>
-          <p:cNvPr id="308" name="Text 14"/>
+          <p:cNvPr id="309" name="Text 14"/>
           <p:cNvSpPr/>
           <p:nvPr/>
         </p:nvSpPr>
         <p:spPr>
           <a:xfrm>
             <a:off x="786240" y="3383280"/>
-            <a:ext cx="10603440" cy="270720"/>
+            <a:ext cx="10603080" cy="270360"/>
           </a:xfrm>
           <a:prstGeom prst="rect">
             <a:avLst/>
@@ -21671,14 +21991,14 @@
       </p:sp>
       <p:sp>
         <p:nvSpPr>
-          <p:cNvPr id="309" name="Shape 15"/>
+          <p:cNvPr id="310" name="Shape 15"/>
           <p:cNvSpPr/>
           <p:nvPr/>
         </p:nvSpPr>
         <p:spPr>
           <a:xfrm>
             <a:off x="457200" y="3822120"/>
-            <a:ext cx="11243520" cy="2392200"/>
+            <a:ext cx="11243160" cy="2391840"/>
           </a:xfrm>
           <a:prstGeom prst="roundRect">
             <a:avLst>
@@ -21726,14 +22046,14 @@
       </p:sp>
       <p:sp>
         <p:nvSpPr>
-          <p:cNvPr id="310" name="Shape 16"/>
+          <p:cNvPr id="311" name="Shape 16"/>
           <p:cNvSpPr/>
           <p:nvPr/>
         </p:nvSpPr>
         <p:spPr>
           <a:xfrm>
             <a:off x="731520" y="4005000"/>
-            <a:ext cx="453600" cy="453600"/>
+            <a:ext cx="453240" cy="453240"/>
           </a:xfrm>
           <a:prstGeom prst="ellipse">
             <a:avLst/>
@@ -21769,7 +22089,7 @@
       </p:sp>
       <p:pic>
         <p:nvPicPr>
-          <p:cNvPr id="311" name="Image 5" descr="preencoded.png"/>
+          <p:cNvPr id="312" name="Image 5" descr="preencoded.png"/>
           <p:cNvPicPr/>
           <p:nvPr/>
         </p:nvPicPr>
@@ -21780,7 +22100,7 @@
         <p:spPr>
           <a:xfrm>
             <a:off x="834480" y="4107960"/>
-            <a:ext cx="248040" cy="248040"/>
+            <a:ext cx="247680" cy="247680"/>
           </a:xfrm>
           <a:prstGeom prst="rect">
             <a:avLst/>
@@ -21793,14 +22113,14 @@
       </p:pic>
       <p:sp>
         <p:nvSpPr>
-          <p:cNvPr id="312" name="Text 17"/>
+          <p:cNvPr id="313" name="Text 17"/>
           <p:cNvSpPr/>
           <p:nvPr/>
         </p:nvSpPr>
         <p:spPr>
           <a:xfrm>
             <a:off x="1353240" y="4005000"/>
-            <a:ext cx="10146240" cy="453600"/>
+            <a:ext cx="10145880" cy="453240"/>
           </a:xfrm>
           <a:prstGeom prst="rect">
             <a:avLst/>
@@ -21854,14 +22174,14 @@
       </p:sp>
       <p:sp>
         <p:nvSpPr>
-          <p:cNvPr id="313" name="Shape 18"/>
+          <p:cNvPr id="314" name="Shape 18"/>
           <p:cNvSpPr/>
           <p:nvPr/>
         </p:nvSpPr>
         <p:spPr>
           <a:xfrm>
             <a:off x="768240" y="4590360"/>
-            <a:ext cx="398880" cy="398880"/>
+            <a:ext cx="398520" cy="398520"/>
           </a:xfrm>
           <a:prstGeom prst="ellipse">
             <a:avLst/>
@@ -21897,7 +22217,7 @@
       </p:sp>
       <p:pic>
         <p:nvPicPr>
-          <p:cNvPr id="314" name="Image 6" descr="preencoded.png"/>
+          <p:cNvPr id="315" name="Image 6" descr="preencoded.png"/>
           <p:cNvPicPr/>
           <p:nvPr/>
         </p:nvPicPr>
@@ -21908,7 +22228,7 @@
         <p:spPr>
           <a:xfrm>
             <a:off x="840600" y="4662720"/>
-            <a:ext cx="253800" cy="253800"/>
+            <a:ext cx="253440" cy="253440"/>
           </a:xfrm>
           <a:prstGeom prst="rect">
             <a:avLst/>
@@ -21921,14 +22241,14 @@
       </p:pic>
       <p:sp>
         <p:nvSpPr>
-          <p:cNvPr id="315" name="Text 19"/>
+          <p:cNvPr id="316" name="Text 19"/>
           <p:cNvSpPr/>
           <p:nvPr/>
         </p:nvSpPr>
         <p:spPr>
           <a:xfrm>
             <a:off x="1280160" y="4590360"/>
-            <a:ext cx="910800" cy="398880"/>
+            <a:ext cx="910440" cy="398520"/>
           </a:xfrm>
           <a:prstGeom prst="rect">
             <a:avLst/>
@@ -21982,14 +22302,14 @@
       </p:sp>
       <p:sp>
         <p:nvSpPr>
-          <p:cNvPr id="316" name="Text 20"/>
+          <p:cNvPr id="317" name="Text 20"/>
           <p:cNvSpPr/>
           <p:nvPr/>
         </p:nvSpPr>
         <p:spPr>
           <a:xfrm>
             <a:off x="2240280" y="4590360"/>
-            <a:ext cx="9231840" cy="398880"/>
+            <a:ext cx="9231480" cy="398520"/>
           </a:xfrm>
           <a:prstGeom prst="rect">
             <a:avLst/>
@@ -22028,19 +22348,7 @@
                 <a:latin typeface="Courier New"/>
                 <a:ea typeface="Courier New"/>
               </a:rPr>
-              <a:t>df %&gt;% filter(expr &gt; </a:t>
-            </a:r>
-            <a:r>
-              <a:rPr lang="en-US" sz="1750" b="1" u="none" strike="noStrike">
-                <a:solidFill>
-                  <a:srgbClr val="13315C"/>
-                </a:solidFill>
-                <a:effectLst/>
-                <a:uFillTx/>
-                <a:latin typeface="Courier New"/>
-                <a:ea typeface="Courier New"/>
-              </a:rPr>
-              <a:t>6)</a:t>
+              <a:t>df %&gt;% filter(expr &gt; 6)</a:t>
             </a:r>
             <a:endParaRPr lang="en-US" sz="1750" b="0" u="none" strike="noStrike">
               <a:solidFill>
@@ -22055,14 +22363,14 @@
       </p:sp>
       <p:sp>
         <p:nvSpPr>
-          <p:cNvPr id="317" name="Shape 21"/>
+          <p:cNvPr id="318" name="Shape 21"/>
           <p:cNvSpPr/>
           <p:nvPr/>
         </p:nvSpPr>
         <p:spPr>
           <a:xfrm>
             <a:off x="768240" y="5120640"/>
-            <a:ext cx="398880" cy="398880"/>
+            <a:ext cx="398520" cy="398520"/>
           </a:xfrm>
           <a:prstGeom prst="ellipse">
             <a:avLst/>
@@ -22098,7 +22406,7 @@
       </p:sp>
       <p:pic>
         <p:nvPicPr>
-          <p:cNvPr id="318" name="Image 7" descr="preencoded.png"/>
+          <p:cNvPr id="319" name="Image 7" descr="preencoded.png"/>
           <p:cNvPicPr/>
           <p:nvPr/>
         </p:nvPicPr>
@@ -22109,7 +22417,7 @@
         <p:spPr>
           <a:xfrm>
             <a:off x="840600" y="5193000"/>
-            <a:ext cx="253800" cy="253800"/>
+            <a:ext cx="253440" cy="253440"/>
           </a:xfrm>
           <a:prstGeom prst="rect">
             <a:avLst/>
@@ -22122,14 +22430,14 @@
       </p:pic>
       <p:sp>
         <p:nvSpPr>
-          <p:cNvPr id="319" name="Text 22"/>
+          <p:cNvPr id="320" name="Text 22"/>
           <p:cNvSpPr/>
           <p:nvPr/>
         </p:nvSpPr>
         <p:spPr>
           <a:xfrm>
             <a:off x="1280160" y="5120640"/>
-            <a:ext cx="910800" cy="398880"/>
+            <a:ext cx="910440" cy="398520"/>
           </a:xfrm>
           <a:prstGeom prst="rect">
             <a:avLst/>
@@ -22183,14 +22491,14 @@
       </p:sp>
       <p:sp>
         <p:nvSpPr>
-          <p:cNvPr id="320" name="Text 23"/>
+          <p:cNvPr id="321" name="Text 23"/>
           <p:cNvSpPr/>
           <p:nvPr/>
         </p:nvSpPr>
         <p:spPr>
           <a:xfrm>
             <a:off x="2240280" y="5120640"/>
-            <a:ext cx="9231840" cy="398880"/>
+            <a:ext cx="9231480" cy="398520"/>
           </a:xfrm>
           <a:prstGeom prst="rect">
             <a:avLst/>
@@ -22244,14 +22552,14 @@
       </p:sp>
       <p:sp>
         <p:nvSpPr>
-          <p:cNvPr id="321" name="Text 24"/>
+          <p:cNvPr id="322" name="Text 24"/>
           <p:cNvSpPr/>
           <p:nvPr/>
         </p:nvSpPr>
         <p:spPr>
           <a:xfrm>
             <a:off x="786240" y="5632560"/>
-            <a:ext cx="10603440" cy="289080"/>
+            <a:ext cx="10603080" cy="288720"/>
           </a:xfrm>
           <a:prstGeom prst="rect">
             <a:avLst/>
@@ -22305,14 +22613,14 @@
       </p:sp>
       <p:sp>
         <p:nvSpPr>
-          <p:cNvPr id="322" name="Text 25"/>
+          <p:cNvPr id="323" name="Text 25"/>
           <p:cNvSpPr/>
           <p:nvPr/>
         </p:nvSpPr>
         <p:spPr>
           <a:xfrm>
             <a:off x="786240" y="5925240"/>
-            <a:ext cx="10603440" cy="270720"/>
+            <a:ext cx="10603080" cy="270360"/>
           </a:xfrm>
           <a:prstGeom prst="rect">
             <a:avLst/>
@@ -22378,14 +22686,14 @@
       </p:sp>
       <p:sp>
         <p:nvSpPr>
-          <p:cNvPr id="323" name="Text 26"/>
+          <p:cNvPr id="324" name="Text 26"/>
           <p:cNvSpPr/>
           <p:nvPr/>
         </p:nvSpPr>
         <p:spPr>
           <a:xfrm>
             <a:off x="10881360" y="6537960"/>
-            <a:ext cx="819360" cy="225000"/>
+            <a:ext cx="819000" cy="224640"/>
           </a:xfrm>
           <a:prstGeom prst="rect">
             <a:avLst/>
@@ -22476,14 +22784,14 @@
       </p:grpSpPr>
       <p:sp>
         <p:nvSpPr>
-          <p:cNvPr id="324" name="Text 0"/>
+          <p:cNvPr id="325" name="Text 0"/>
           <p:cNvSpPr/>
           <p:nvPr/>
         </p:nvSpPr>
         <p:spPr>
           <a:xfrm>
             <a:off x="457200" y="274320"/>
-            <a:ext cx="10329120" cy="499320"/>
+            <a:ext cx="10328760" cy="498960"/>
           </a:xfrm>
           <a:prstGeom prst="rect">
             <a:avLst/>
@@ -22537,14 +22845,14 @@
       </p:sp>
       <p:sp>
         <p:nvSpPr>
-          <p:cNvPr id="325" name="Text 1"/>
+          <p:cNvPr id="326" name="Text 1"/>
           <p:cNvSpPr/>
           <p:nvPr/>
         </p:nvSpPr>
         <p:spPr>
           <a:xfrm>
             <a:off x="457200" y="822960"/>
-            <a:ext cx="10420560" cy="307440"/>
+            <a:ext cx="10420200" cy="307080"/>
           </a:xfrm>
           <a:prstGeom prst="rect">
             <a:avLst/>
@@ -22598,14 +22906,14 @@
       </p:sp>
       <p:sp>
         <p:nvSpPr>
-          <p:cNvPr id="326" name="Shape 2"/>
+          <p:cNvPr id="327" name="Shape 2"/>
           <p:cNvSpPr/>
           <p:nvPr/>
         </p:nvSpPr>
         <p:spPr>
           <a:xfrm>
             <a:off x="11036880" y="311040"/>
-            <a:ext cx="380520" cy="380520"/>
+            <a:ext cx="380160" cy="380160"/>
           </a:xfrm>
           <a:prstGeom prst="ellipse">
             <a:avLst/>
@@ -22641,7 +22949,7 @@
       </p:sp>
       <p:pic>
         <p:nvPicPr>
-          <p:cNvPr id="327" name="Image 0" descr="preencoded.png"/>
+          <p:cNvPr id="328" name="Image 0" descr="preencoded.png"/>
           <p:cNvPicPr/>
           <p:nvPr/>
         </p:nvPicPr>
@@ -22652,7 +22960,7 @@
         <p:spPr>
           <a:xfrm>
             <a:off x="11106000" y="380160"/>
-            <a:ext cx="242280" cy="242280"/>
+            <a:ext cx="241920" cy="241920"/>
           </a:xfrm>
           <a:prstGeom prst="rect">
             <a:avLst/>
@@ -22665,14 +22973,14 @@
       </p:pic>
       <p:sp>
         <p:nvSpPr>
-          <p:cNvPr id="328" name="Shape 3"/>
+          <p:cNvPr id="329" name="Shape 3"/>
           <p:cNvSpPr/>
           <p:nvPr/>
         </p:nvSpPr>
         <p:spPr>
           <a:xfrm>
             <a:off x="11494080" y="311040"/>
-            <a:ext cx="380520" cy="380520"/>
+            <a:ext cx="380160" cy="380160"/>
           </a:xfrm>
           <a:prstGeom prst="ellipse">
             <a:avLst/>
@@ -22708,7 +23016,7 @@
       </p:sp>
       <p:pic>
         <p:nvPicPr>
-          <p:cNvPr id="329" name="Image 1" descr="preencoded.png"/>
+          <p:cNvPr id="330" name="Image 1" descr="preencoded.png"/>
           <p:cNvPicPr/>
           <p:nvPr/>
         </p:nvPicPr>
@@ -22719,7 +23027,7 @@
         <p:spPr>
           <a:xfrm>
             <a:off x="11563200" y="380160"/>
-            <a:ext cx="242280" cy="242280"/>
+            <a:ext cx="241920" cy="241920"/>
           </a:xfrm>
           <a:prstGeom prst="rect">
             <a:avLst/>
@@ -22732,14 +23040,14 @@
       </p:pic>
       <p:sp>
         <p:nvSpPr>
-          <p:cNvPr id="330" name="Shape 4"/>
+          <p:cNvPr id="331" name="Shape 4"/>
           <p:cNvSpPr/>
           <p:nvPr/>
         </p:nvSpPr>
         <p:spPr>
           <a:xfrm>
             <a:off x="457200" y="1280160"/>
-            <a:ext cx="11243520" cy="2392200"/>
+            <a:ext cx="11243160" cy="2391840"/>
           </a:xfrm>
           <a:prstGeom prst="roundRect">
             <a:avLst>
@@ -22787,14 +23095,14 @@
       </p:sp>
       <p:sp>
         <p:nvSpPr>
-          <p:cNvPr id="331" name="Shape 5"/>
+          <p:cNvPr id="332" name="Shape 5"/>
           <p:cNvSpPr/>
           <p:nvPr/>
         </p:nvSpPr>
         <p:spPr>
           <a:xfrm>
             <a:off x="731520" y="1463040"/>
-            <a:ext cx="453600" cy="453600"/>
+            <a:ext cx="453240" cy="453240"/>
           </a:xfrm>
           <a:prstGeom prst="ellipse">
             <a:avLst/>
@@ -22830,7 +23138,7 @@
       </p:sp>
       <p:pic>
         <p:nvPicPr>
-          <p:cNvPr id="332" name="Image 2" descr="preencoded.png"/>
+          <p:cNvPr id="333" name="Image 2" descr="preencoded.png"/>
           <p:cNvPicPr/>
           <p:nvPr/>
         </p:nvPicPr>
@@ -22841,7 +23149,7 @@
         <p:spPr>
           <a:xfrm>
             <a:off x="834480" y="1566000"/>
-            <a:ext cx="248040" cy="248040"/>
+            <a:ext cx="247680" cy="247680"/>
           </a:xfrm>
           <a:prstGeom prst="rect">
             <a:avLst/>
@@ -22854,14 +23162,14 @@
       </p:pic>
       <p:sp>
         <p:nvSpPr>
-          <p:cNvPr id="333" name="Text 6"/>
+          <p:cNvPr id="334" name="Text 6"/>
           <p:cNvSpPr/>
           <p:nvPr/>
         </p:nvSpPr>
         <p:spPr>
           <a:xfrm>
             <a:off x="1353240" y="1463040"/>
-            <a:ext cx="10146240" cy="453600"/>
+            <a:ext cx="10145880" cy="453240"/>
           </a:xfrm>
           <a:prstGeom prst="rect">
             <a:avLst/>
@@ -22915,14 +23223,14 @@
       </p:sp>
       <p:sp>
         <p:nvSpPr>
-          <p:cNvPr id="334" name="Shape 7"/>
+          <p:cNvPr id="335" name="Shape 7"/>
           <p:cNvSpPr/>
           <p:nvPr/>
         </p:nvSpPr>
         <p:spPr>
           <a:xfrm>
             <a:off x="768240" y="2048400"/>
-            <a:ext cx="398880" cy="398880"/>
+            <a:ext cx="398520" cy="398520"/>
           </a:xfrm>
           <a:prstGeom prst="ellipse">
             <a:avLst/>
@@ -22958,7 +23266,7 @@
       </p:sp>
       <p:pic>
         <p:nvPicPr>
-          <p:cNvPr id="335" name="Image 3" descr="preencoded.png"/>
+          <p:cNvPr id="336" name="Image 3" descr="preencoded.png"/>
           <p:cNvPicPr/>
           <p:nvPr/>
         </p:nvPicPr>
@@ -22969,7 +23277,7 @@
         <p:spPr>
           <a:xfrm>
             <a:off x="840600" y="2120760"/>
-            <a:ext cx="253800" cy="253800"/>
+            <a:ext cx="253440" cy="253440"/>
           </a:xfrm>
           <a:prstGeom prst="rect">
             <a:avLst/>
@@ -22982,14 +23290,14 @@
       </p:pic>
       <p:sp>
         <p:nvSpPr>
-          <p:cNvPr id="336" name="Text 8"/>
+          <p:cNvPr id="337" name="Text 8"/>
           <p:cNvSpPr/>
           <p:nvPr/>
         </p:nvSpPr>
         <p:spPr>
           <a:xfrm>
             <a:off x="1280160" y="2048400"/>
-            <a:ext cx="910800" cy="398880"/>
+            <a:ext cx="910440" cy="398520"/>
           </a:xfrm>
           <a:prstGeom prst="rect">
             <a:avLst/>
@@ -23043,14 +23351,14 @@
       </p:sp>
       <p:sp>
         <p:nvSpPr>
-          <p:cNvPr id="337" name="Text 9"/>
+          <p:cNvPr id="338" name="Text 9"/>
           <p:cNvSpPr/>
           <p:nvPr/>
         </p:nvSpPr>
         <p:spPr>
           <a:xfrm>
             <a:off x="2240280" y="2048400"/>
-            <a:ext cx="9231840" cy="398880"/>
+            <a:ext cx="9231480" cy="398520"/>
           </a:xfrm>
           <a:prstGeom prst="rect">
             <a:avLst/>
@@ -23104,14 +23412,14 @@
       </p:sp>
       <p:sp>
         <p:nvSpPr>
-          <p:cNvPr id="338" name="Shape 10"/>
+          <p:cNvPr id="339" name="Shape 10"/>
           <p:cNvSpPr/>
           <p:nvPr/>
         </p:nvSpPr>
         <p:spPr>
           <a:xfrm>
             <a:off x="768240" y="2578680"/>
-            <a:ext cx="398880" cy="398880"/>
+            <a:ext cx="398520" cy="398520"/>
           </a:xfrm>
           <a:prstGeom prst="ellipse">
             <a:avLst/>
@@ -23147,7 +23455,7 @@
       </p:sp>
       <p:pic>
         <p:nvPicPr>
-          <p:cNvPr id="339" name="Image 4" descr="preencoded.png"/>
+          <p:cNvPr id="340" name="Image 4" descr="preencoded.png"/>
           <p:cNvPicPr/>
           <p:nvPr/>
         </p:nvPicPr>
@@ -23158,7 +23466,7 @@
         <p:spPr>
           <a:xfrm>
             <a:off x="840600" y="2651040"/>
-            <a:ext cx="253800" cy="253800"/>
+            <a:ext cx="253440" cy="253440"/>
           </a:xfrm>
           <a:prstGeom prst="rect">
             <a:avLst/>
@@ -23171,14 +23479,14 @@
       </p:pic>
       <p:sp>
         <p:nvSpPr>
-          <p:cNvPr id="340" name="Text 11"/>
+          <p:cNvPr id="341" name="Text 11"/>
           <p:cNvSpPr/>
           <p:nvPr/>
         </p:nvSpPr>
         <p:spPr>
           <a:xfrm>
             <a:off x="1280160" y="2578680"/>
-            <a:ext cx="910800" cy="398880"/>
+            <a:ext cx="910440" cy="398520"/>
           </a:xfrm>
           <a:prstGeom prst="rect">
             <a:avLst/>
@@ -23232,14 +23540,14 @@
       </p:sp>
       <p:sp>
         <p:nvSpPr>
-          <p:cNvPr id="341" name="Text 12"/>
+          <p:cNvPr id="342" name="Text 12"/>
           <p:cNvSpPr/>
           <p:nvPr/>
         </p:nvSpPr>
         <p:spPr>
           <a:xfrm>
             <a:off x="2240280" y="2578680"/>
-            <a:ext cx="9231840" cy="398880"/>
+            <a:ext cx="9231480" cy="398520"/>
           </a:xfrm>
           <a:prstGeom prst="rect">
             <a:avLst/>
@@ -23293,14 +23601,14 @@
       </p:sp>
       <p:sp>
         <p:nvSpPr>
-          <p:cNvPr id="342" name="Text 13"/>
+          <p:cNvPr id="343" name="Text 13"/>
           <p:cNvSpPr/>
           <p:nvPr/>
         </p:nvSpPr>
         <p:spPr>
           <a:xfrm>
             <a:off x="786240" y="3090600"/>
-            <a:ext cx="10603440" cy="289080"/>
+            <a:ext cx="10603080" cy="288720"/>
           </a:xfrm>
           <a:prstGeom prst="rect">
             <a:avLst/>
@@ -23354,14 +23662,14 @@
       </p:sp>
       <p:sp>
         <p:nvSpPr>
-          <p:cNvPr id="343" name="Text 14"/>
+          <p:cNvPr id="344" name="Text 14"/>
           <p:cNvSpPr/>
           <p:nvPr/>
         </p:nvSpPr>
         <p:spPr>
           <a:xfrm>
             <a:off x="786240" y="3383280"/>
-            <a:ext cx="10603440" cy="270720"/>
+            <a:ext cx="10603080" cy="270360"/>
           </a:xfrm>
           <a:prstGeom prst="rect">
             <a:avLst/>
@@ -23427,14 +23735,14 @@
       </p:sp>
       <p:sp>
         <p:nvSpPr>
-          <p:cNvPr id="344" name="Shape 15"/>
+          <p:cNvPr id="345" name="Shape 15"/>
           <p:cNvSpPr/>
           <p:nvPr/>
         </p:nvSpPr>
         <p:spPr>
           <a:xfrm>
             <a:off x="457200" y="3822120"/>
-            <a:ext cx="11243520" cy="2392200"/>
+            <a:ext cx="11243160" cy="2391840"/>
           </a:xfrm>
           <a:prstGeom prst="roundRect">
             <a:avLst>
@@ -23482,14 +23790,14 @@
       </p:sp>
       <p:sp>
         <p:nvSpPr>
-          <p:cNvPr id="345" name="Shape 16"/>
+          <p:cNvPr id="346" name="Shape 16"/>
           <p:cNvSpPr/>
           <p:nvPr/>
         </p:nvSpPr>
         <p:spPr>
           <a:xfrm>
             <a:off x="731520" y="4005000"/>
-            <a:ext cx="453600" cy="453600"/>
+            <a:ext cx="453240" cy="453240"/>
           </a:xfrm>
           <a:prstGeom prst="ellipse">
             <a:avLst/>
@@ -23525,7 +23833,7 @@
       </p:sp>
       <p:pic>
         <p:nvPicPr>
-          <p:cNvPr id="346" name="Image 5" descr="preencoded.png"/>
+          <p:cNvPr id="347" name="Image 5" descr="preencoded.png"/>
           <p:cNvPicPr/>
           <p:nvPr/>
         </p:nvPicPr>
@@ -23536,7 +23844,7 @@
         <p:spPr>
           <a:xfrm>
             <a:off x="834480" y="4107960"/>
-            <a:ext cx="248040" cy="248040"/>
+            <a:ext cx="247680" cy="247680"/>
           </a:xfrm>
           <a:prstGeom prst="rect">
             <a:avLst/>
@@ -23549,14 +23857,14 @@
       </p:pic>
       <p:sp>
         <p:nvSpPr>
-          <p:cNvPr id="347" name="Text 17"/>
+          <p:cNvPr id="348" name="Text 17"/>
           <p:cNvSpPr/>
           <p:nvPr/>
         </p:nvSpPr>
         <p:spPr>
           <a:xfrm>
             <a:off x="1353240" y="4005000"/>
-            <a:ext cx="10146240" cy="453600"/>
+            <a:ext cx="10145880" cy="453240"/>
           </a:xfrm>
           <a:prstGeom prst="rect">
             <a:avLst/>
@@ -23610,14 +23918,14 @@
       </p:sp>
       <p:sp>
         <p:nvSpPr>
-          <p:cNvPr id="348" name="Shape 18"/>
+          <p:cNvPr id="349" name="Shape 18"/>
           <p:cNvSpPr/>
           <p:nvPr/>
         </p:nvSpPr>
         <p:spPr>
           <a:xfrm>
             <a:off x="768240" y="4590360"/>
-            <a:ext cx="398880" cy="398880"/>
+            <a:ext cx="398520" cy="398520"/>
           </a:xfrm>
           <a:prstGeom prst="ellipse">
             <a:avLst/>
@@ -23653,7 +23961,7 @@
       </p:sp>
       <p:pic>
         <p:nvPicPr>
-          <p:cNvPr id="349" name="Image 6" descr="preencoded.png"/>
+          <p:cNvPr id="350" name="Image 6" descr="preencoded.png"/>
           <p:cNvPicPr/>
           <p:nvPr/>
         </p:nvPicPr>
@@ -23664,7 +23972,7 @@
         <p:spPr>
           <a:xfrm>
             <a:off x="840600" y="4662720"/>
-            <a:ext cx="253800" cy="253800"/>
+            <a:ext cx="253440" cy="253440"/>
           </a:xfrm>
           <a:prstGeom prst="rect">
             <a:avLst/>
@@ -23677,14 +23985,14 @@
       </p:pic>
       <p:sp>
         <p:nvSpPr>
-          <p:cNvPr id="350" name="Text 19"/>
+          <p:cNvPr id="351" name="Text 19"/>
           <p:cNvSpPr/>
           <p:nvPr/>
         </p:nvSpPr>
         <p:spPr>
           <a:xfrm>
             <a:off x="1280160" y="4590360"/>
-            <a:ext cx="910800" cy="398880"/>
+            <a:ext cx="910440" cy="398520"/>
           </a:xfrm>
           <a:prstGeom prst="rect">
             <a:avLst/>
@@ -23738,14 +24046,14 @@
       </p:sp>
       <p:sp>
         <p:nvSpPr>
-          <p:cNvPr id="351" name="Text 20"/>
+          <p:cNvPr id="352" name="Text 20"/>
           <p:cNvSpPr/>
           <p:nvPr/>
         </p:nvSpPr>
         <p:spPr>
           <a:xfrm>
             <a:off x="2240280" y="4590360"/>
-            <a:ext cx="9231840" cy="398880"/>
+            <a:ext cx="9231480" cy="398520"/>
           </a:xfrm>
           <a:prstGeom prst="rect">
             <a:avLst/>
@@ -23799,14 +24107,14 @@
       </p:sp>
       <p:sp>
         <p:nvSpPr>
-          <p:cNvPr id="352" name="Shape 21"/>
+          <p:cNvPr id="353" name="Shape 21"/>
           <p:cNvSpPr/>
           <p:nvPr/>
         </p:nvSpPr>
         <p:spPr>
           <a:xfrm>
             <a:off x="768240" y="5120640"/>
-            <a:ext cx="398880" cy="398880"/>
+            <a:ext cx="398520" cy="398520"/>
           </a:xfrm>
           <a:prstGeom prst="ellipse">
             <a:avLst/>
@@ -23842,7 +24150,7 @@
       </p:sp>
       <p:pic>
         <p:nvPicPr>
-          <p:cNvPr id="353" name="Image 7" descr="preencoded.png"/>
+          <p:cNvPr id="354" name="Image 7" descr="preencoded.png"/>
           <p:cNvPicPr/>
           <p:nvPr/>
         </p:nvPicPr>
@@ -23853,7 +24161,7 @@
         <p:spPr>
           <a:xfrm>
             <a:off x="840600" y="5193000"/>
-            <a:ext cx="253800" cy="253800"/>
+            <a:ext cx="253440" cy="253440"/>
           </a:xfrm>
           <a:prstGeom prst="rect">
             <a:avLst/>
@@ -23866,14 +24174,14 @@
       </p:pic>
       <p:sp>
         <p:nvSpPr>
-          <p:cNvPr id="354" name="Text 22"/>
+          <p:cNvPr id="355" name="Text 22"/>
           <p:cNvSpPr/>
           <p:nvPr/>
         </p:nvSpPr>
         <p:spPr>
           <a:xfrm>
             <a:off x="1280160" y="5120640"/>
-            <a:ext cx="910800" cy="398880"/>
+            <a:ext cx="910440" cy="398520"/>
           </a:xfrm>
           <a:prstGeom prst="rect">
             <a:avLst/>
@@ -23927,14 +24235,14 @@
       </p:sp>
       <p:sp>
         <p:nvSpPr>
-          <p:cNvPr id="355" name="Text 23"/>
+          <p:cNvPr id="356" name="Text 23"/>
           <p:cNvSpPr/>
           <p:nvPr/>
         </p:nvSpPr>
         <p:spPr>
           <a:xfrm>
             <a:off x="2240280" y="5120640"/>
-            <a:ext cx="9231840" cy="398880"/>
+            <a:ext cx="9231480" cy="398520"/>
           </a:xfrm>
           <a:prstGeom prst="rect">
             <a:avLst/>
@@ -23988,14 +24296,14 @@
       </p:sp>
       <p:sp>
         <p:nvSpPr>
-          <p:cNvPr id="356" name="Text 24"/>
+          <p:cNvPr id="357" name="Text 24"/>
           <p:cNvSpPr/>
           <p:nvPr/>
         </p:nvSpPr>
         <p:spPr>
           <a:xfrm>
             <a:off x="786240" y="5632560"/>
-            <a:ext cx="10603440" cy="289080"/>
+            <a:ext cx="10603080" cy="288720"/>
           </a:xfrm>
           <a:prstGeom prst="rect">
             <a:avLst/>
@@ -24049,14 +24357,14 @@
       </p:sp>
       <p:sp>
         <p:nvSpPr>
-          <p:cNvPr id="357" name="Text 25"/>
+          <p:cNvPr id="358" name="Text 25"/>
           <p:cNvSpPr/>
           <p:nvPr/>
         </p:nvSpPr>
         <p:spPr>
           <a:xfrm>
             <a:off x="786240" y="5925240"/>
-            <a:ext cx="10603440" cy="270720"/>
+            <a:ext cx="10603080" cy="270360"/>
           </a:xfrm>
           <a:prstGeom prst="rect">
             <a:avLst/>
@@ -24122,14 +24430,14 @@
       </p:sp>
       <p:sp>
         <p:nvSpPr>
-          <p:cNvPr id="358" name="Text 26"/>
+          <p:cNvPr id="359" name="Text 26"/>
           <p:cNvSpPr/>
           <p:nvPr/>
         </p:nvSpPr>
         <p:spPr>
           <a:xfrm>
             <a:off x="10881360" y="6537960"/>
-            <a:ext cx="819360" cy="225000"/>
+            <a:ext cx="819000" cy="224640"/>
           </a:xfrm>
           <a:prstGeom prst="rect">
             <a:avLst/>
@@ -24220,14 +24528,14 @@
       </p:grpSpPr>
       <p:sp>
         <p:nvSpPr>
-          <p:cNvPr id="359" name="Text 0"/>
+          <p:cNvPr id="360" name="Text 0"/>
           <p:cNvSpPr/>
           <p:nvPr/>
         </p:nvSpPr>
         <p:spPr>
           <a:xfrm>
             <a:off x="457200" y="274320"/>
-            <a:ext cx="10329120" cy="499320"/>
+            <a:ext cx="10328760" cy="498960"/>
           </a:xfrm>
           <a:prstGeom prst="rect">
             <a:avLst/>
@@ -24281,14 +24589,14 @@
       </p:sp>
       <p:sp>
         <p:nvSpPr>
-          <p:cNvPr id="360" name="Text 1"/>
+          <p:cNvPr id="361" name="Text 1"/>
           <p:cNvSpPr/>
           <p:nvPr/>
         </p:nvSpPr>
         <p:spPr>
           <a:xfrm>
             <a:off x="457200" y="822960"/>
-            <a:ext cx="10420560" cy="307440"/>
+            <a:ext cx="10420200" cy="307080"/>
           </a:xfrm>
           <a:prstGeom prst="rect">
             <a:avLst/>
@@ -24342,14 +24650,14 @@
       </p:sp>
       <p:sp>
         <p:nvSpPr>
-          <p:cNvPr id="361" name="Shape 2"/>
+          <p:cNvPr id="362" name="Shape 2"/>
           <p:cNvSpPr/>
           <p:nvPr/>
         </p:nvSpPr>
         <p:spPr>
           <a:xfrm>
             <a:off x="11036880" y="311040"/>
-            <a:ext cx="380520" cy="380520"/>
+            <a:ext cx="380160" cy="380160"/>
           </a:xfrm>
           <a:prstGeom prst="ellipse">
             <a:avLst/>
@@ -24385,7 +24693,7 @@
       </p:sp>
       <p:pic>
         <p:nvPicPr>
-          <p:cNvPr id="362" name="Image 0" descr="preencoded.png"/>
+          <p:cNvPr id="363" name="Image 0" descr="preencoded.png"/>
           <p:cNvPicPr/>
           <p:nvPr/>
         </p:nvPicPr>
@@ -24396,7 +24704,7 @@
         <p:spPr>
           <a:xfrm>
             <a:off x="11106000" y="380160"/>
-            <a:ext cx="242280" cy="242280"/>
+            <a:ext cx="241920" cy="241920"/>
           </a:xfrm>
           <a:prstGeom prst="rect">
             <a:avLst/>
@@ -24409,14 +24717,14 @@
       </p:pic>
       <p:sp>
         <p:nvSpPr>
-          <p:cNvPr id="363" name="Shape 3"/>
+          <p:cNvPr id="364" name="Shape 3"/>
           <p:cNvSpPr/>
           <p:nvPr/>
         </p:nvSpPr>
         <p:spPr>
           <a:xfrm>
             <a:off x="11494080" y="311040"/>
-            <a:ext cx="380520" cy="380520"/>
+            <a:ext cx="380160" cy="380160"/>
           </a:xfrm>
           <a:prstGeom prst="ellipse">
             <a:avLst/>
@@ -24452,7 +24760,7 @@
       </p:sp>
       <p:pic>
         <p:nvPicPr>
-          <p:cNvPr id="364" name="Image 1" descr="preencoded.png"/>
+          <p:cNvPr id="365" name="Image 1" descr="preencoded.png"/>
           <p:cNvPicPr/>
           <p:nvPr/>
         </p:nvPicPr>
@@ -24463,7 +24771,7 @@
         <p:spPr>
           <a:xfrm>
             <a:off x="11563200" y="380160"/>
-            <a:ext cx="242280" cy="242280"/>
+            <a:ext cx="241920" cy="241920"/>
           </a:xfrm>
           <a:prstGeom prst="rect">
             <a:avLst/>
@@ -24476,14 +24784,14 @@
       </p:pic>
       <p:sp>
         <p:nvSpPr>
-          <p:cNvPr id="365" name="Shape 4"/>
+          <p:cNvPr id="366" name="Shape 4"/>
           <p:cNvSpPr/>
           <p:nvPr/>
         </p:nvSpPr>
         <p:spPr>
           <a:xfrm>
             <a:off x="10104120" y="841320"/>
-            <a:ext cx="910800" cy="307440"/>
+            <a:ext cx="910440" cy="307080"/>
           </a:xfrm>
           <a:prstGeom prst="roundRect">
             <a:avLst>
@@ -24521,14 +24829,14 @@
       </p:sp>
       <p:sp>
         <p:nvSpPr>
-          <p:cNvPr id="366" name="Text 5"/>
+          <p:cNvPr id="367" name="Text 5"/>
           <p:cNvSpPr/>
           <p:nvPr/>
         </p:nvSpPr>
         <p:spPr>
           <a:xfrm>
             <a:off x="10104120" y="841320"/>
-            <a:ext cx="910800" cy="307440"/>
+            <a:ext cx="910440" cy="307080"/>
           </a:xfrm>
           <a:prstGeom prst="rect">
             <a:avLst/>
@@ -24582,14 +24890,14 @@
       </p:sp>
       <p:sp>
         <p:nvSpPr>
-          <p:cNvPr id="367" name="Shape 6"/>
+          <p:cNvPr id="368" name="Shape 6"/>
           <p:cNvSpPr/>
           <p:nvPr/>
         </p:nvSpPr>
         <p:spPr>
           <a:xfrm>
             <a:off x="457200" y="1298520"/>
-            <a:ext cx="11243520" cy="1217160"/>
+            <a:ext cx="11243160" cy="1216800"/>
           </a:xfrm>
           <a:prstGeom prst="roundRect">
             <a:avLst>
@@ -24637,14 +24945,14 @@
       </p:sp>
       <p:sp>
         <p:nvSpPr>
-          <p:cNvPr id="368" name="Shape 7"/>
+          <p:cNvPr id="369" name="Shape 7"/>
           <p:cNvSpPr/>
           <p:nvPr/>
         </p:nvSpPr>
         <p:spPr>
           <a:xfrm>
             <a:off x="731520" y="1698480"/>
-            <a:ext cx="416880" cy="416880"/>
+            <a:ext cx="416520" cy="416520"/>
           </a:xfrm>
           <a:prstGeom prst="ellipse">
             <a:avLst/>
@@ -24680,7 +24988,7 @@
       </p:sp>
       <p:pic>
         <p:nvPicPr>
-          <p:cNvPr id="369" name="Image 2" descr="preencoded.png"/>
+          <p:cNvPr id="370" name="Image 2" descr="preencoded.png"/>
           <p:cNvPicPr/>
           <p:nvPr/>
         </p:nvPicPr>
@@ -24691,7 +24999,7 @@
         <p:spPr>
           <a:xfrm>
             <a:off x="807120" y="1774080"/>
-            <a:ext cx="265680" cy="265680"/>
+            <a:ext cx="265320" cy="265320"/>
           </a:xfrm>
           <a:prstGeom prst="rect">
             <a:avLst/>
@@ -24704,14 +25012,14 @@
       </p:pic>
       <p:sp>
         <p:nvSpPr>
-          <p:cNvPr id="370" name="Text 8"/>
+          <p:cNvPr id="371" name="Text 8"/>
           <p:cNvSpPr/>
           <p:nvPr/>
         </p:nvSpPr>
         <p:spPr>
           <a:xfrm>
             <a:off x="1325880" y="1417320"/>
-            <a:ext cx="10146240" cy="307440"/>
+            <a:ext cx="10145880" cy="307080"/>
           </a:xfrm>
           <a:prstGeom prst="rect">
             <a:avLst/>
@@ -24765,14 +25073,14 @@
       </p:sp>
       <p:sp>
         <p:nvSpPr>
-          <p:cNvPr id="371" name="Text 9"/>
+          <p:cNvPr id="372" name="Text 9"/>
           <p:cNvSpPr/>
           <p:nvPr/>
         </p:nvSpPr>
         <p:spPr>
           <a:xfrm>
             <a:off x="1325880" y="1755720"/>
-            <a:ext cx="10146240" cy="380520"/>
+            <a:ext cx="10145880" cy="380160"/>
           </a:xfrm>
           <a:prstGeom prst="rect">
             <a:avLst/>
@@ -24826,14 +25134,14 @@
       </p:sp>
       <p:sp>
         <p:nvSpPr>
-          <p:cNvPr id="372" name="Text 10"/>
+          <p:cNvPr id="373" name="Text 10"/>
           <p:cNvSpPr/>
           <p:nvPr/>
         </p:nvSpPr>
         <p:spPr>
           <a:xfrm>
             <a:off x="1325880" y="2167200"/>
-            <a:ext cx="10146240" cy="270720"/>
+            <a:ext cx="10145880" cy="270360"/>
           </a:xfrm>
           <a:prstGeom prst="rect">
             <a:avLst/>
@@ -24887,14 +25195,14 @@
       </p:sp>
       <p:sp>
         <p:nvSpPr>
-          <p:cNvPr id="373" name="Shape 11"/>
+          <p:cNvPr id="374" name="Shape 11"/>
           <p:cNvSpPr/>
           <p:nvPr/>
         </p:nvSpPr>
         <p:spPr>
           <a:xfrm>
             <a:off x="457200" y="2629080"/>
-            <a:ext cx="11243520" cy="1217160"/>
+            <a:ext cx="11243160" cy="1216800"/>
           </a:xfrm>
           <a:prstGeom prst="roundRect">
             <a:avLst>
@@ -24942,14 +25250,14 @@
       </p:sp>
       <p:sp>
         <p:nvSpPr>
-          <p:cNvPr id="374" name="Shape 12"/>
+          <p:cNvPr id="375" name="Shape 12"/>
           <p:cNvSpPr/>
           <p:nvPr/>
         </p:nvSpPr>
         <p:spPr>
           <a:xfrm>
             <a:off x="731520" y="3029040"/>
-            <a:ext cx="416880" cy="416880"/>
+            <a:ext cx="416520" cy="416520"/>
           </a:xfrm>
           <a:prstGeom prst="ellipse">
             <a:avLst/>
@@ -24985,7 +25293,7 @@
       </p:sp>
       <p:pic>
         <p:nvPicPr>
-          <p:cNvPr id="375" name="Image 3" descr="preencoded.png"/>
+          <p:cNvPr id="376" name="Image 3" descr="preencoded.png"/>
           <p:cNvPicPr/>
           <p:nvPr/>
         </p:nvPicPr>
@@ -24996,7 +25304,7 @@
         <p:spPr>
           <a:xfrm>
             <a:off x="807120" y="3104640"/>
-            <a:ext cx="265680" cy="265680"/>
+            <a:ext cx="265320" cy="265320"/>
           </a:xfrm>
           <a:prstGeom prst="rect">
             <a:avLst/>
@@ -25009,14 +25317,14 @@
       </p:pic>
       <p:sp>
         <p:nvSpPr>
-          <p:cNvPr id="376" name="Text 13"/>
+          <p:cNvPr id="377" name="Text 13"/>
           <p:cNvSpPr/>
           <p:nvPr/>
         </p:nvSpPr>
         <p:spPr>
           <a:xfrm>
             <a:off x="1325880" y="2747880"/>
-            <a:ext cx="10146240" cy="307440"/>
+            <a:ext cx="10145880" cy="307080"/>
           </a:xfrm>
           <a:prstGeom prst="rect">
             <a:avLst/>
@@ -25070,14 +25378,14 @@
       </p:sp>
       <p:sp>
         <p:nvSpPr>
-          <p:cNvPr id="377" name="Text 14"/>
+          <p:cNvPr id="378" name="Text 14"/>
           <p:cNvSpPr/>
           <p:nvPr/>
         </p:nvSpPr>
         <p:spPr>
           <a:xfrm>
             <a:off x="1325880" y="3086280"/>
-            <a:ext cx="10146240" cy="380520"/>
+            <a:ext cx="10145880" cy="380160"/>
           </a:xfrm>
           <a:prstGeom prst="rect">
             <a:avLst/>
@@ -25131,14 +25439,14 @@
       </p:sp>
       <p:sp>
         <p:nvSpPr>
-          <p:cNvPr id="378" name="Text 15"/>
+          <p:cNvPr id="379" name="Text 15"/>
           <p:cNvSpPr/>
           <p:nvPr/>
         </p:nvSpPr>
         <p:spPr>
           <a:xfrm>
             <a:off x="1325880" y="3497760"/>
-            <a:ext cx="10146240" cy="270720"/>
+            <a:ext cx="10145880" cy="270360"/>
           </a:xfrm>
           <a:prstGeom prst="rect">
             <a:avLst/>
@@ -25192,14 +25500,14 @@
       </p:sp>
       <p:sp>
         <p:nvSpPr>
-          <p:cNvPr id="379" name="Shape 16"/>
+          <p:cNvPr id="380" name="Shape 16"/>
           <p:cNvSpPr/>
           <p:nvPr/>
         </p:nvSpPr>
         <p:spPr>
           <a:xfrm>
             <a:off x="457200" y="3959280"/>
-            <a:ext cx="11243520" cy="1217160"/>
+            <a:ext cx="11243160" cy="1216800"/>
           </a:xfrm>
           <a:prstGeom prst="roundRect">
             <a:avLst>
@@ -25247,14 +25555,14 @@
       </p:sp>
       <p:sp>
         <p:nvSpPr>
-          <p:cNvPr id="380" name="Shape 17"/>
+          <p:cNvPr id="381" name="Shape 17"/>
           <p:cNvSpPr/>
           <p:nvPr/>
         </p:nvSpPr>
         <p:spPr>
           <a:xfrm>
             <a:off x="731520" y="4359240"/>
-            <a:ext cx="416880" cy="416880"/>
+            <a:ext cx="416520" cy="416520"/>
           </a:xfrm>
           <a:prstGeom prst="ellipse">
             <a:avLst/>
@@ -25290,7 +25598,7 @@
       </p:sp>
       <p:pic>
         <p:nvPicPr>
-          <p:cNvPr id="381" name="Image 4" descr="preencoded.png"/>
+          <p:cNvPr id="382" name="Image 4" descr="preencoded.png"/>
           <p:cNvPicPr/>
           <p:nvPr/>
         </p:nvPicPr>
@@ -25301,7 +25609,7 @@
         <p:spPr>
           <a:xfrm>
             <a:off x="807120" y="4435200"/>
-            <a:ext cx="265680" cy="265680"/>
+            <a:ext cx="265320" cy="265320"/>
           </a:xfrm>
           <a:prstGeom prst="rect">
             <a:avLst/>
@@ -25314,14 +25622,14 @@
       </p:pic>
       <p:sp>
         <p:nvSpPr>
-          <p:cNvPr id="382" name="Text 18"/>
+          <p:cNvPr id="383" name="Text 18"/>
           <p:cNvSpPr/>
           <p:nvPr/>
         </p:nvSpPr>
         <p:spPr>
           <a:xfrm>
             <a:off x="1325880" y="4078080"/>
-            <a:ext cx="10146240" cy="307440"/>
+            <a:ext cx="10145880" cy="307080"/>
           </a:xfrm>
           <a:prstGeom prst="rect">
             <a:avLst/>
@@ -25375,14 +25683,14 @@
       </p:sp>
       <p:sp>
         <p:nvSpPr>
-          <p:cNvPr id="383" name="Text 19"/>
+          <p:cNvPr id="384" name="Text 19"/>
           <p:cNvSpPr/>
           <p:nvPr/>
         </p:nvSpPr>
         <p:spPr>
           <a:xfrm>
             <a:off x="1325880" y="4416480"/>
-            <a:ext cx="10146240" cy="380520"/>
+            <a:ext cx="10145880" cy="380160"/>
           </a:xfrm>
           <a:prstGeom prst="rect">
             <a:avLst/>
@@ -25436,14 +25744,14 @@
       </p:sp>
       <p:sp>
         <p:nvSpPr>
-          <p:cNvPr id="384" name="Text 20"/>
+          <p:cNvPr id="385" name="Text 20"/>
           <p:cNvSpPr/>
           <p:nvPr/>
         </p:nvSpPr>
         <p:spPr>
           <a:xfrm>
             <a:off x="1325880" y="4827960"/>
-            <a:ext cx="10146240" cy="270720"/>
+            <a:ext cx="10145880" cy="270360"/>
           </a:xfrm>
           <a:prstGeom prst="rect">
             <a:avLst/>
@@ -25497,14 +25805,14 @@
       </p:sp>
       <p:sp>
         <p:nvSpPr>
-          <p:cNvPr id="385" name="Shape 21"/>
+          <p:cNvPr id="386" name="Shape 21"/>
           <p:cNvSpPr/>
           <p:nvPr/>
         </p:nvSpPr>
         <p:spPr>
           <a:xfrm>
             <a:off x="457200" y="5289840"/>
-            <a:ext cx="11243520" cy="1217160"/>
+            <a:ext cx="11243160" cy="1216800"/>
           </a:xfrm>
           <a:prstGeom prst="roundRect">
             <a:avLst>
@@ -25552,14 +25860,14 @@
       </p:sp>
       <p:sp>
         <p:nvSpPr>
-          <p:cNvPr id="386" name="Shape 22"/>
+          <p:cNvPr id="387" name="Shape 22"/>
           <p:cNvSpPr/>
           <p:nvPr/>
         </p:nvSpPr>
         <p:spPr>
           <a:xfrm>
             <a:off x="731520" y="5689800"/>
-            <a:ext cx="416880" cy="416880"/>
+            <a:ext cx="416520" cy="416520"/>
           </a:xfrm>
           <a:prstGeom prst="ellipse">
             <a:avLst/>
@@ -25595,7 +25903,7 @@
       </p:sp>
       <p:pic>
         <p:nvPicPr>
-          <p:cNvPr id="387" name="Image 5" descr="preencoded.png"/>
+          <p:cNvPr id="388" name="Image 5" descr="preencoded.png"/>
           <p:cNvPicPr/>
           <p:nvPr/>
         </p:nvPicPr>
@@ -25606,7 +25914,7 @@
         <p:spPr>
           <a:xfrm>
             <a:off x="807120" y="5765400"/>
-            <a:ext cx="265680" cy="265680"/>
+            <a:ext cx="265320" cy="265320"/>
           </a:xfrm>
           <a:prstGeom prst="rect">
             <a:avLst/>
@@ -25619,14 +25927,14 @@
       </p:pic>
       <p:sp>
         <p:nvSpPr>
-          <p:cNvPr id="388" name="Text 23"/>
+          <p:cNvPr id="389" name="Text 23"/>
           <p:cNvSpPr/>
           <p:nvPr/>
         </p:nvSpPr>
         <p:spPr>
           <a:xfrm>
             <a:off x="1325880" y="5408640"/>
-            <a:ext cx="10146240" cy="307440"/>
+            <a:ext cx="10145880" cy="307080"/>
           </a:xfrm>
           <a:prstGeom prst="rect">
             <a:avLst/>
@@ -25680,14 +25988,14 @@
       </p:sp>
       <p:sp>
         <p:nvSpPr>
-          <p:cNvPr id="389" name="Text 24"/>
+          <p:cNvPr id="390" name="Text 24"/>
           <p:cNvSpPr/>
           <p:nvPr/>
         </p:nvSpPr>
         <p:spPr>
           <a:xfrm>
             <a:off x="1325880" y="5747040"/>
-            <a:ext cx="10146240" cy="380520"/>
+            <a:ext cx="10145880" cy="380160"/>
           </a:xfrm>
           <a:prstGeom prst="rect">
             <a:avLst/>
@@ -25741,14 +26049,14 @@
       </p:sp>
       <p:sp>
         <p:nvSpPr>
-          <p:cNvPr id="390" name="Text 25"/>
+          <p:cNvPr id="391" name="Text 25"/>
           <p:cNvSpPr/>
           <p:nvPr/>
         </p:nvSpPr>
         <p:spPr>
           <a:xfrm>
             <a:off x="1325880" y="6158520"/>
-            <a:ext cx="10146240" cy="270720"/>
+            <a:ext cx="10145880" cy="270360"/>
           </a:xfrm>
           <a:prstGeom prst="rect">
             <a:avLst/>
@@ -25802,14 +26110,14 @@
       </p:sp>
       <p:sp>
         <p:nvSpPr>
-          <p:cNvPr id="391" name="Text 26"/>
+          <p:cNvPr id="392" name="Text 26"/>
           <p:cNvSpPr/>
           <p:nvPr/>
         </p:nvSpPr>
         <p:spPr>
           <a:xfrm>
             <a:off x="10881360" y="6537960"/>
-            <a:ext cx="819360" cy="225000"/>
+            <a:ext cx="819000" cy="224640"/>
           </a:xfrm>
           <a:prstGeom prst="rect">
             <a:avLst/>
@@ -25893,14 +26201,14 @@
       </p:grpSpPr>
       <p:sp>
         <p:nvSpPr>
-          <p:cNvPr id="17" name=""/>
+          <p:cNvPr id="18" name=""/>
           <p:cNvSpPr/>
           <p:nvPr/>
         </p:nvSpPr>
         <p:spPr>
           <a:xfrm>
             <a:off x="914400" y="457200"/>
-            <a:ext cx="7769520" cy="363960"/>
+            <a:ext cx="7769160" cy="363960"/>
           </a:xfrm>
           <a:prstGeom prst="rect">
             <a:avLst/>
@@ -25950,7 +26258,7 @@
       </p:sp>
       <p:pic>
         <p:nvPicPr>
-          <p:cNvPr id="18" name=""/>
+          <p:cNvPr id="19" name=""/>
           <p:cNvPicPr/>
           <p:nvPr/>
         </p:nvPicPr>
@@ -25961,7 +26269,7 @@
         <p:spPr>
           <a:xfrm>
             <a:off x="256320" y="276840"/>
-            <a:ext cx="11754720" cy="6321600"/>
+            <a:ext cx="11754360" cy="6321240"/>
           </a:xfrm>
           <a:prstGeom prst="rect">
             <a:avLst/>
@@ -26004,7 +26312,7 @@
       </p:grpSpPr>
       <p:pic>
         <p:nvPicPr>
-          <p:cNvPr id="19" name=""/>
+          <p:cNvPr id="20" name=""/>
           <p:cNvPicPr/>
           <p:nvPr/>
         </p:nvPicPr>
@@ -26015,7 +26323,7 @@
         <p:spPr>
           <a:xfrm>
             <a:off x="243000" y="276840"/>
-            <a:ext cx="11754720" cy="6321600"/>
+            <a:ext cx="11754360" cy="6321240"/>
           </a:xfrm>
           <a:prstGeom prst="rect">
             <a:avLst/>
@@ -26058,7 +26366,7 @@
       </p:grpSpPr>
       <p:pic>
         <p:nvPicPr>
-          <p:cNvPr id="20" name=""/>
+          <p:cNvPr id="21" name=""/>
           <p:cNvPicPr/>
           <p:nvPr/>
         </p:nvPicPr>
@@ -26069,7 +26377,7 @@
         <p:spPr>
           <a:xfrm>
             <a:off x="243000" y="117000"/>
-            <a:ext cx="11754720" cy="6641640"/>
+            <a:ext cx="11754360" cy="6641280"/>
           </a:xfrm>
           <a:prstGeom prst="rect">
             <a:avLst/>
@@ -26112,7 +26420,7 @@
       </p:grpSpPr>
       <p:pic>
         <p:nvPicPr>
-          <p:cNvPr id="21" name=""/>
+          <p:cNvPr id="22" name=""/>
           <p:cNvPicPr/>
           <p:nvPr/>
         </p:nvPicPr>
@@ -26123,7 +26431,7 @@
         <p:spPr>
           <a:xfrm>
             <a:off x="243000" y="117000"/>
-            <a:ext cx="11754720" cy="6641640"/>
+            <a:ext cx="11754360" cy="6641280"/>
           </a:xfrm>
           <a:prstGeom prst="rect">
             <a:avLst/>
@@ -26166,7 +26474,7 @@
       </p:grpSpPr>
       <p:pic>
         <p:nvPicPr>
-          <p:cNvPr id="22" name=""/>
+          <p:cNvPr id="23" name=""/>
           <p:cNvPicPr/>
           <p:nvPr/>
         </p:nvPicPr>
@@ -26177,7 +26485,7 @@
         <p:spPr>
           <a:xfrm>
             <a:off x="228600" y="228600"/>
-            <a:ext cx="11592720" cy="6205680"/>
+            <a:ext cx="11592360" cy="6205320"/>
           </a:xfrm>
           <a:prstGeom prst="rect">
             <a:avLst/>
@@ -26220,14 +26528,14 @@
       </p:grpSpPr>
       <p:sp>
         <p:nvSpPr>
-          <p:cNvPr id="23" name="TextBox 1"/>
+          <p:cNvPr id="24" name="TextBox 1"/>
           <p:cNvSpPr/>
           <p:nvPr/>
         </p:nvSpPr>
         <p:spPr>
           <a:xfrm>
             <a:off x="502920" y="255960"/>
-            <a:ext cx="11154960" cy="485640"/>
+            <a:ext cx="11154600" cy="485640"/>
           </a:xfrm>
           <a:prstGeom prst="rect">
             <a:avLst/>
@@ -26280,14 +26588,14 @@
       </p:sp>
       <p:sp>
         <p:nvSpPr>
-          <p:cNvPr id="24" name="Rounded Rectangle 2"/>
+          <p:cNvPr id="25" name="Rounded Rectangle 2"/>
           <p:cNvSpPr/>
           <p:nvPr/>
         </p:nvSpPr>
         <p:spPr>
           <a:xfrm>
             <a:off x="365760" y="1005840"/>
-            <a:ext cx="3519720" cy="5074200"/>
+            <a:ext cx="3519360" cy="5073840"/>
           </a:xfrm>
           <a:prstGeom prst="roundRect">
             <a:avLst>
@@ -26352,14 +26660,14 @@
       </p:sp>
       <p:sp>
         <p:nvSpPr>
-          <p:cNvPr id="25" name="Rounded Rectangle 3"/>
+          <p:cNvPr id="26" name="Rounded Rectangle 3"/>
           <p:cNvSpPr/>
           <p:nvPr/>
         </p:nvSpPr>
         <p:spPr>
           <a:xfrm>
             <a:off x="640080" y="1572840"/>
-            <a:ext cx="2971080" cy="1325160"/>
+            <a:ext cx="2970720" cy="1324800"/>
           </a:xfrm>
           <a:prstGeom prst="roundRect">
             <a:avLst>
@@ -26533,14 +26841,14 @@
       </p:sp>
       <p:sp>
         <p:nvSpPr>
-          <p:cNvPr id="26" name="Rounded Rectangle 4"/>
+          <p:cNvPr id="27" name="Rounded Rectangle 4"/>
           <p:cNvSpPr/>
           <p:nvPr/>
         </p:nvSpPr>
         <p:spPr>
           <a:xfrm>
             <a:off x="640080" y="4160520"/>
-            <a:ext cx="2971080" cy="1690920"/>
+            <a:ext cx="2970720" cy="1690560"/>
           </a:xfrm>
           <a:prstGeom prst="roundRect">
             <a:avLst>
@@ -26721,14 +27029,14 @@
       </p:sp>
       <p:sp>
         <p:nvSpPr>
-          <p:cNvPr id="27" name="Rounded Rectangle 5"/>
+          <p:cNvPr id="28" name="Rounded Rectangle 5"/>
           <p:cNvSpPr/>
           <p:nvPr/>
         </p:nvSpPr>
         <p:spPr>
           <a:xfrm>
             <a:off x="4526280" y="1005840"/>
-            <a:ext cx="7268760" cy="5074200"/>
+            <a:ext cx="7268400" cy="5073840"/>
           </a:xfrm>
           <a:prstGeom prst="roundRect">
             <a:avLst>
@@ -26793,14 +27101,14 @@
       </p:sp>
       <p:sp>
         <p:nvSpPr>
-          <p:cNvPr id="28" name="Rounded Rectangle 6"/>
+          <p:cNvPr id="29" name="Rounded Rectangle 6"/>
           <p:cNvSpPr/>
           <p:nvPr/>
         </p:nvSpPr>
         <p:spPr>
           <a:xfrm>
             <a:off x="4800600" y="1572840"/>
-            <a:ext cx="3062520" cy="1325160"/>
+            <a:ext cx="3062160" cy="1324800"/>
           </a:xfrm>
           <a:prstGeom prst="roundRect">
             <a:avLst>
@@ -26952,14 +27260,14 @@
       </p:sp>
       <p:sp>
         <p:nvSpPr>
-          <p:cNvPr id="29" name="Rounded Rectangle 7"/>
+          <p:cNvPr id="30" name="Rounded Rectangle 7"/>
           <p:cNvSpPr/>
           <p:nvPr/>
         </p:nvSpPr>
         <p:spPr>
           <a:xfrm>
             <a:off x="8412480" y="1572840"/>
-            <a:ext cx="3108240" cy="1325160"/>
+            <a:ext cx="3107880" cy="1324800"/>
           </a:xfrm>
           <a:prstGeom prst="roundRect">
             <a:avLst>
@@ -27111,14 +27419,14 @@
       </p:sp>
       <p:sp>
         <p:nvSpPr>
-          <p:cNvPr id="30" name="Rounded Rectangle 8"/>
+          <p:cNvPr id="31" name="Rounded Rectangle 8"/>
           <p:cNvSpPr/>
           <p:nvPr/>
         </p:nvSpPr>
         <p:spPr>
           <a:xfrm>
             <a:off x="4800600" y="3703320"/>
-            <a:ext cx="6720120" cy="2148120"/>
+            <a:ext cx="6719760" cy="2147760"/>
           </a:xfrm>
           <a:prstGeom prst="roundRect">
             <a:avLst>
@@ -27183,14 +27491,14 @@
       </p:sp>
       <p:sp>
         <p:nvSpPr>
-          <p:cNvPr id="31" name="Rounded Rectangle 9"/>
+          <p:cNvPr id="32" name="Rounded Rectangle 9"/>
           <p:cNvSpPr/>
           <p:nvPr/>
         </p:nvSpPr>
         <p:spPr>
           <a:xfrm>
             <a:off x="5074920" y="4224600"/>
-            <a:ext cx="6171480" cy="1462320"/>
+            <a:ext cx="6171120" cy="1461960"/>
           </a:xfrm>
           <a:prstGeom prst="roundRect">
             <a:avLst>
@@ -27342,14 +27650,14 @@
       </p:sp>
       <p:cxnSp>
         <p:nvCxnSpPr>
-          <p:cNvPr id="32" name="Connector 7"/>
+          <p:cNvPr id="33" name="Connector 7"/>
           <p:cNvCxnSpPr/>
           <p:nvPr/>
         </p:nvCxnSpPr>
         <p:spPr>
           <a:xfrm>
             <a:off x="3639240" y="1993320"/>
-            <a:ext cx="1134360" cy="720"/>
+            <a:ext cx="1134720" cy="1080"/>
           </a:xfrm>
           <a:prstGeom prst="straightConnector1">
             <a:avLst/>
@@ -27365,14 +27673,14 @@
       </p:cxnSp>
       <p:sp>
         <p:nvSpPr>
-          <p:cNvPr id="33" name="Oval 6"/>
+          <p:cNvPr id="34" name="Oval 6"/>
           <p:cNvSpPr/>
           <p:nvPr/>
         </p:nvSpPr>
         <p:spPr>
           <a:xfrm>
             <a:off x="3913560" y="1645920"/>
-            <a:ext cx="291960" cy="291960"/>
+            <a:ext cx="291600" cy="291600"/>
           </a:xfrm>
           <a:prstGeom prst="ellipse">
             <a:avLst/>
@@ -27435,14 +27743,14 @@
       </p:sp>
       <p:sp>
         <p:nvSpPr>
-          <p:cNvPr id="34" name="TextBox 9"/>
+          <p:cNvPr id="35" name="TextBox 9"/>
           <p:cNvSpPr/>
           <p:nvPr/>
         </p:nvSpPr>
         <p:spPr>
           <a:xfrm>
             <a:off x="3291840" y="1280160"/>
-            <a:ext cx="1919520" cy="302400"/>
+            <a:ext cx="1919160" cy="302040"/>
           </a:xfrm>
           <a:prstGeom prst="rect">
             <a:avLst/>
@@ -27495,14 +27803,14 @@
       </p:sp>
       <p:cxnSp>
         <p:nvCxnSpPr>
-          <p:cNvPr id="35" name="Connector 8"/>
+          <p:cNvPr id="36" name="Connector 8"/>
           <p:cNvCxnSpPr/>
           <p:nvPr/>
         </p:nvCxnSpPr>
         <p:spPr>
           <a:xfrm>
             <a:off x="7881840" y="2230920"/>
-            <a:ext cx="503640" cy="720"/>
+            <a:ext cx="504000" cy="1080"/>
           </a:xfrm>
           <a:prstGeom prst="straightConnector1">
             <a:avLst/>
@@ -27518,14 +27826,14 @@
       </p:cxnSp>
       <p:sp>
         <p:nvSpPr>
-          <p:cNvPr id="36" name="Oval 7"/>
+          <p:cNvPr id="37" name="Oval 7"/>
           <p:cNvSpPr/>
           <p:nvPr/>
         </p:nvSpPr>
         <p:spPr>
           <a:xfrm>
             <a:off x="7973640" y="2395800"/>
-            <a:ext cx="291960" cy="291960"/>
+            <a:ext cx="291600" cy="291600"/>
           </a:xfrm>
           <a:prstGeom prst="ellipse">
             <a:avLst/>
@@ -27588,14 +27896,14 @@
       </p:sp>
       <p:cxnSp>
         <p:nvCxnSpPr>
-          <p:cNvPr id="37" name="Connector 9"/>
+          <p:cNvPr id="38" name="Connector 9"/>
           <p:cNvCxnSpPr/>
           <p:nvPr/>
         </p:nvCxnSpPr>
         <p:spPr>
           <a:xfrm>
             <a:off x="9966960" y="2926080"/>
-            <a:ext cx="720" cy="750240"/>
+            <a:ext cx="1080" cy="750600"/>
           </a:xfrm>
           <a:prstGeom prst="straightConnector1">
             <a:avLst/>
@@ -27611,14 +27919,14 @@
       </p:cxnSp>
       <p:sp>
         <p:nvSpPr>
-          <p:cNvPr id="38" name="Oval 8"/>
+          <p:cNvPr id="39" name="Oval 8"/>
           <p:cNvSpPr/>
           <p:nvPr/>
         </p:nvSpPr>
         <p:spPr>
           <a:xfrm>
             <a:off x="10058400" y="3154680"/>
-            <a:ext cx="291960" cy="291960"/>
+            <a:ext cx="291600" cy="291600"/>
           </a:xfrm>
           <a:prstGeom prst="ellipse">
             <a:avLst/>
@@ -27681,14 +27989,14 @@
       </p:sp>
       <p:sp>
         <p:nvSpPr>
-          <p:cNvPr id="39" name="TextBox 10"/>
+          <p:cNvPr id="40" name="TextBox 10"/>
           <p:cNvSpPr/>
           <p:nvPr/>
         </p:nvSpPr>
         <p:spPr>
           <a:xfrm>
             <a:off x="6949440" y="3127320"/>
-            <a:ext cx="3016800" cy="333360"/>
+            <a:ext cx="3016440" cy="333360"/>
           </a:xfrm>
           <a:prstGeom prst="rect">
             <a:avLst/>
@@ -27741,14 +28049,14 @@
       </p:sp>
       <p:cxnSp>
         <p:nvCxnSpPr>
-          <p:cNvPr id="40" name="Connector 10"/>
+          <p:cNvPr id="41" name="Connector 10"/>
           <p:cNvCxnSpPr/>
           <p:nvPr/>
         </p:nvCxnSpPr>
         <p:spPr>
           <a:xfrm flipH="1">
             <a:off x="3639240" y="2651760"/>
-            <a:ext cx="1134360" cy="720"/>
+            <a:ext cx="1134720" cy="1080"/>
           </a:xfrm>
           <a:prstGeom prst="straightConnector1">
             <a:avLst/>
@@ -27764,14 +28072,14 @@
       </p:cxnSp>
       <p:sp>
         <p:nvSpPr>
-          <p:cNvPr id="41" name="Oval 9"/>
+          <p:cNvPr id="42" name="Oval 9"/>
           <p:cNvSpPr/>
           <p:nvPr/>
         </p:nvSpPr>
         <p:spPr>
           <a:xfrm>
             <a:off x="3913560" y="2788920"/>
-            <a:ext cx="291960" cy="291960"/>
+            <a:ext cx="291600" cy="291600"/>
           </a:xfrm>
           <a:prstGeom prst="ellipse">
             <a:avLst/>
@@ -27834,14 +28142,14 @@
       </p:sp>
       <p:sp>
         <p:nvSpPr>
-          <p:cNvPr id="42" name="TextBox 11"/>
+          <p:cNvPr id="43" name="TextBox 11"/>
           <p:cNvSpPr/>
           <p:nvPr/>
         </p:nvSpPr>
         <p:spPr>
           <a:xfrm>
             <a:off x="3063240" y="3090600"/>
-            <a:ext cx="2376720" cy="302400"/>
+            <a:ext cx="2376360" cy="302040"/>
           </a:xfrm>
           <a:prstGeom prst="rect">
             <a:avLst/>
@@ -27894,14 +28202,14 @@
       </p:sp>
       <p:cxnSp>
         <p:nvCxnSpPr>
-          <p:cNvPr id="43" name="Connector 11"/>
+          <p:cNvPr id="44" name="Connector 11"/>
           <p:cNvCxnSpPr/>
           <p:nvPr/>
         </p:nvCxnSpPr>
         <p:spPr>
           <a:xfrm>
             <a:off x="2121120" y="2926080"/>
-            <a:ext cx="720" cy="1207440"/>
+            <a:ext cx="1080" cy="1207800"/>
           </a:xfrm>
           <a:prstGeom prst="straightConnector1">
             <a:avLst/>
@@ -27917,14 +28225,14 @@
       </p:cxnSp>
       <p:sp>
         <p:nvSpPr>
-          <p:cNvPr id="44" name="TextBox 12"/>
+          <p:cNvPr id="45" name="TextBox 12"/>
           <p:cNvSpPr/>
           <p:nvPr/>
         </p:nvSpPr>
         <p:spPr>
           <a:xfrm>
             <a:off x="2240280" y="2994120"/>
-            <a:ext cx="1599480" cy="1055160"/>
+            <a:ext cx="1599120" cy="1055160"/>
           </a:xfrm>
           <a:prstGeom prst="rect">
             <a:avLst/>
@@ -28035,14 +28343,14 @@
       </p:sp>
       <p:cxnSp>
         <p:nvCxnSpPr>
-          <p:cNvPr id="45" name="Connector 12"/>
+          <p:cNvPr id="46" name="Connector 12"/>
           <p:cNvCxnSpPr/>
           <p:nvPr/>
         </p:nvCxnSpPr>
         <p:spPr>
           <a:xfrm>
             <a:off x="3639240" y="4983480"/>
-            <a:ext cx="1390680" cy="720"/>
+            <a:ext cx="1391040" cy="1080"/>
           </a:xfrm>
           <a:prstGeom prst="straightConnector1">
             <a:avLst/>
@@ -28059,14 +28367,14 @@
       </p:cxnSp>
       <p:sp>
         <p:nvSpPr>
-          <p:cNvPr id="46" name="Oval 10"/>
+          <p:cNvPr id="47" name="Oval 10"/>
           <p:cNvSpPr/>
           <p:nvPr/>
         </p:nvSpPr>
         <p:spPr>
           <a:xfrm>
             <a:off x="4206240" y="5074920"/>
-            <a:ext cx="291960" cy="291960"/>
+            <a:ext cx="291600" cy="291600"/>
           </a:xfrm>
           <a:prstGeom prst="ellipse">
             <a:avLst/>
@@ -28129,14 +28437,14 @@
       </p:sp>
       <p:sp>
         <p:nvSpPr>
-          <p:cNvPr id="47" name="TextBox 13"/>
+          <p:cNvPr id="48" name="TextBox 13"/>
           <p:cNvSpPr/>
           <p:nvPr/>
         </p:nvSpPr>
         <p:spPr>
           <a:xfrm>
             <a:off x="3611880" y="4382280"/>
-            <a:ext cx="1462320" cy="318240"/>
+            <a:ext cx="1461960" cy="318240"/>
           </a:xfrm>
           <a:prstGeom prst="rect">
             <a:avLst/>
@@ -28189,14 +28497,14 @@
       </p:sp>
       <p:sp>
         <p:nvSpPr>
-          <p:cNvPr id="48" name="TextBox 14"/>
+          <p:cNvPr id="49" name="TextBox 14"/>
           <p:cNvSpPr/>
           <p:nvPr/>
         </p:nvSpPr>
         <p:spPr>
           <a:xfrm>
             <a:off x="3611880" y="4664520"/>
-            <a:ext cx="1462320" cy="302400"/>
+            <a:ext cx="1461960" cy="302040"/>
           </a:xfrm>
           <a:prstGeom prst="rect">
             <a:avLst/>
@@ -28249,14 +28557,14 @@
       </p:sp>
       <p:sp>
         <p:nvSpPr>
-          <p:cNvPr id="49" name="TextBox 15"/>
+          <p:cNvPr id="50" name="TextBox 15"/>
           <p:cNvSpPr/>
           <p:nvPr/>
         </p:nvSpPr>
         <p:spPr>
           <a:xfrm>
             <a:off x="365760" y="6217920"/>
-            <a:ext cx="11337840" cy="363960"/>
+            <a:ext cx="11337480" cy="363960"/>
           </a:xfrm>
           <a:prstGeom prst="rect">
             <a:avLst/>
